--- a/lecture/neural_sde_lecture.pptx
+++ b/lecture/neural_sde_lecture.pptx
@@ -757,7 +757,7 @@
 • Lines 3–4: drift and diffusion as one term.
 • Line 5: reversible Heun. Line 7: BacksolveAdjoint, the O(1)-memory adjoint.
 • Last line: plain jax.grad. The adjoint is invisible to the user.
-• I ran it (repo: github.com/nishadw/neural-sdes-jax). Adjoint gradients match full backprop to ~1e-5 relative error, and the error falls as the step count rises: it's discretisation error, because this is optimise-then-discretise.
+• I ran it (repo: github.com/nishadw/neural-sde). Adjoint gradients match full backprop to ~1e-5 relative error, and the error falls as the step count rises: it's discretisation error, because this is optimise-then-discretise.
 • Gotcha I hit: parameters must go through args=, not a closure, or the custom adjoint can't see them.
 • drift and diffusion have signature (t, z, params); diffusion returns a d×d matrix.</a:t>
             </a:r>
@@ -7727,7 +7727,7 @@
                   <a:srgbClr val="9AA3AF"/>
                 </a:solidFill>
               </a:rPr>
-              <a:t>Code and benchmarks: github.com/nishadw/neural-sdes-jax</a:t>
+              <a:t>Code and benchmarks: github.com/nishadw/neural-sde</a:t>
             </a:r>
             <a:endParaRPr lang="en-US" sz="1100" dirty="0"/>
           </a:p>

--- a/lecture/neural_sde_lecture.pptx
+++ b/lecture/neural_sde_lecture.pptx
@@ -36,9 +36,10 @@
     <p:sldId id="284" r:id="rId30"/>
     <p:sldId id="285" r:id="rId31"/>
     <p:sldId id="286" r:id="rId32"/>
+    <p:sldId id="287" r:id="rId33"/>
   </p:sldIdLst>
   <p:notesMasterIdLst>
-    <p:notesMasterId r:id="rId33"/>
+    <p:notesMasterId r:id="rId34"/>
   </p:notesMasterIdLst>
   <p:sldSz cx="9144000" cy="5143500"/>
   <p:notesSz cx="5143500" cy="9144000"/>
@@ -137,7 +138,7 @@
   <p:extLst>
     <p:ext uri="{521415D9-36F7-43E2-AB2F-B90AF26B5E84}">
       <p14:sectionLst xmlns:p14="http://schemas.microsoft.com/office/powerpoint/2010/main">
-        <p14:section name="Opening" id="{784af9b3-bd2d-465a-730f-488c4bdc5323}">
+        <p14:section name="Opening" id="{6dcb4a44-cb3c-7d3e-4d8c-d4fc1794653f}">
           <p14:sldIdLst>
             <p14:sldId id="256"/>
             <p14:sldId id="257"/>
@@ -147,14 +148,14 @@
             <p14:sldId id="261"/>
           </p14:sldIdLst>
         </p14:section>
-        <p14:section name="Part 1: Differentiating solvers" id="{f4b35ef6-1ba4-bab1-0da3-9d563f5f85c5}">
+        <p14:section name="Part 1: Differentiating solvers" id="{17866b30-d6d4-de88-eec5-42ae0d086c86}">
           <p14:sldIdLst>
             <p14:sldId id="262"/>
             <p14:sldId id="263"/>
             <p14:sldId id="264"/>
           </p14:sldIdLst>
         </p14:section>
-        <p14:section name="Part 2: Stochastic dynamics" id="{e0251638-dec3-5bf0-01e1-e861ece2d004}">
+        <p14:section name="Part 2: Stochastic dynamics" id="{0a6187db-55ac-c5a0-ffef-0ade5139d1ee}">
           <p14:sldIdLst>
             <p14:sldId id="265"/>
             <p14:sldId id="266"/>
@@ -162,14 +163,14 @@
             <p14:sldId id="268"/>
           </p14:sldIdLst>
         </p14:section>
-        <p14:section name="Part 3: Gradients through noise" id="{efb2c905-df1b-599b-96d8-1f729b2f5b46}">
+        <p14:section name="Part 3: Gradients through noise" id="{3a27f9f0-d64c-a863-5001-1652f17dca50}">
           <p14:sldIdLst>
             <p14:sldId id="269"/>
             <p14:sldId id="270"/>
             <p14:sldId id="271"/>
           </p14:sldIdLst>
         </p14:section>
-        <p14:section name="Part 4: Training" id="{6173a57b-f62b-5318-8ac0-36adbd1cf1bc}">
+        <p14:section name="Part 4: Training" id="{d9c61fbb-1ca5-48c6-2109-4947a92495e4}">
           <p14:sldIdLst>
             <p14:sldId id="272"/>
             <p14:sldId id="273"/>
@@ -179,7 +180,7 @@
             <p14:sldId id="277"/>
           </p14:sldIdLst>
         </p14:section>
-        <p14:section name="Appendix" id="{14d21c49-b0c3-e1b5-ac63-c593602d798c}">
+        <p14:section name="Appendix" id="{bc5b354f-fd39-b764-c9d9-9c849cafcccb}">
           <p14:sldIdLst>
             <p14:sldId id="278"/>
             <p14:sldId id="279"/>
@@ -190,6 +191,7 @@
             <p14:sldId id="284"/>
             <p14:sldId id="285"/>
             <p14:sldId id="286"/>
+            <p14:sldId id="287"/>
           </p14:sldIdLst>
         </p14:section>
       </p14:sectionLst>
@@ -597,9 +599,11 @@
             <a:r>
               <a:rPr lang="en-US" dirty="0"/>
               <a:t>[0:00 – 0:20]
-PLAN: ~23 min talk + 5 min discussion. SKIP-IF-SHORT: slides 7 and 20. Appendix (A1–A9) is not presented; jump there only if asked.
-• Topic: gradients through stochastic differential equations, and how to train models built from them.
-• Running example from a real food-science paper: Xavier et al., Foods 2024. Photos of avocados ripening, stages 1 to 5 shown here.</a:t>
+PLAN: 25:00 total = 20:00 talk + 5:00 discussion. If behind at slide 7 or 19, skip them.
+CHECKPOINTS: slide 9 by 6:00 · slide 14 by 12:15 · slide 20 by 18:30 · discussion by 20:00.
+Appendix (A1–A10) is not presented; jump there only if asked.
+• Hi, I'm Nishad. Today: neural SDEs, and how to take gradients through randomness.
+• One running example the whole way: when does an avocado go bad?</a:t>
             </a:r>
             <a:endParaRPr lang="en-US" dirty="0"/>
           </a:p>
@@ -687,7 +691,7 @@
           <a:p>
             <a:r>
               <a:rPr lang="en-US" dirty="0"/>
-              <a:t>[8:30 – 10:15]
+              <a:t>[7:25 – 8:55]
 • An SDE is shorthand for the integral equation; the dW integral is Itô (left endpoint).
 • Increments are independent N(0, Δt); (dW)² = dt is why stochastic calculus differs.
 • Itô's lemma: the extra ½ f″ σ² dt term. Example: d log S picks up −½σ².
@@ -782,7 +786,7 @@
           <a:p>
             <a:r>
               <a:rPr lang="en-US" dirty="0"/>
-              <a:t>[10:15 – 11:45]
+              <a:t>[8:55 – 10:15]
 • Encode each photo; Z_t evolves as an SDE between photos; an ordinal head maps Z to stage probabilities; shelf life τ is when the ripeness score crosses the stage-4/5 cut.
 • Drift: Arrhenius factor κ(c) times a neural rate. E_a activation energy, R gas constant, T in kelvin. Diffusion σ_θ: variability across fruit and storage.
 • Ordinal head: cumulative-logit model, P(y ≤ k) = sigmoid(c_k − q(Z)), cut points c_k ordered. b = c_4 defines 'end of shelf life'.
@@ -876,7 +880,7 @@
           <a:p>
             <a:r>
               <a:rPr lang="en-US" dirty="0"/>
-              <a:t>[11:45 – 12:45]
+              <a:t>[10:15 – 11:10]
 • Using their per-group slopes: rates 0.228 (10 °C) and 0.473 (20 °C) stages/day. Q10 ≈ 2.07, so Eₐ ≈ 50 kJ/mol, a plausible enzymatic value.
 • Predict room temperature (mean 18.7 °C): 2.32 days per stage. Observed: 1.93. Ambient fruit ripened ~20% faster than temperature alone explains; you'd need 21.3 °C, near the top of the recorded range.
 • Likely culprits: humidity wasn't controlled in Tamb, and temperature fluctuated. Point: a physics prior gets you most of the way; a learned residual absorbs what it misses. That's why the drift is κ(c) × network.
@@ -969,14 +973,14 @@
           <a:p>
             <a:r>
               <a:rPr lang="en-US" dirty="0"/>
-              <a:t>[12:45 – 14:00]
-• Back-of-envelope: if stage drifts at rate v with noise σ, the time to cover distance L is inverse-Gaussian with mean L/v and sd √(Lσ²/v³).
-• Two hypotheses. σ fixed across temperatures: error ratio (v₂₀/v₁₀)^{3/2} ≈ 3.0 for T10/T20. Temperature rescales the whole clock (σ² ∝ v): ratio v₂₀/v₁₀ ≈ 2.1.
-• Confound: stage quantization alone (slide 5's floor, |α|/4) also scales as 1/v, so it predicts the same 2.07.
-• Observed (MAE as a proxy for sd): 2.33. Above 2.07, so there is extra spread at 10 °C beyond quantization; below 3.0. Three numbers can't separate σ-scaling from quantization, so I read this as 'consistent with drift + diffusion', not a fit of σ(T).
-• Tamb comes out lower than either. Consistent with Tamb being a different regime (humidity, fluctuating temperature), which slide 12 also showed.
-• Caveat: MAE of a stage-based estimate, not the sd of τ, and ignores classification noise. It's a sanity check that a drift–diffusion model is the right shape, not a fit.
-IF ASKED — why MAE ∝ sd? For a fixed distribution family, MAE is a constant multiple of sd (0.8 for Gaussian). That assumes the coefficient of variation is small; under fixed σ the inverse-Gaussian CV ∝ v^(−1/2) differs 1.44× between T10 and T20, so treat the ratios as rough.</a:t>
+              <a:t>[11:10 – 12:15]
+• Back-of-envelope: stage drifts at rate v with noise σ. Time to cover distance L is inverse Gaussian: mean L/v, sd √(Lσ²/v³).
+• If σ is the same at all temperatures, the T10/T20 error ratio is (v₂₀/v₁₀)^{3/2} ≈ 3.0. If temperature speeds up the whole clock (σ² ∝ v), it's v₂₀/v₁₀ ≈ 2.1.
+• Careful: quantization alone also gives 2.07.
+• Observed: 2.33. Above quantization, so extra spread at 10 °C. Three numbers can't pin σ(T); it's a shape check, not a fit.
+IF ASKED — Tamb is lower than every prediction? Consistent with Tamb being a different regime (uncontrolled humidity, fluctuating temperature), as slide 12 showed.
+IF ASKED — why MAE ∝ sd? For a fixed distribution shape, MAE is a constant multiple of sd (0.8 for Gaussian). That assumes small CV; under fixed σ the inverse-Gaussian CV differs 1.44× between T10 and T20, so treat the ratios as rough.
+IF ASKED — caveats? MAE of a stage-based estimate, not the sd of τ, and labels are human. Derivation in A4.</a:t>
             </a:r>
             <a:endParaRPr lang="en-US" dirty="0"/>
           </a:p>
@@ -1064,7 +1068,7 @@
           <a:p>
             <a:r>
               <a:rPr lang="en-US" dirty="0"/>
-              <a:t>[14:00 – 15:45]
+              <a:t>[12:15 – 13:45]
 • Pathwise: Z_T as a deterministic function of θ and fixed noise W; differentiate inside E. VAE reparameterization trick. Low variance; needs f differentiable.
 • Score function: E[f ∇ log p_θ]; any f, high variance.
 • Plot: for each fixed noise path, 'spoiled by t*' is a step in θ, derivative zero almost everywhere. The expectation (red) has nonzero slope. Pathwise returns 0: a biased gradient, not a noisy one.
@@ -1158,11 +1162,13 @@
           <a:p>
             <a:r>
               <a:rPr lang="en-US" dirty="0"/>
-              <a:t>[15:45 – 17:15]
-• Compare slide 9: an extra term per noise channel, aᵀ ∂σ_j/∂z ∘ dW^j, and the parameter gradient gets an integral against dW.
-• Requirement 1: backward pass must see the same noise. A virtual Brownian tree regenerates W(s) from a seed by recursive Brownian-bridge sampling (A6).
-• Requirement 2: in Stratonovich form the ordinary chain rule holds, so the ODE derivation carries over. μ here is the Stratonovich drift: convert the Itô model first (μ̃ = μ − ½Σ(∂σ_j/∂z)σ_j), or the gradients are wrong.
-• Exactness: Kidger et al. NeurIPS 2021: reversible Heun is algebraically reversible; with its matching discrete adjoint, gradients are exact up to floating-point round-off at O(1) memory. In torchsde. Diffrax's BacksolveAdjoint is the continuous adjoint, approximate even with reversible Heun.
+              <a:t>[13:45 – 15:05]
+• Compare slide 9: one extra term per noise channel, aᵀ ∂σ_j/∂z ∘ dW^j.
+• Requirement 1: the backward pass must see the same noise. A virtual Brownian tree regenerates W(s) from a seed (A6).
+• Requirement 2: Stratonovich form, so the ordinary chain rule holds. Convert an Itô model's drift first, or the gradients are wrong.
+• Exact version: reversible Heun with its matching discrete adjoint (Kidger 2021, torchsde). Diffrax's BacksolveAdjoint is approximate.
+IF ASKED — conversion formula? μ̃ = μ − ½ Σ_j (∂σ_j/∂z) σ_j. Zero when σ doesn't depend on z.
+IF ASKED — why is reversible Heun exact? It's algebraically reversible, so the backward pass recovers the forward states to round-off; pair it with the discrete adjoint of that scheme.
 IF ASKED — Itô directly? Possible, but the backward-in-time Itô SDE needs extra correction terms.</a:t>
             </a:r>
             <a:endParaRPr lang="en-US" dirty="0"/>
@@ -1251,8 +1257,8 @@
           <a:p>
             <a:r>
               <a:rPr lang="en-US" dirty="0"/>
-              <a:t>[17:15 – 18:00]
-If time or asked for a demo: run lecture/neural_sde_demo.py live, or play assets/demo.mp4 from the repo.
+              <a:t>[15:05 – 15:45]
+DEMO: no time in the talk. If someone asks during discussion, play assets/demo.mp4 (52 s).
 • Memory (log scale): backprop linear in steps, checkpointing ~log, adjoint flat but ~150 MB. The method needs only 2d + p ≈ 110 KB; the rest is a Diffrax/XLA implementation constant growing with params and noise channels (A8).
 • Time: adjoint ~60× slower.
 • Error: adjoint vs backprop falls ~1/steps: discretization error of optimize-then-discretize. Plain Heun slightly better than reversible Heun here: reversibility alone doesn't make the continuous adjoint exact.
@@ -1345,7 +1351,7 @@
           <a:p>
             <a:r>
               <a:rPr lang="en-US" dirty="0"/>
-              <a:t>[18:00 – 19:30]
+              <a:t>[15:45 – 17:05]
 • Latent SDE (Li et al. 2020): a VAE whose latent is a path.
 • Prior: our ripening SDE given only storage. Posterior: same σ, drift also sees the images (e.g., a GRU run backward over encoded photos gives a context per time).
 • ELBO: expected log-likelihood of observed stage labels at photo times − KL of initial state − KL between the SDEs.
@@ -1440,11 +1446,14 @@
           <a:p>
             <a:r>
               <a:rPr lang="en-US" dirty="0"/>
-              <a:t>[19:30 – 20:30]
-• Song et al. 2021: a fixed forward SDE noises data; Anderson (1982): its time reversal needs the score ∇ log p_t. Learn s_θ: the reverse SDE is a neural SDE.
-• Probability-flow ODE: same marginals as the reverse SDE when s_θ is the true score; deterministic sampling; likelihoods via change of variables (Hutchinson trace estimator). Flow matching trains that ODE's velocity directly (π0 robot policies).
-• Training is simulation-free: forward SDE is affine with known time-varying coefficients, so p(x_t | x_0) is Gaussian in closed form. No solver, no adjoint during training.
-• Contrast: our model learns the dynamics, so it must backprop through the solve.</a:t>
+              <a:t>[17:05 – 18:00]
+• Song et al. 2021: a fixed forward SDE turns data into noise. Reversing it needs the score ∇ log p_t; learn it as s_θ. The reverse SDE is a neural SDE.
+• Probability-flow ODE: same marginals, deterministic sampling.
+• Training is simulation-free: p(x_t | x_0) is Gaussian in closed form. No solver, no adjoint.
+• Contrast: our avocado model learns the dynamics, so it must backprop through the solve.
+IF ASKED — who showed the reversal? Anderson (1982).
+IF ASKED — flow matching? Trains the probability-flow ODE's velocity directly; π0 robot policies use it.
+IF ASKED — likelihoods? Change of variables along the ODE, with a Hutchinson trace estimator.</a:t>
             </a:r>
             <a:endParaRPr lang="en-US" dirty="0"/>
           </a:p>
@@ -1532,14 +1541,9 @@
           <a:p>
             <a:r>
               <a:rPr lang="en-US" dirty="0"/>
-              <a:t>[20:30 – 21:30]
-TODO (project): fill the TBD cells once the experiment runs; keep the paper's 70/15/15 by-fruit split so numbers are comparable.
-• Left column: the paper's numbers, by sample, 5-stage.
-• MAE compares point accuracy (use the predictive median of τ).
-• CRPS (continuous ranked probability score) and interval coverage evaluate the whole predictive distribution. A point forecast has CRPS equal to its MAE, so the baseline is 1.04 days; a calibrated distribution should beat it. Coverage needs an interval, which the paper doesn't give (a fairer baseline: Gaussian intervals from Fig. 6's per-stage sds).
-• Caveats on the baseline: the paper doesn't say whether Table 6 is test-only or whether α was fit on all fruit, and 'by sample' keeps the better of the two sides. Refit α on the training fruit when reproducing it.
-IF ASKED — CRPS? CRPS(F, y) = ∫ (F(t) − 1{y ≤ t})² dt; reduces to MAE for a point forecast; lower is better; proper scoring rule.
-IF ASKED — what if results aren't ready? Present this as the experimental plan; the baseline column is real.</a:t>
+              <a:t>[18:00 – 18:30] — SKIP-IF-SHORT.
+• Same pattern as the avocado: hidden state, randomness, sparse observations, decisions on the distribution of futures.
+• My repo also has the finance case: a neural local-vol SDE calibrated to a Heston smile by backprop through Monte Carlo (0.31 vol pts RMSE vs 4.21 flat).</a:t>
             </a:r>
             <a:endParaRPr lang="en-US" dirty="0"/>
           </a:p>
@@ -1627,7 +1631,7 @@
           <a:p>
             <a:r>
               <a:rPr lang="en-US" dirty="0"/>
-              <a:t>[0:20 – 1:20]
+              <a:t>[0:20 – 1:10]
 • Data: Xavier, Rodrigues and Silva, Foods 2024, open access. 478 Hass avocados photographed daily on both sides until overripe.
 • Three groups: 10 °C, 20 °C (both 85% humidity), and room temperature, which drifted between 15.8 and 21.7 °C with humidity not logged.
 • Labels: a 5-stage ripening index, refined to 10 stages. End of shelf life is reaching stage 5 (stage 9 on the 10-stage scale).
@@ -1722,9 +1726,13 @@
           <a:p>
             <a:r>
               <a:rPr lang="en-US" dirty="0"/>
-              <a:t>[21:30 – 22:00] — SKIP-IF-SHORT.
-• Same pattern as the avocado: hidden state, randomness, sparse observations, decisions on the distribution of futures.
-• My repo also has the finance case: a neural local-vol SDE calibrated to a Heston smile by backprop through Monte Carlo (0.31 vol pts RMSE vs 4.21 flat).</a:t>
+              <a:t>[18:30 – 19:30] — analysis portion.
+• Adjoint: not the gradient of what the forward solver computed. ANODE showed it can be badly wrong; 1e-4 to 1e-6 here.
+• Stiffness: learned dynamics stiffen and solvers slow down; regularize kinetic energy or Jacobian norms.
+• Our target is discontinuous: naive pathwise training gives zero gradient.
+• Identifiability: fast drift + small noise can mimic slow drift + big noise. Test on synthetic data with a known SDE.
+• Paper-specific: surface marks look like ripening, and ambient storage doesn't follow temperature.
+IF ASKED — latent reparameterization? Any invertible map of the latent space leaves the likelihood unchanged; the ordinal head anchors the ripeness direction.</a:t>
             </a:r>
             <a:endParaRPr lang="en-US" dirty="0"/>
           </a:p>
@@ -1812,12 +1820,9 @@
           <a:p>
             <a:r>
               <a:rPr lang="en-US" dirty="0"/>
-              <a:t>[22:00 – 23:00] — analysis portion.
-• Adjoint gradient isn't the gradient of what the forward solver computed; ANODE showed it can be badly wrong on stiff problems; measured 1e-4 to 1e-6 here.
-• Learned dynamics stiffen; adaptive solvers take more steps; regularize kinetic energy / Jacobian norms.
-• Our main target is discontinuous: naive pathwise training gives zero gradient.
-• Identifiability: latent reparameterizations leave the likelihood unchanged; fast drift + small noise can mimic slow drift + big noise with sparse observations. Test by recovering a known SDE on synthetic data.
-• Paper-specific: marks and wind rub (they report atypical visual damage that season) look like ripening; and ambient storage behaves differently from what temperature predicts (slide 12).</a:t>
+              <a:t>[19:30 – 20:00]
+• Four things to remember. Read each line once; don't add new material.
+• Then: 'Let's open it up. Three questions to start.'</a:t>
             </a:r>
             <a:endParaRPr lang="en-US" dirty="0"/>
           </a:p>
@@ -1905,11 +1910,12 @@
           <a:p>
             <a:r>
               <a:rPr lang="en-US" dirty="0"/>
-              <a:t>[23:00 – 28:00]
+              <a:t>[20:00 – 25:00] — hard stop at 25:00.
+~1:30 per question, then close.
 • Q1: bias vs variance. Bridge crossing: exact per step for frozen coefficients, low variance. Score function: unbiased, noisy, drift params only. Sigmoid: needs ε annealing.
 • Q2: fit the latent SDE with σ_θ(c) free per group, compare to σ ∝ √κ(c) by held-out likelihood; or estimate per-group variance of daily stage increments directly from the label sequences.
 • Q3 (Prof. Lin's lectures): stochastic forcing adds Monte Carlo variance and needs same-noise replay; for contact-rich systems noise can smooth the loss landscape (randomized smoothing).
-• Close: thank you; questions. Appendix follows (not presented).</a:t>
+• Close at 25:00: 'Thanks. Code and slides are on GitHub.' Appendix is for questions only.</a:t>
             </a:r>
             <a:endParaRPr lang="en-US" dirty="0"/>
           </a:p>
@@ -2613,11 +2619,11 @@
           <a:p>
             <a:r>
               <a:rPr lang="en-US" dirty="0"/>
-              <a:t>[1:20 – 2:20]
+              <a:t>[1:10 – 2:00]
 • Their method: a CNN with transfer learning classifies the stage from one photo; a per-group linear regression turns the stage into days left.
 • Left: ~78% exact on 5 stages, &gt;99% within one stage. 10 stages: ~60% exact, ~93% within one.
 • Right: mean absolute error in shelf life. Even with the TRUE stage label ('true stage' column), error is 1.7 days at 10 °C. So most of the error isn't the classifier; it's the stage → days map.
-• Note the paper's headline 88.8% is accuracy on the best side of each fruit; the table shows per-picture averages.
+IF ASKED — the abstract says 88.8%? That's accuracy on the best side of each fruit; the table shows per-picture averages.
 IF ASKED — what's 'by sample'? Each fruit has two photos (sides); 'by sample' uses the better/combined side, which improves accuracy because one side can have marks.</a:t>
             </a:r>
             <a:endParaRPr lang="en-US" dirty="0"/>
@@ -2794,7 +2800,10 @@
           <a:p>
             <a:r>
               <a:rPr lang="en-US" dirty="0"/>
-              <a:t>Appendix A9.</a:t>
+              <a:t>Appendix A9. How the model would be scored against the paper; no new experiments are claimed.
+• Keep the paper's 70/15/15 by-fruit split; refit α on training fruit only.
+• CRPS(F, y) = ∫ (F(t) − 1{y ≤ t})² dt; equals absolute error for a point forecast; proper scoring rule.
+• Baseline caveats: unclear whether Table 6 is test-only; 'by sample' keeps the better of two sides.</a:t>
             </a:r>
             <a:endParaRPr lang="en-US" dirty="0"/>
           </a:p>
@@ -2818,6 +2827,94 @@
             <a:fld id="{F7021451-1387-4CA6-816F-3879F97B5CBC}" type="slidenum">
               <a:rPr lang="en-US"/>
               <a:t>31</a:t>
+            </a:fld>
+            <a:endParaRPr lang="en-US"/>
+          </a:p>
+        </p:txBody>
+      </p:sp>
+    </p:spTree>
+    <p:extLst>
+      <p:ext uri="{BB962C8B-B14F-4D97-AF65-F5344CB8AC3E}">
+        <p14:creationId xmlns:p14="http://schemas.microsoft.com/office/powerpoint/2010/main" val="1024086991"/>
+      </p:ext>
+    </p:extLst>
+  </p:cSld>
+  <p:clrMapOvr>
+    <a:masterClrMapping/>
+  </p:clrMapOvr>
+</p:notes>
+</file>
+
+<file path=ppt/notesSlides/notesSlide32.xml><?xml version="1.0" encoding="utf-8"?>
+<p:notes xmlns:a="http://schemas.openxmlformats.org/drawingml/2006/main" xmlns:r="http://schemas.openxmlformats.org/officeDocument/2006/relationships" xmlns:p="http://schemas.openxmlformats.org/presentationml/2006/main">
+  <p:cSld>
+    <p:spTree>
+      <p:nvGrpSpPr>
+        <p:cNvPr id="1" name=""/>
+        <p:cNvGrpSpPr/>
+        <p:nvPr/>
+      </p:nvGrpSpPr>
+      <p:grpSpPr>
+        <a:xfrm>
+          <a:off x="0" y="0"/>
+          <a:ext cx="0" cy="0"/>
+          <a:chOff x="0" y="0"/>
+          <a:chExt cx="0" cy="0"/>
+        </a:xfrm>
+      </p:grpSpPr>
+      <p:sp>
+        <p:nvSpPr>
+          <p:cNvPr id="2" name="Slide Image Placeholder 1"/>
+          <p:cNvSpPr>
+            <a:spLocks noGrp="1" noRot="1" noChangeAspect="1"/>
+          </p:cNvSpPr>
+          <p:nvPr>
+            <p:ph type="sldImg"/>
+          </p:nvPr>
+        </p:nvSpPr>
+        <p:spPr/>
+      </p:sp>
+      <p:sp>
+        <p:nvSpPr>
+          <p:cNvPr id="3" name="Notes Placeholder 2"/>
+          <p:cNvSpPr>
+            <a:spLocks noGrp="1"/>
+          </p:cNvSpPr>
+          <p:nvPr>
+            <p:ph type="body" idx="1"/>
+          </p:nvPr>
+        </p:nvSpPr>
+        <p:spPr/>
+        <p:txBody>
+          <a:bodyPr/>
+          <a:lstStyle/>
+          <a:p>
+            <a:r>
+              <a:rPr lang="en-US" dirty="0"/>
+              <a:t>Appendix A10.</a:t>
+            </a:r>
+            <a:endParaRPr lang="en-US" dirty="0"/>
+          </a:p>
+        </p:txBody>
+      </p:sp>
+      <p:sp>
+        <p:nvSpPr>
+          <p:cNvPr id="4" name="Slide Number Placeholder 3"/>
+          <p:cNvSpPr>
+            <a:spLocks noGrp="1"/>
+          </p:cNvSpPr>
+          <p:nvPr>
+            <p:ph type="sldNum" sz="quarter" idx="10"/>
+          </p:nvPr>
+        </p:nvSpPr>
+        <p:spPr/>
+        <p:txBody>
+          <a:bodyPr/>
+          <a:lstStyle/>
+          <a:p>
+            <a:fld id="{F7021451-1387-4CA6-816F-3879F97B5CBC}" type="slidenum">
+              <a:rPr lang="en-US"/>
+              <a:t>32</a:t>
             </a:fld>
             <a:endParaRPr lang="en-US"/>
           </a:p>
@@ -2882,10 +2979,10 @@
           <a:p>
             <a:r>
               <a:rPr lang="en-US" dirty="0"/>
-              <a:t>[2:20 – 3:20]
+              <a:t>[2:00 – 2:50]
 • Their linear regression, Days Left = α(stage − 5), can be read as a constant-velocity ODE in stage: ds/dt ≈ v with v = 1/|α|.
 • Rates: 0.23 stages/day at 10 °C, 0.47 at 20 °C, 0.52 at room temperature. 20 °C ripens ~2× faster than 10 °C, as the paper reports.
-• Left plot (their Fig. 6a, T10): the error bars are standard deviations of days left at each stage, often ±2–3 days. A deterministic ODE can't represent that spread. That's the diffusion term.
+• Left plot (their Fig. 6a, T10): the error bars are standard deviations of days left at each stage, often ±2–3 days. A deterministic ODE can't represent that spread; a diffusion term can.
 IF ASKED — is that inversion exact? No: regressing days on stage and inverting isn't the same as regressing stage on days (slopes differ by a factor R², ~4% here); stage is ordinal; and their fit is pinned at stage 5. Close enough to read off rates.
 IF ASKED — R² ≈ 0.96 looks great; why change it? R² measures fit of the mean; the decision (sell/discount by Friday) needs the distribution around the mean, which R² doesn't capture.</a:t>
             </a:r>
@@ -2975,13 +3072,14 @@
           <a:p>
             <a:r>
               <a:rPr lang="en-US" dirty="0"/>
-              <a:t>[3:20 – 4:20]
-• Their Fig. 11, 10 °C group: density of shelf-life error against ripening index. Left uses the human labels, right the model's predictions. Average error ≈ 2 days at stages 1–4, tails to ~6 days; zero at stage 5 by definition.
-• Table: part of this is unavoidable. A stage lasts |α| days, and one label can't tell day 1 of a stage from day 4. Uniform position within a stage alone gives MAE = |α|/4: 65% of the error at 10 °C, 91% at room temperature.
-• The excess (fruit-to-fruit rate variation, labeling noise, within-fruit randomness) is what the model has to represent as a distribution. It's largest at 10 °C, where the horizon is longest.
-• Slide 13 compares the groups with a first-passage calculation.
-IF ASKED — couldn't this just be label noise? Partly: the 'attributed' labels are human, so they carry labeling noise too. Separating diffusion (sd ∝ √horizon) from fruit-to-fruit rate variation (sd ∝ horizon) needs the per-stage sds in Fig. 6; this slide doesn't settle it.
-IF ASKED — why |α|/4? The MAE of a uniform distribution of width w about its center is w/4.</a:t>
+              <a:t>[2:50 – 3:45]
+• Fig. 11, 10 °C group: shelf-life error by stage. Left human labels, right model predictions.
+• Average error ≈ 2 days at stages 1–4, tails to ~6 days.
+• Part is unavoidable: one label can't tell day 1 of a stage from day 4. That floor, |α|/4, is 65% of the error at 10 °C, 91% at room temperature.
+• The rest is what a model must represent as a distribution. It's largest at 10 °C, the longest horizon.
+IF ASKED — couldn't this just be label noise? Partly: the 'attributed' labels are human. Separating diffusion (sd ∝ √horizon) from fruit-to-fruit rate variation (sd ∝ horizon) needs the per-stage sds in Fig. 6.
+IF ASKED — why |α|/4? The MAE of a uniform distribution of width w about its center is w/4.
+IF ASKED — why zero at stage 5? Days left is 0 by definition once the fruit is in stage 5.</a:t>
             </a:r>
             <a:endParaRPr lang="en-US" dirty="0"/>
           </a:p>
@@ -3069,10 +3167,11 @@
           <a:p>
             <a:r>
               <a:rPr lang="en-US" dirty="0"/>
-              <a:t>[4:20 – 5:00]
+              <a:t>[3:45 – 4:20]
 • The paper's model uses one image and outputs a point. Rows: what we want.
-• A sequence model (GRU/Transformer with time-gap features and a hazard head) gets partway; a latent ODE handles irregular time and can spread through an uncertain initial state or per-fruit rate (sd ∝ horizon), but that uncertainty collapses as images accumulate. It has no noise that keeps arriving.
+• A sequence model gets partway. A latent ODE handles irregular time, but has no noise that keeps arriving.
 • Latent SDE: all five by construction; its diffusion adds variance that grows like √h along the way.
+IF ASKED — can't a latent ODE spread? Yes, via an uncertain initial state or per-fruit rate (sd ∝ horizon), but that collapses as images accumulate.
 IF ASKED — 'partial' for the paper on temperature: they fit a separate slope per storage group; that's temperature-dependent but not a function of temperature (can't interpolate to 15 °C).</a:t>
             </a:r>
             <a:endParaRPr lang="en-US" dirty="0"/>
@@ -3161,7 +3260,7 @@
           <a:p>
             <a:r>
               <a:rPr lang="en-US" dirty="0"/>
-              <a:t>[5:00 – 5:45] — SKIP-IF-SHORT (most of the room knows this).
+              <a:t>[4:20 – 5:00] — SKIP-IF-SHORT (most of the room knows this).
 • Residual block h + f(h) = one explicit Euler step. Δt → 0 gives dh/dt = f_θ(h, t); the solver chooses the steps.
 • Bottom: in the avocado setting, z(0) is an encoding of the first photo, f evolves it under storage condition c. The paper's model is the special case f = constant rate v_g in stage space.
 IF ASKED — costs? Each forward pass is a solve; adaptive solvers' step counts (NFE) tend to grow during training.</a:t>
@@ -3252,7 +3351,7 @@
           <a:p>
             <a:r>
               <a:rPr lang="en-US" dirty="0"/>
-              <a:t>[5:45 – 6:45]
+              <a:t>[5:00 – 5:55]
 • Row 1: treat the solver as code and backprop. Exact gradient of the computed solution; stores every step.
 • Row 2: Griewank's binomial checkpointing (revolve): O(log N) checkpoints, O(N log N) recomputation, still exact.
 • Row 3: derive the continuous gradient as a backward ODE (next slide) and solve it. Memory independent of N, but the backward re-solve doesn't retrace the forward discrete path, so the gradient is approximate.
@@ -3344,7 +3443,7 @@
           <a:p>
             <a:r>
               <a:rPr lang="en-US" dirty="0"/>
-              <a:t>[6:45 – 8:30] — core slide.
+              <a:t>[5:55 – 7:25] — core slide.
 • a(t) = ∂L/∂z(t): sensitivity of the loss to the state at time t. Linear ODE backward from a(T) = ∂L/∂z(T).
 • a_θ starts at 0 at T; its value at 0 is dL/dθ.
 • z is re-integrated backward rather than stored: source of O(1) memory and of the approximation.
@@ -3580,6 +3679,38 @@
 </p:sldLayout>
 </file>
 
+<file path=ppt/slideLayouts/slideLayout3.xml><?xml version="1.0" encoding="utf-8"?>
+<p:sldLayout xmlns:a="http://schemas.openxmlformats.org/drawingml/2006/main" xmlns:r="http://schemas.openxmlformats.org/officeDocument/2006/relationships" xmlns:p="http://schemas.openxmlformats.org/presentationml/2006/main" preserve="1">
+  <p:cSld name="TITLE">
+    <p:bg>
+      <p:bgPr>
+        <a:solidFill>
+          <a:srgbClr val="FFFFFF"/>
+        </a:solidFill>
+      </p:bgPr>
+    </p:bg>
+    <p:spTree>
+      <p:nvGrpSpPr>
+        <p:cNvPr id="1" name=""/>
+        <p:cNvGrpSpPr/>
+        <p:nvPr/>
+      </p:nvGrpSpPr>
+      <p:grpSpPr>
+        <a:xfrm>
+          <a:off x="0" y="0"/>
+          <a:ext cx="0" cy="0"/>
+          <a:chOff x="0" y="0"/>
+          <a:chExt cx="0" cy="0"/>
+        </a:xfrm>
+      </p:grpSpPr>
+    </p:spTree>
+  </p:cSld>
+  <p:clrMapOvr>
+    <a:masterClrMapping/>
+  </p:clrMapOvr>
+</p:sldLayout>
+</file>
+
 <file path=ppt/slideMasters/slideMaster1.xml><?xml version="1.0" encoding="utf-8"?>
 <p:sldMaster xmlns:a="http://schemas.openxmlformats.org/drawingml/2006/main" xmlns:r="http://schemas.openxmlformats.org/officeDocument/2006/relationships" xmlns:p="http://schemas.openxmlformats.org/presentationml/2006/main">
   <p:cSld>
@@ -3648,6 +3779,7 @@
   <p:sldLayoutIdLst>
     <p:sldLayoutId id="2147483649" r:id="rId1"/>
     <p:sldLayoutId id="2147483650" r:id="rId2"/>
+    <p:sldLayoutId id="2147483651" r:id="rId3"/>
   </p:sldLayoutIdLst>
   <p:hf sldNum="0" hdr="0" ftr="0" dt="0"/>
   <p:txStyles>
@@ -3920,16 +4052,40 @@
           <a:chExt cx="0" cy="0"/>
         </a:xfrm>
       </p:grpSpPr>
-      <p:sp>
-        <p:nvSpPr>
-          <p:cNvPr id="2" name="Text 0"/>
+      <p:pic>
+        <p:nvPicPr>
+          <p:cNvPr id="2" name="title_paths.png" descr="img/title_paths.png">    </p:cNvPr>
+          <p:cNvPicPr>
+            <a:picLocks noChangeAspect="1"/>
+          </p:cNvPicPr>
+          <p:nvPr/>
+        </p:nvPicPr>
+        <p:blipFill>
+          <a:blip r:embed="rId1"/>
+          <a:stretch>
+            <a:fillRect/>
+          </a:stretch>
+        </p:blipFill>
+        <p:spPr>
+          <a:xfrm>
+            <a:off x="4846320" y="1234440"/>
+            <a:ext cx="3840480" cy="2688336"/>
+          </a:xfrm>
+          <a:prstGeom prst="rect">
+            <a:avLst/>
+          </a:prstGeom>
+        </p:spPr>
+      </p:pic>
+      <p:sp>
+        <p:nvSpPr>
+          <p:cNvPr id="3" name="Text 0"/>
           <p:cNvSpPr txBox="1"/>
           <p:nvPr/>
         </p:nvSpPr>
         <p:spPr>
           <a:xfrm>
-            <a:off x="457200" y="502920"/>
-            <a:ext cx="8229600" cy="256032"/>
+            <a:off x="548640" y="1417320"/>
+            <a:ext cx="5486400" cy="777240"/>
           </a:xfrm>
           <a:prstGeom prst="rect">
             <a:avLst/>
@@ -3945,43 +4101,7 @@
               <a:buNone/>
             </a:pPr>
             <a:r>
-              <a:rPr lang="en-US" sz="1000" b="1" spc="150" kern="0" dirty="0">
-                <a:solidFill>
-                  <a:srgbClr val="6B7280"/>
-                </a:solidFill>
-              </a:rPr>
-              <a:t>CMSC 838B  ·  STUDENT LECTURE  ·  FALL 2026</a:t>
-            </a:r>
-            <a:endParaRPr lang="en-US" sz="1000" dirty="0"/>
-          </a:p>
-        </p:txBody>
-      </p:sp>
-      <p:sp>
-        <p:nvSpPr>
-          <p:cNvPr id="3" name="Text 1"/>
-          <p:cNvSpPr txBox="1"/>
-          <p:nvPr/>
-        </p:nvSpPr>
-        <p:spPr>
-          <a:xfrm>
-            <a:off x="457200" y="822960"/>
-            <a:ext cx="8229600" cy="640080"/>
-          </a:xfrm>
-          <a:prstGeom prst="rect">
-            <a:avLst/>
-          </a:prstGeom>
-          <a:noFill/>
-          <a:ln/>
-        </p:spPr>
-        <p:txBody>
-          <a:bodyPr wrap="square" lIns="0" tIns="0" rIns="0" bIns="0" rtlCol="0" anchor="t"/>
-          <a:lstStyle/>
-          <a:p>
-            <a:pPr indent="0" marL="0">
-              <a:buNone/>
-            </a:pPr>
-            <a:r>
-              <a:rPr lang="en-US" sz="3600" b="1" dirty="0">
+              <a:rPr lang="en-US" sz="4400" b="1" dirty="0">
                 <a:solidFill>
                   <a:srgbClr val="1F2328"/>
                 </a:solidFill>
@@ -3991,20 +4111,45 @@
               </a:rPr>
               <a:t>Neural SDEs</a:t>
             </a:r>
-            <a:endParaRPr lang="en-US" sz="3600" dirty="0"/>
+            <a:endParaRPr lang="en-US" sz="4400" dirty="0"/>
           </a:p>
         </p:txBody>
       </p:sp>
       <p:sp>
         <p:nvSpPr>
-          <p:cNvPr id="4" name="Text 2"/>
+          <p:cNvPr id="4" name="Shape 1"/>
+          <p:cNvSpPr/>
+          <p:nvPr/>
+        </p:nvSpPr>
+        <p:spPr>
+          <a:xfrm>
+            <a:off x="566928" y="2286000"/>
+            <a:ext cx="640080" cy="45720"/>
+          </a:xfrm>
+          <a:prstGeom prst="rect">
+            <a:avLst/>
+          </a:prstGeom>
+          <a:solidFill>
+            <a:srgbClr val="C8102E"/>
+          </a:solidFill>
+          <a:ln w="12700">
+            <a:solidFill>
+              <a:srgbClr val="C8102E"/>
+            </a:solidFill>
+            <a:prstDash val="solid"/>
+          </a:ln>
+        </p:spPr>
+      </p:sp>
+      <p:sp>
+        <p:nvSpPr>
+          <p:cNvPr id="5" name="Text 2"/>
           <p:cNvSpPr txBox="1"/>
           <p:nvPr/>
         </p:nvSpPr>
         <p:spPr>
           <a:xfrm>
-            <a:off x="457200" y="1463040"/>
-            <a:ext cx="8229600" cy="365760"/>
+            <a:off x="548640" y="2468880"/>
+            <a:ext cx="5486400" cy="365760"/>
           </a:xfrm>
           <a:prstGeom prst="rect">
             <a:avLst/>
@@ -4033,14 +4178,14 @@
       </p:sp>
       <p:sp>
         <p:nvSpPr>
-          <p:cNvPr id="5" name="Text 3"/>
+          <p:cNvPr id="6" name="Text 3"/>
           <p:cNvSpPr txBox="1"/>
           <p:nvPr/>
         </p:nvSpPr>
         <p:spPr>
           <a:xfrm>
-            <a:off x="457200" y="1874520"/>
-            <a:ext cx="8229600" cy="274320"/>
+            <a:off x="548640" y="3886200"/>
+            <a:ext cx="5486400" cy="274320"/>
           </a:xfrm>
           <a:prstGeom prst="rect">
             <a:avLst/>
@@ -4056,38 +4201,27 @@
               <a:buNone/>
             </a:pPr>
             <a:r>
-              <a:rPr lang="en-US" sz="1200" dirty="0">
+              <a:rPr lang="en-US" sz="1400" b="1" dirty="0">
                 <a:solidFill>
-                  <a:srgbClr val="6B7280"/>
+                  <a:srgbClr val="1F2328"/>
                 </a:solidFill>
               </a:rPr>
-              <a:t>Running example: post-harvest ripening of 'Hass' avocado  ·  </a:t>
+              <a:t>Nishad Wajge</a:t>
             </a:r>
-            <a:pPr indent="0" marL="0">
-              <a:buNone/>
-            </a:pPr>
-            <a:r>
-              <a:rPr lang="en-US" sz="1200" i="1" dirty="0">
-                <a:solidFill>
-                  <a:srgbClr val="6B7280"/>
-                </a:solidFill>
-              </a:rPr>
-              <a:t>Xavier, Rodrigues &amp; Silva, Foods 13:1150 (2024)</a:t>
-            </a:r>
-            <a:endParaRPr lang="en-US" sz="1200" dirty="0"/>
+            <a:endParaRPr lang="en-US" sz="1400" dirty="0"/>
           </a:p>
         </p:txBody>
       </p:sp>
       <p:sp>
         <p:nvSpPr>
-          <p:cNvPr id="6" name="Text 4"/>
+          <p:cNvPr id="7" name="Text 4"/>
           <p:cNvSpPr txBox="1"/>
           <p:nvPr/>
         </p:nvSpPr>
         <p:spPr>
           <a:xfrm>
-            <a:off x="457200" y="2286000"/>
-            <a:ext cx="8229600" cy="274320"/>
+            <a:off x="548640" y="4160520"/>
+            <a:ext cx="5486400" cy="274320"/>
           </a:xfrm>
           <a:prstGeom prst="rect">
             <a:avLst/>
@@ -4103,179 +4237,14 @@
               <a:buNone/>
             </a:pPr>
             <a:r>
-              <a:rPr lang="en-US" sz="1250" b="1" dirty="0">
-                <a:solidFill>
-                  <a:srgbClr val="1F2328"/>
-                </a:solidFill>
-              </a:rPr>
-              <a:t>Nishad Wajge  ·  University of Maryland</a:t>
-            </a:r>
-            <a:endParaRPr lang="en-US" sz="1250" dirty="0"/>
-          </a:p>
-        </p:txBody>
-      </p:sp>
-      <p:pic>
-        <p:nvPicPr>
-          <p:cNvPr id="7" name="p_fig1_stages.jpg" descr="img/p_fig1_stages.jpg">    </p:cNvPr>
-          <p:cNvPicPr>
-            <a:picLocks noChangeAspect="1"/>
-          </p:cNvPicPr>
-          <p:nvPr/>
-        </p:nvPicPr>
-        <p:blipFill>
-          <a:blip r:embed="rId1"/>
-          <a:stretch>
-            <a:fillRect/>
-          </a:stretch>
-        </p:blipFill>
-        <p:spPr>
-          <a:xfrm>
-            <a:off x="457200" y="2743200"/>
-            <a:ext cx="8229600" cy="1796796"/>
-          </a:xfrm>
-          <a:prstGeom prst="rect">
-            <a:avLst/>
-          </a:prstGeom>
-        </p:spPr>
-      </p:pic>
-      <p:sp>
-        <p:nvSpPr>
-          <p:cNvPr id="8" name="Text 5"/>
-          <p:cNvSpPr txBox="1"/>
-          <p:nvPr/>
-        </p:nvSpPr>
-        <p:spPr>
-          <a:xfrm>
-            <a:off x="457200" y="4590288"/>
-            <a:ext cx="7315200" cy="201168"/>
-          </a:xfrm>
-          <a:prstGeom prst="rect">
-            <a:avLst/>
-          </a:prstGeom>
-          <a:noFill/>
-          <a:ln/>
-        </p:spPr>
-        <p:txBody>
-          <a:bodyPr wrap="square" lIns="0" tIns="0" rIns="0" bIns="0" rtlCol="0" anchor="t"/>
-          <a:lstStyle/>
-          <a:p>
-            <a:pPr indent="0" marL="0">
-              <a:buNone/>
-            </a:pPr>
-            <a:r>
-              <a:rPr lang="en-US" sz="800" i="1" dirty="0">
+              <a:rPr lang="en-US" sz="1150" dirty="0">
                 <a:solidFill>
                   <a:srgbClr val="6B7280"/>
                 </a:solidFill>
               </a:rPr>
-              <a:t>Ripening stages 1–5. Fig. 1, Xavier, Rodrigues &amp; Silva, Foods 13:1150 (2024), CC BY 3.0.</a:t>
+              <a:t>CMSC 838B  ·  University of Maryland  ·  Fall 2026</a:t>
             </a:r>
-            <a:endParaRPr lang="en-US" sz="800" dirty="0"/>
-          </a:p>
-        </p:txBody>
-      </p:sp>
-      <p:sp>
-        <p:nvSpPr>
-          <p:cNvPr id="10" name="Text 0"/>
-          <p:cNvSpPr/>
-          <p:nvPr>
-            <p:ph idx="100" type="body" hasCustomPrompt="1"/>
-          </p:nvPr>
-        </p:nvSpPr>
-        <p:spPr>
-          <a:xfrm>
-            <a:off x="457200" y="274320"/>
-            <a:ext cx="8229600" cy="256032"/>
-          </a:xfrm>
-          <a:prstGeom prst="rect">
-            <a:avLst/>
-          </a:prstGeom>
-          <a:noFill/>
-          <a:ln/>
-        </p:spPr>
-        <p:txBody>
-          <a:bodyPr wrap="square" lIns="0" tIns="0" rIns="0" bIns="0" rtlCol="0" anchor="t"/>
-          <a:lstStyle/>
-          <a:p>
-            <a:pPr indent="0" marL="0">
-              <a:buNone/>
-            </a:pPr>
-            <a:endParaRPr lang="en-US" sz="950" dirty="0"/>
-          </a:p>
-        </p:txBody>
-      </p:sp>
-      <p:sp>
-        <p:nvSpPr>
-          <p:cNvPr id="11" name="Text 0"/>
-          <p:cNvSpPr/>
-          <p:nvPr>
-            <p:ph idx="101" type="title" hasCustomPrompt="1"/>
-          </p:nvPr>
-        </p:nvSpPr>
-        <p:spPr>
-          <a:xfrm>
-            <a:off x="457200" y="493776"/>
-            <a:ext cx="8229600" cy="548640"/>
-          </a:xfrm>
-          <a:prstGeom prst="rect">
-            <a:avLst/>
-          </a:prstGeom>
-          <a:noFill/>
-          <a:ln/>
-        </p:spPr>
-        <p:txBody>
-          <a:bodyPr wrap="square" lIns="0" tIns="0" rIns="0" bIns="0" rtlCol="0" anchor="t"/>
-          <a:lstStyle/>
-          <a:p>
-            <a:pPr algn="l" indent="0" marL="0">
-              <a:buNone/>
-            </a:pPr>
-            <a:endParaRPr lang="en-US" sz="2500" dirty="0"/>
-          </a:p>
-        </p:txBody>
-      </p:sp>
-      <p:sp>
-        <p:nvSpPr>
-          <p:cNvPr id="25" name="Slide Number Placeholder 0"/>
-          <p:cNvSpPr>
-            <a:spLocks noGrp="1"/>
-          </p:cNvSpPr>
-          <p:nvPr>
-            <p:ph type="sldNum" sz="quarter" idx="4294967295"/>
-          </p:nvPr>
-        </p:nvSpPr>
-        <p:spPr>
-          <a:xfrm>
-            <a:off x="8412480" y="4828032"/>
-            <a:ext cx="365760" cy="201168"/>
-          </a:xfrm>
-          <a:prstGeom prst="rect">
-            <a:avLst/>
-          </a:prstGeom>
-          <a:extLst>
-            <a:ext uri="{C572A759-6A51-4108-AA02-DFA0A04FC94B}">
-              <ma14:wrappingTextBoxFlag xmlns:ma14="http://schemas.microsoft.com/office/mac/drawingml/2011/main" val="0"/>
-            </a:ext>
-          </a:extLst>
-        </p:spPr>
-        <p:txBody>
-          <a:bodyPr/>
-          <a:lstStyle>
-            <a:lvl1pPr>
-              <a:defRPr sz="900">
-                <a:solidFill>
-                  <a:srgbClr val="6B7280"/>
-                </a:solidFill>
-              </a:defRPr>
-            </a:lvl1pPr>
-          </a:lstStyle>
-          <a:p>
-            <a:pPr algn="r"/>
-            <a:fld id="{F7021451-1387-4CA6-816F-3879F97B5CBC}" type="slidenum">
-              <a:rPr b="0" lang="en-US"/>
-              <a:t>1</a:t>
-            </a:fld>
-            <a:endParaRPr lang="en-US"/>
+            <a:endParaRPr lang="en-US" sz="1150" dirty="0"/>
           </a:p>
         </p:txBody>
       </p:sp>
@@ -8039,7 +8008,7 @@
                   <a:srgbClr val="1F2328"/>
                 </a:solidFill>
               </a:rPr>
-              <a:t>T10/T20 = 2.33 exceeds quantization alone (2.07): extra spread at 10 °C. Three numbers can't pin σ(T).</a:t>
+              <a:t>Observed 2.33 &gt; 2.07 from quantization alone: extra spread at 10 °C.</a:t>
             </a:r>
             <a:endParaRPr lang="en-US" sz="1250" dirty="0"/>
           </a:p>
@@ -14263,7 +14232,7 @@
                   <a:schemeClr val="tx2"/>
                 </a:solidFill>
               </a:rPr>
-              <a:t>RUNNING EXAMPLE</a:t>
+              <a:t>BEYOND PRODUCE</a:t>
             </a:r>
             <a:endParaRPr lang="en-US" sz="950" dirty="0"/>
           </a:p>
@@ -14304,7 +14273,7 @@
                 <a:ea typeface="Arial" pitchFamily="34" charset="-122"/>
                 <a:cs typeface="Arial" pitchFamily="34" charset="-120"/>
               </a:rPr>
-              <a:t>Proposed Evaluation Against the Paper's Baseline</a:t>
+              <a:t>Same Structure Elsewhere</a:t>
             </a:r>
             <a:endParaRPr lang="en-US" sz="2500" dirty="0"/>
           </a:p>
@@ -14363,7 +14332,7 @@
                   <a:srgbClr val="1F2328"/>
                 </a:solidFill>
               </a:rPr>
-              <a:t>Same by-fruit split and MAE as the paper, plus calibration metrics that reward a distribution.</a:t>
+              <a:t>Wherever decisions depend on the distribution over trajectories.</a:t>
             </a:r>
             <a:endParaRPr lang="en-US" sz="1250" dirty="0"/>
           </a:p>
@@ -14385,19 +14354,19 @@
         </p:nvGraphicFramePr>
         <p:xfrm>
           <a:off x="457200" y="1280160"/>
-          <a:ext cx="7863840" cy="914400"/>
+          <a:ext cx="8229600" cy="914400"/>
         </p:xfrm>
         <a:graphic>
           <a:graphicData uri="http://schemas.openxmlformats.org/drawingml/2006/table">
             <a:tbl>
               <a:tblPr/>
               <a:tblGrid>
-                <a:gridCol w="2377440"/>
-                <a:gridCol w="2377440"/>
-                <a:gridCol w="1554480"/>
-                <a:gridCol w="1554480"/>
+                <a:gridCol w="1463040"/>
+                <a:gridCol w="1463040"/>
+                <a:gridCol w="2468880"/>
+                <a:gridCol w="2834640"/>
               </a:tblGrid>
-              <a:tr h="347472">
+              <a:tr h="365760">
                 <a:tc>
                   <a:txBody>
                     <a:bodyPr/>
@@ -14407,7 +14376,7 @@
                         <a:buNone/>
                       </a:pPr>
                       <a:r>
-                        <a:rPr lang="en-US" sz="1050" b="1" dirty="0">
+                        <a:rPr lang="en-US" sz="1000" b="1" dirty="0">
                           <a:solidFill>
                             <a:srgbClr val="6B7280"/>
                           </a:solidFill>
@@ -14415,9 +14384,9 @@
                           <a:ea typeface="Calibri" pitchFamily="34" charset="-122"/>
                           <a:cs typeface="Calibri" pitchFamily="34" charset="-120"/>
                         </a:rPr>
-                        <a:t>Shelf-life metric</a:t>
-                      </a:r>
-                      <a:endParaRPr lang="en-US" sz="1050" dirty="0">
+                        <a:t>Domain</a:t>
+                      </a:r>
+                      <a:endParaRPr lang="en-US" sz="1000" dirty="0">
                         <a:latin typeface="Calibri" charset="0"/>
                         <a:ea typeface="Calibri" charset="0"/>
                         <a:cs typeface="Calibri" charset="0"/>
@@ -14450,11 +14419,11 @@
                     <a:bodyPr/>
                     <a:lstStyle/>
                     <a:p>
-                      <a:pPr algn="ctr" indent="0" marL="0">
-                        <a:buNone/>
-                      </a:pPr>
-                      <a:r>
-                        <a:rPr lang="en-US" sz="1050" b="1" dirty="0">
+                      <a:pPr algn="l" indent="0" marL="0">
+                        <a:buNone/>
+                      </a:pPr>
+                      <a:r>
+                        <a:rPr lang="en-US" sz="1000" b="1" dirty="0">
                           <a:solidFill>
                             <a:srgbClr val="6B7280"/>
                           </a:solidFill>
@@ -14462,9 +14431,9 @@
                           <a:ea typeface="Calibri" pitchFamily="34" charset="-122"/>
                           <a:cs typeface="Calibri" pitchFamily="34" charset="-120"/>
                         </a:rPr>
-                        <a:t>Xavier et al. (CNN + linear)</a:t>
-                      </a:r>
-                      <a:endParaRPr lang="en-US" sz="1050" dirty="0">
+                        <a:t>Latent state</a:t>
+                      </a:r>
+                      <a:endParaRPr lang="en-US" sz="1000" dirty="0">
                         <a:latin typeface="Calibri" charset="0"/>
                         <a:ea typeface="Calibri" charset="0"/>
                         <a:cs typeface="Calibri" charset="0"/>
@@ -14497,11 +14466,11 @@
                     <a:bodyPr/>
                     <a:lstStyle/>
                     <a:p>
-                      <a:pPr algn="ctr" indent="0" marL="0">
-                        <a:buNone/>
-                      </a:pPr>
-                      <a:r>
-                        <a:rPr lang="en-US" sz="1050" b="1" dirty="0">
+                      <a:pPr algn="l" indent="0" marL="0">
+                        <a:buNone/>
+                      </a:pPr>
+                      <a:r>
+                        <a:rPr lang="en-US" sz="1000" b="1" dirty="0">
                           <a:solidFill>
                             <a:srgbClr val="6B7280"/>
                           </a:solidFill>
@@ -14509,9 +14478,9 @@
                           <a:ea typeface="Calibri" pitchFamily="34" charset="-122"/>
                           <a:cs typeface="Calibri" pitchFamily="34" charset="-120"/>
                         </a:rPr>
-                        <a:t>Latent ODE</a:t>
-                      </a:r>
-                      <a:endParaRPr lang="en-US" sz="1050" dirty="0">
+                        <a:t>Neural SDE role</a:t>
+                      </a:r>
+                      <a:endParaRPr lang="en-US" sz="1000" dirty="0">
                         <a:latin typeface="Calibri" charset="0"/>
                         <a:ea typeface="Calibri" charset="0"/>
                         <a:cs typeface="Calibri" charset="0"/>
@@ -14544,21 +14513,21 @@
                     <a:bodyPr/>
                     <a:lstStyle/>
                     <a:p>
-                      <a:pPr algn="ctr" indent="0" marL="0">
-                        <a:buNone/>
-                      </a:pPr>
-                      <a:r>
-                        <a:rPr lang="en-US" sz="1050" b="1" dirty="0">
-                          <a:solidFill>
-                            <a:srgbClr val="C8102E"/>
-                          </a:solidFill>
-                          <a:latin typeface="Calibri" pitchFamily="34" charset="0"/>
-                          <a:ea typeface="Calibri" pitchFamily="34" charset="-122"/>
-                          <a:cs typeface="Calibri" pitchFamily="34" charset="-120"/>
-                        </a:rPr>
-                        <a:t>Latent SDE</a:t>
-                      </a:r>
-                      <a:endParaRPr lang="en-US" sz="1050" dirty="0">
+                      <a:pPr algn="l" indent="0" marL="0">
+                        <a:buNone/>
+                      </a:pPr>
+                      <a:r>
+                        <a:rPr lang="en-US" sz="1000" b="1" dirty="0">
+                          <a:solidFill>
+                            <a:srgbClr val="6B7280"/>
+                          </a:solidFill>
+                          <a:latin typeface="Calibri" pitchFamily="34" charset="0"/>
+                          <a:ea typeface="Calibri" pitchFamily="34" charset="-122"/>
+                          <a:cs typeface="Calibri" pitchFamily="34" charset="-120"/>
+                        </a:rPr>
+                        <a:t>Reference</a:t>
+                      </a:r>
+                      <a:endParaRPr lang="en-US" sz="1000" dirty="0">
                         <a:latin typeface="Calibri" charset="0"/>
                         <a:ea typeface="Calibri" charset="0"/>
                         <a:cs typeface="Calibri" charset="0"/>
@@ -14587,7 +14556,7 @@
                   </a:tcPr>
                 </a:tc>
               </a:tr>
-              <a:tr h="347472">
+              <a:tr h="365760">
                 <a:tc>
                   <a:txBody>
                     <a:bodyPr/>
@@ -14597,7 +14566,7 @@
                         <a:buNone/>
                       </a:pPr>
                       <a:r>
-                        <a:rPr lang="en-US" sz="1150" dirty="0">
+                        <a:rPr lang="en-US" sz="1100" dirty="0">
                           <a:solidFill>
                             <a:srgbClr val="1F2328"/>
                           </a:solidFill>
@@ -14605,9 +14574,9 @@
                           <a:ea typeface="Calibri" pitchFamily="34" charset="-122"/>
                           <a:cs typeface="Calibri" pitchFamily="34" charset="-120"/>
                         </a:rPr>
-                        <a:t>MAE, T10 (days)</a:t>
-                      </a:r>
-                      <a:endParaRPr lang="en-US" sz="1150" dirty="0">
+                        <a:t>Weather</a:t>
+                      </a:r>
+                      <a:endParaRPr lang="en-US" sz="1100" dirty="0">
                         <a:latin typeface="Calibri" charset="0"/>
                         <a:ea typeface="Calibri" charset="0"/>
                         <a:cs typeface="Calibri" charset="0"/>
@@ -14640,11 +14609,11 @@
                     <a:bodyPr/>
                     <a:lstStyle/>
                     <a:p>
-                      <a:pPr algn="ctr" indent="0" marL="0">
-                        <a:buNone/>
-                      </a:pPr>
-                      <a:r>
-                        <a:rPr lang="en-US" sz="1150" dirty="0">
+                      <a:pPr algn="l" indent="0" marL="0">
+                        <a:buNone/>
+                      </a:pPr>
+                      <a:r>
+                        <a:rPr lang="en-US" sz="1100" dirty="0">
                           <a:solidFill>
                             <a:srgbClr val="1F2328"/>
                           </a:solidFill>
@@ -14652,9 +14621,9 @@
                           <a:ea typeface="Calibri" pitchFamily="34" charset="-122"/>
                           <a:cs typeface="Calibri" pitchFamily="34" charset="-120"/>
                         </a:rPr>
-                        <a:t>1.82</a:t>
-                      </a:r>
-                      <a:endParaRPr lang="en-US" sz="1150" dirty="0">
+                        <a:t>atmosphere</a:t>
+                      </a:r>
+                      <a:endParaRPr lang="en-US" sz="1100" dirty="0">
                         <a:latin typeface="Calibri" charset="0"/>
                         <a:ea typeface="Calibri" charset="0"/>
                         <a:cs typeface="Calibri" charset="0"/>
@@ -14687,21 +14656,21 @@
                     <a:bodyPr/>
                     <a:lstStyle/>
                     <a:p>
-                      <a:pPr algn="ctr" indent="0" marL="0">
-                        <a:buNone/>
-                      </a:pPr>
-                      <a:r>
-                        <a:rPr lang="en-US" sz="1150" i="1" dirty="0">
-                          <a:solidFill>
-                            <a:srgbClr val="9AA3AF"/>
-                          </a:solidFill>
-                          <a:latin typeface="Calibri" pitchFamily="34" charset="0"/>
-                          <a:ea typeface="Calibri" pitchFamily="34" charset="-122"/>
-                          <a:cs typeface="Calibri" pitchFamily="34" charset="-120"/>
-                        </a:rPr>
-                        <a:t>TBD</a:t>
-                      </a:r>
-                      <a:endParaRPr lang="en-US" sz="1150" dirty="0">
+                      <a:pPr algn="l" indent="0" marL="0">
+                        <a:buNone/>
+                      </a:pPr>
+                      <a:r>
+                        <a:rPr lang="en-US" sz="1100" dirty="0">
+                          <a:solidFill>
+                            <a:srgbClr val="1F2328"/>
+                          </a:solidFill>
+                          <a:latin typeface="Calibri" pitchFamily="34" charset="0"/>
+                          <a:ea typeface="Calibri" pitchFamily="34" charset="-122"/>
+                          <a:cs typeface="Calibri" pitchFamily="34" charset="-120"/>
+                        </a:rPr>
+                        <a:t>diffusion sampling of ensembles</a:t>
+                      </a:r>
+                      <a:endParaRPr lang="en-US" sz="1100" dirty="0">
                         <a:latin typeface="Calibri" charset="0"/>
                         <a:ea typeface="Calibri" charset="0"/>
                         <a:cs typeface="Calibri" charset="0"/>
@@ -14734,21 +14703,21 @@
                     <a:bodyPr/>
                     <a:lstStyle/>
                     <a:p>
-                      <a:pPr algn="ctr" indent="0" marL="0">
-                        <a:buNone/>
-                      </a:pPr>
-                      <a:r>
-                        <a:rPr lang="en-US" sz="1150" i="1" dirty="0">
-                          <a:solidFill>
-                            <a:srgbClr val="9AA3AF"/>
-                          </a:solidFill>
-                          <a:latin typeface="Calibri" pitchFamily="34" charset="0"/>
-                          <a:ea typeface="Calibri" pitchFamily="34" charset="-122"/>
-                          <a:cs typeface="Calibri" pitchFamily="34" charset="-120"/>
-                        </a:rPr>
-                        <a:t>TBD</a:t>
-                      </a:r>
-                      <a:endParaRPr lang="en-US" sz="1150" dirty="0">
+                      <a:pPr algn="l" indent="0" marL="0">
+                        <a:buNone/>
+                      </a:pPr>
+                      <a:r>
+                        <a:rPr lang="en-US" sz="1100" dirty="0">
+                          <a:solidFill>
+                            <a:srgbClr val="1F2328"/>
+                          </a:solidFill>
+                          <a:latin typeface="Calibri" pitchFamily="34" charset="0"/>
+                          <a:ea typeface="Calibri" pitchFamily="34" charset="-122"/>
+                          <a:cs typeface="Calibri" pitchFamily="34" charset="-120"/>
+                        </a:rPr>
+                        <a:t>Price et al., Nature 2025 (GenCast)</a:t>
+                      </a:r>
+                      <a:endParaRPr lang="en-US" sz="1100" dirty="0">
                         <a:latin typeface="Calibri" charset="0"/>
                         <a:ea typeface="Calibri" charset="0"/>
                         <a:cs typeface="Calibri" charset="0"/>
@@ -14777,7 +14746,7 @@
                   </a:tcPr>
                 </a:tc>
               </a:tr>
-              <a:tr h="347472">
+              <a:tr h="365760">
                 <a:tc>
                   <a:txBody>
                     <a:bodyPr/>
@@ -14787,7 +14756,7 @@
                         <a:buNone/>
                       </a:pPr>
                       <a:r>
-                        <a:rPr lang="en-US" sz="1150" dirty="0">
+                        <a:rPr lang="en-US" sz="1100" dirty="0">
                           <a:solidFill>
                             <a:srgbClr val="1F2328"/>
                           </a:solidFill>
@@ -14795,9 +14764,9 @@
                           <a:ea typeface="Calibri" pitchFamily="34" charset="-122"/>
                           <a:cs typeface="Calibri" pitchFamily="34" charset="-120"/>
                         </a:rPr>
-                        <a:t>MAE, T20 (days)</a:t>
-                      </a:r>
-                      <a:endParaRPr lang="en-US" sz="1150" dirty="0">
+                        <a:t>Robotics</a:t>
+                      </a:r>
+                      <a:endParaRPr lang="en-US" sz="1100" dirty="0">
                         <a:latin typeface="Calibri" charset="0"/>
                         <a:ea typeface="Calibri" charset="0"/>
                         <a:cs typeface="Calibri" charset="0"/>
@@ -14830,11 +14799,11 @@
                     <a:bodyPr/>
                     <a:lstStyle/>
                     <a:p>
-                      <a:pPr algn="ctr" indent="0" marL="0">
-                        <a:buNone/>
-                      </a:pPr>
-                      <a:r>
-                        <a:rPr lang="en-US" sz="1150" dirty="0">
+                      <a:pPr algn="l" indent="0" marL="0">
+                        <a:buNone/>
+                      </a:pPr>
+                      <a:r>
+                        <a:rPr lang="en-US" sz="1100" dirty="0">
                           <a:solidFill>
                             <a:srgbClr val="1F2328"/>
                           </a:solidFill>
@@ -14842,9 +14811,9 @@
                           <a:ea typeface="Calibri" pitchFamily="34" charset="-122"/>
                           <a:cs typeface="Calibri" pitchFamily="34" charset="-120"/>
                         </a:rPr>
-                        <a:t>0.75</a:t>
-                      </a:r>
-                      <a:endParaRPr lang="en-US" sz="1150" dirty="0">
+                        <a:t>action trajectory</a:t>
+                      </a:r>
+                      <a:endParaRPr lang="en-US" sz="1100" dirty="0">
                         <a:latin typeface="Calibri" charset="0"/>
                         <a:ea typeface="Calibri" charset="0"/>
                         <a:cs typeface="Calibri" charset="0"/>
@@ -14877,21 +14846,21 @@
                     <a:bodyPr/>
                     <a:lstStyle/>
                     <a:p>
-                      <a:pPr algn="ctr" indent="0" marL="0">
-                        <a:buNone/>
-                      </a:pPr>
-                      <a:r>
-                        <a:rPr lang="en-US" sz="1150" i="1" dirty="0">
-                          <a:solidFill>
-                            <a:srgbClr val="9AA3AF"/>
-                          </a:solidFill>
-                          <a:latin typeface="Calibri" pitchFamily="34" charset="0"/>
-                          <a:ea typeface="Calibri" pitchFamily="34" charset="-122"/>
-                          <a:cs typeface="Calibri" pitchFamily="34" charset="-120"/>
-                        </a:rPr>
-                        <a:t>TBD</a:t>
-                      </a:r>
-                      <a:endParaRPr lang="en-US" sz="1150" dirty="0">
+                      <a:pPr algn="l" indent="0" marL="0">
+                        <a:buNone/>
+                      </a:pPr>
+                      <a:r>
+                        <a:rPr lang="en-US" sz="1100" dirty="0">
+                          <a:solidFill>
+                            <a:srgbClr val="1F2328"/>
+                          </a:solidFill>
+                          <a:latin typeface="Calibri" pitchFamily="34" charset="0"/>
+                          <a:ea typeface="Calibri" pitchFamily="34" charset="-122"/>
+                          <a:cs typeface="Calibri" pitchFamily="34" charset="-120"/>
+                        </a:rPr>
+                        <a:t>reverse diffusion / flow matching</a:t>
+                      </a:r>
+                      <a:endParaRPr lang="en-US" sz="1100" dirty="0">
                         <a:latin typeface="Calibri" charset="0"/>
                         <a:ea typeface="Calibri" charset="0"/>
                         <a:cs typeface="Calibri" charset="0"/>
@@ -14924,21 +14893,21 @@
                     <a:bodyPr/>
                     <a:lstStyle/>
                     <a:p>
-                      <a:pPr algn="ctr" indent="0" marL="0">
-                        <a:buNone/>
-                      </a:pPr>
-                      <a:r>
-                        <a:rPr lang="en-US" sz="1150" i="1" dirty="0">
-                          <a:solidFill>
-                            <a:srgbClr val="9AA3AF"/>
-                          </a:solidFill>
-                          <a:latin typeface="Calibri" pitchFamily="34" charset="0"/>
-                          <a:ea typeface="Calibri" pitchFamily="34" charset="-122"/>
-                          <a:cs typeface="Calibri" pitchFamily="34" charset="-120"/>
-                        </a:rPr>
-                        <a:t>TBD</a:t>
-                      </a:r>
-                      <a:endParaRPr lang="en-US" sz="1150" dirty="0">
+                      <a:pPr algn="l" indent="0" marL="0">
+                        <a:buNone/>
+                      </a:pPr>
+                      <a:r>
+                        <a:rPr lang="en-US" sz="1100" dirty="0">
+                          <a:solidFill>
+                            <a:srgbClr val="1F2328"/>
+                          </a:solidFill>
+                          <a:latin typeface="Calibri" pitchFamily="34" charset="0"/>
+                          <a:ea typeface="Calibri" pitchFamily="34" charset="-122"/>
+                          <a:cs typeface="Calibri" pitchFamily="34" charset="-120"/>
+                        </a:rPr>
+                        <a:t>Chi et al. 2023; Black et al. 2024</a:t>
+                      </a:r>
+                      <a:endParaRPr lang="en-US" sz="1100" dirty="0">
                         <a:latin typeface="Calibri" charset="0"/>
                         <a:ea typeface="Calibri" charset="0"/>
                         <a:cs typeface="Calibri" charset="0"/>
@@ -14967,7 +14936,7 @@
                   </a:tcPr>
                 </a:tc>
               </a:tr>
-              <a:tr h="347472">
+              <a:tr h="365760">
                 <a:tc>
                   <a:txBody>
                     <a:bodyPr/>
@@ -14977,7 +14946,7 @@
                         <a:buNone/>
                       </a:pPr>
                       <a:r>
-                        <a:rPr lang="en-US" sz="1150" dirty="0">
+                        <a:rPr lang="en-US" sz="1100" dirty="0">
                           <a:solidFill>
                             <a:srgbClr val="1F2328"/>
                           </a:solidFill>
@@ -14985,9 +14954,9 @@
                           <a:ea typeface="Calibri" pitchFamily="34" charset="-122"/>
                           <a:cs typeface="Calibri" pitchFamily="34" charset="-120"/>
                         </a:rPr>
-                        <a:t>MAE, Tamb (days)</a:t>
-                      </a:r>
-                      <a:endParaRPr lang="en-US" sz="1150" dirty="0">
+                        <a:t>Quant finance</a:t>
+                      </a:r>
+                      <a:endParaRPr lang="en-US" sz="1100" dirty="0">
                         <a:latin typeface="Calibri" charset="0"/>
                         <a:ea typeface="Calibri" charset="0"/>
                         <a:cs typeface="Calibri" charset="0"/>
@@ -15020,11 +14989,11 @@
                     <a:bodyPr/>
                     <a:lstStyle/>
                     <a:p>
-                      <a:pPr algn="ctr" indent="0" marL="0">
-                        <a:buNone/>
-                      </a:pPr>
-                      <a:r>
-                        <a:rPr lang="en-US" sz="1150" dirty="0">
+                      <a:pPr algn="l" indent="0" marL="0">
+                        <a:buNone/>
+                      </a:pPr>
+                      <a:r>
+                        <a:rPr lang="en-US" sz="1100" dirty="0">
                           <a:solidFill>
                             <a:srgbClr val="1F2328"/>
                           </a:solidFill>
@@ -15032,9 +15001,9 @@
                           <a:ea typeface="Calibri" pitchFamily="34" charset="-122"/>
                           <a:cs typeface="Calibri" pitchFamily="34" charset="-120"/>
                         </a:rPr>
-                        <a:t>0.54</a:t>
-                      </a:r>
-                      <a:endParaRPr lang="en-US" sz="1150" dirty="0">
+                        <a:t>price, volatility</a:t>
+                      </a:r>
+                      <a:endParaRPr lang="en-US" sz="1100" dirty="0">
                         <a:latin typeface="Calibri" charset="0"/>
                         <a:ea typeface="Calibri" charset="0"/>
                         <a:cs typeface="Calibri" charset="0"/>
@@ -15067,21 +15036,21 @@
                     <a:bodyPr/>
                     <a:lstStyle/>
                     <a:p>
-                      <a:pPr algn="ctr" indent="0" marL="0">
-                        <a:buNone/>
-                      </a:pPr>
-                      <a:r>
-                        <a:rPr lang="en-US" sz="1150" i="1" dirty="0">
-                          <a:solidFill>
-                            <a:srgbClr val="9AA3AF"/>
-                          </a:solidFill>
-                          <a:latin typeface="Calibri" pitchFamily="34" charset="0"/>
-                          <a:ea typeface="Calibri" pitchFamily="34" charset="-122"/>
-                          <a:cs typeface="Calibri" pitchFamily="34" charset="-120"/>
-                        </a:rPr>
-                        <a:t>TBD</a:t>
-                      </a:r>
-                      <a:endParaRPr lang="en-US" sz="1150" dirty="0">
+                      <a:pPr algn="l" indent="0" marL="0">
+                        <a:buNone/>
+                      </a:pPr>
+                      <a:r>
+                        <a:rPr lang="en-US" sz="1100" dirty="0">
+                          <a:solidFill>
+                            <a:srgbClr val="1F2328"/>
+                          </a:solidFill>
+                          <a:latin typeface="Calibri" pitchFamily="34" charset="0"/>
+                          <a:ea typeface="Calibri" pitchFamily="34" charset="-122"/>
+                          <a:cs typeface="Calibri" pitchFamily="34" charset="-120"/>
+                        </a:rPr>
+                        <a:t>calibrated market models</a:t>
+                      </a:r>
+                      <a:endParaRPr lang="en-US" sz="1100" dirty="0">
                         <a:latin typeface="Calibri" charset="0"/>
                         <a:ea typeface="Calibri" charset="0"/>
                         <a:cs typeface="Calibri" charset="0"/>
@@ -15114,21 +15083,21 @@
                     <a:bodyPr/>
                     <a:lstStyle/>
                     <a:p>
-                      <a:pPr algn="ctr" indent="0" marL="0">
-                        <a:buNone/>
-                      </a:pPr>
-                      <a:r>
-                        <a:rPr lang="en-US" sz="1150" i="1" dirty="0">
-                          <a:solidFill>
-                            <a:srgbClr val="9AA3AF"/>
-                          </a:solidFill>
-                          <a:latin typeface="Calibri" pitchFamily="34" charset="0"/>
-                          <a:ea typeface="Calibri" pitchFamily="34" charset="-122"/>
-                          <a:cs typeface="Calibri" pitchFamily="34" charset="-120"/>
-                        </a:rPr>
-                        <a:t>TBD</a:t>
-                      </a:r>
-                      <a:endParaRPr lang="en-US" sz="1150" dirty="0">
+                      <a:pPr algn="l" indent="0" marL="0">
+                        <a:buNone/>
+                      </a:pPr>
+                      <a:r>
+                        <a:rPr lang="en-US" sz="1100" dirty="0">
+                          <a:solidFill>
+                            <a:srgbClr val="1F2328"/>
+                          </a:solidFill>
+                          <a:latin typeface="Calibri" pitchFamily="34" charset="0"/>
+                          <a:ea typeface="Calibri" pitchFamily="34" charset="-122"/>
+                          <a:cs typeface="Calibri" pitchFamily="34" charset="-120"/>
+                        </a:rPr>
+                        <a:t>Gierjatowicz 2022; Cohen 2021</a:t>
+                      </a:r>
+                      <a:endParaRPr lang="en-US" sz="1100" dirty="0">
                         <a:latin typeface="Calibri" charset="0"/>
                         <a:ea typeface="Calibri" charset="0"/>
                         <a:cs typeface="Calibri" charset="0"/>
@@ -15157,7 +15126,7 @@
                   </a:tcPr>
                 </a:tc>
               </a:tr>
-              <a:tr h="347472">
+              <a:tr h="365760">
                 <a:tc>
                   <a:txBody>
                     <a:bodyPr/>
@@ -15167,7 +15136,7 @@
                         <a:buNone/>
                       </a:pPr>
                       <a:r>
-                        <a:rPr lang="en-US" sz="1150" dirty="0">
+                        <a:rPr lang="en-US" sz="1100" dirty="0">
                           <a:solidFill>
                             <a:srgbClr val="1F2328"/>
                           </a:solidFill>
@@ -15175,9 +15144,9 @@
                           <a:ea typeface="Calibri" pitchFamily="34" charset="-122"/>
                           <a:cs typeface="Calibri" pitchFamily="34" charset="-120"/>
                         </a:rPr>
-                        <a:t>MAE, all (days)</a:t>
-                      </a:r>
-                      <a:endParaRPr lang="en-US" sz="1150" dirty="0">
+                        <a:t>Clinical</a:t>
+                      </a:r>
+                      <a:endParaRPr lang="en-US" sz="1100" dirty="0">
                         <a:latin typeface="Calibri" charset="0"/>
                         <a:ea typeface="Calibri" charset="0"/>
                         <a:cs typeface="Calibri" charset="0"/>
@@ -15210,11 +15179,11 @@
                     <a:bodyPr/>
                     <a:lstStyle/>
                     <a:p>
-                      <a:pPr algn="ctr" indent="0" marL="0">
-                        <a:buNone/>
-                      </a:pPr>
-                      <a:r>
-                        <a:rPr lang="en-US" sz="1150" dirty="0">
+                      <a:pPr algn="l" indent="0" marL="0">
+                        <a:buNone/>
+                      </a:pPr>
+                      <a:r>
+                        <a:rPr lang="en-US" sz="1100" dirty="0">
                           <a:solidFill>
                             <a:srgbClr val="1F2328"/>
                           </a:solidFill>
@@ -15222,9 +15191,9 @@
                           <a:ea typeface="Calibri" pitchFamily="34" charset="-122"/>
                           <a:cs typeface="Calibri" pitchFamily="34" charset="-120"/>
                         </a:rPr>
-                        <a:t>1.04</a:t>
-                      </a:r>
-                      <a:endParaRPr lang="en-US" sz="1150" dirty="0">
+                        <a:t>patient state</a:t>
+                      </a:r>
+                      <a:endParaRPr lang="en-US" sz="1100" dirty="0">
                         <a:latin typeface="Calibri" charset="0"/>
                         <a:ea typeface="Calibri" charset="0"/>
                         <a:cs typeface="Calibri" charset="0"/>
@@ -15257,21 +15226,21 @@
                     <a:bodyPr/>
                     <a:lstStyle/>
                     <a:p>
-                      <a:pPr algn="ctr" indent="0" marL="0">
-                        <a:buNone/>
-                      </a:pPr>
-                      <a:r>
-                        <a:rPr lang="en-US" sz="1150" i="1" dirty="0">
-                          <a:solidFill>
-                            <a:srgbClr val="9AA3AF"/>
-                          </a:solidFill>
-                          <a:latin typeface="Calibri" pitchFamily="34" charset="0"/>
-                          <a:ea typeface="Calibri" pitchFamily="34" charset="-122"/>
-                          <a:cs typeface="Calibri" pitchFamily="34" charset="-120"/>
-                        </a:rPr>
-                        <a:t>TBD</a:t>
-                      </a:r>
-                      <a:endParaRPr lang="en-US" sz="1150" dirty="0">
+                      <a:pPr algn="l" indent="0" marL="0">
+                        <a:buNone/>
+                      </a:pPr>
+                      <a:r>
+                        <a:rPr lang="en-US" sz="1100" dirty="0">
+                          <a:solidFill>
+                            <a:srgbClr val="1F2328"/>
+                          </a:solidFill>
+                          <a:latin typeface="Calibri" pitchFamily="34" charset="0"/>
+                          <a:ea typeface="Calibri" pitchFamily="34" charset="-122"/>
+                          <a:cs typeface="Calibri" pitchFamily="34" charset="-120"/>
+                        </a:rPr>
+                        <a:t>irregular vitals (ODE/CDE family)</a:t>
+                      </a:r>
+                      <a:endParaRPr lang="en-US" sz="1100" dirty="0">
                         <a:latin typeface="Calibri" charset="0"/>
                         <a:ea typeface="Calibri" charset="0"/>
                         <a:cs typeface="Calibri" charset="0"/>
@@ -15304,21 +15273,21 @@
                     <a:bodyPr/>
                     <a:lstStyle/>
                     <a:p>
-                      <a:pPr algn="ctr" indent="0" marL="0">
-                        <a:buNone/>
-                      </a:pPr>
-                      <a:r>
-                        <a:rPr lang="en-US" sz="1150" i="1" dirty="0">
-                          <a:solidFill>
-                            <a:srgbClr val="9AA3AF"/>
-                          </a:solidFill>
-                          <a:latin typeface="Calibri" pitchFamily="34" charset="0"/>
-                          <a:ea typeface="Calibri" pitchFamily="34" charset="-122"/>
-                          <a:cs typeface="Calibri" pitchFamily="34" charset="-120"/>
-                        </a:rPr>
-                        <a:t>TBD</a:t>
-                      </a:r>
-                      <a:endParaRPr lang="en-US" sz="1150" dirty="0">
+                      <a:pPr algn="l" indent="0" marL="0">
+                        <a:buNone/>
+                      </a:pPr>
+                      <a:r>
+                        <a:rPr lang="en-US" sz="1100" dirty="0">
+                          <a:solidFill>
+                            <a:srgbClr val="1F2328"/>
+                          </a:solidFill>
+                          <a:latin typeface="Calibri" pitchFamily="34" charset="0"/>
+                          <a:ea typeface="Calibri" pitchFamily="34" charset="-122"/>
+                          <a:cs typeface="Calibri" pitchFamily="34" charset="-120"/>
+                        </a:rPr>
+                        <a:t>Rubanova 2019; Kidger 2020</a:t>
+                      </a:r>
+                      <a:endParaRPr lang="en-US" sz="1100" dirty="0">
                         <a:latin typeface="Calibri" charset="0"/>
                         <a:ea typeface="Calibri" charset="0"/>
                         <a:cs typeface="Calibri" charset="0"/>
@@ -15347,7 +15316,7 @@
                   </a:tcPr>
                 </a:tc>
               </a:tr>
-              <a:tr h="347472">
+              <a:tr h="365760">
                 <a:tc>
                   <a:txBody>
                     <a:bodyPr/>
@@ -15357,7 +15326,7 @@
                         <a:buNone/>
                       </a:pPr>
                       <a:r>
-                        <a:rPr lang="en-US" sz="1150" dirty="0">
+                        <a:rPr lang="en-US" sz="1100" dirty="0">
                           <a:solidFill>
                             <a:srgbClr val="1F2328"/>
                           </a:solidFill>
@@ -15365,9 +15334,9 @@
                           <a:ea typeface="Calibri" pitchFamily="34" charset="-122"/>
                           <a:cs typeface="Calibri" pitchFamily="34" charset="-120"/>
                         </a:rPr>
-                        <a:t>CRPS of τ, all (days)</a:t>
-                      </a:r>
-                      <a:endParaRPr lang="en-US" sz="1150" dirty="0">
+                        <a:t>Generative models</a:t>
+                      </a:r>
+                      <a:endParaRPr lang="en-US" sz="1100" dirty="0">
                         <a:latin typeface="Calibri" charset="0"/>
                         <a:ea typeface="Calibri" charset="0"/>
                         <a:cs typeface="Calibri" charset="0"/>
@@ -15400,21 +15369,21 @@
                     <a:bodyPr/>
                     <a:lstStyle/>
                     <a:p>
-                      <a:pPr algn="ctr" indent="0" marL="0">
-                        <a:buNone/>
-                      </a:pPr>
-                      <a:r>
-                        <a:rPr lang="en-US" sz="1150" dirty="0">
-                          <a:solidFill>
-                            <a:srgbClr val="6B7280"/>
-                          </a:solidFill>
-                          <a:latin typeface="Calibri" pitchFamily="34" charset="0"/>
-                          <a:ea typeface="Calibri" pitchFamily="34" charset="-122"/>
-                          <a:cs typeface="Calibri" pitchFamily="34" charset="-120"/>
-                        </a:rPr>
-                        <a:t>1.04 (= MAE for a point)</a:t>
-                      </a:r>
-                      <a:endParaRPr lang="en-US" sz="1150" dirty="0">
+                      <a:pPr algn="l" indent="0" marL="0">
+                        <a:buNone/>
+                      </a:pPr>
+                      <a:r>
+                        <a:rPr lang="en-US" sz="1100" dirty="0">
+                          <a:solidFill>
+                            <a:srgbClr val="1F2328"/>
+                          </a:solidFill>
+                          <a:latin typeface="Calibri" pitchFamily="34" charset="0"/>
+                          <a:ea typeface="Calibri" pitchFamily="34" charset="-122"/>
+                          <a:cs typeface="Calibri" pitchFamily="34" charset="-120"/>
+                        </a:rPr>
+                        <a:t>image / audio</a:t>
+                      </a:r>
+                      <a:endParaRPr lang="en-US" sz="1100" dirty="0">
                         <a:latin typeface="Calibri" charset="0"/>
                         <a:ea typeface="Calibri" charset="0"/>
                         <a:cs typeface="Calibri" charset="0"/>
@@ -15447,21 +15416,21 @@
                     <a:bodyPr/>
                     <a:lstStyle/>
                     <a:p>
-                      <a:pPr algn="ctr" indent="0" marL="0">
-                        <a:buNone/>
-                      </a:pPr>
-                      <a:r>
-                        <a:rPr lang="en-US" sz="1150" i="1" dirty="0">
-                          <a:solidFill>
-                            <a:srgbClr val="9AA3AF"/>
-                          </a:solidFill>
-                          <a:latin typeface="Calibri" pitchFamily="34" charset="0"/>
-                          <a:ea typeface="Calibri" pitchFamily="34" charset="-122"/>
-                          <a:cs typeface="Calibri" pitchFamily="34" charset="-120"/>
-                        </a:rPr>
-                        <a:t>TBD</a:t>
-                      </a:r>
-                      <a:endParaRPr lang="en-US" sz="1150" dirty="0">
+                      <a:pPr algn="l" indent="0" marL="0">
+                        <a:buNone/>
+                      </a:pPr>
+                      <a:r>
+                        <a:rPr lang="en-US" sz="1100" dirty="0">
+                          <a:solidFill>
+                            <a:srgbClr val="1F2328"/>
+                          </a:solidFill>
+                          <a:latin typeface="Calibri" pitchFamily="34" charset="0"/>
+                          <a:ea typeface="Calibri" pitchFamily="34" charset="-122"/>
+                          <a:cs typeface="Calibri" pitchFamily="34" charset="-120"/>
+                        </a:rPr>
+                        <a:t>score-based sampling</a:t>
+                      </a:r>
+                      <a:endParaRPr lang="en-US" sz="1100" dirty="0">
                         <a:latin typeface="Calibri" charset="0"/>
                         <a:ea typeface="Calibri" charset="0"/>
                         <a:cs typeface="Calibri" charset="0"/>
@@ -15494,60 +15463,11 @@
                     <a:bodyPr/>
                     <a:lstStyle/>
                     <a:p>
-                      <a:pPr algn="ctr" indent="0" marL="0">
-                        <a:buNone/>
-                      </a:pPr>
-                      <a:r>
-                        <a:rPr lang="en-US" sz="1150" i="1" dirty="0">
-                          <a:solidFill>
-                            <a:srgbClr val="9AA3AF"/>
-                          </a:solidFill>
-                          <a:latin typeface="Calibri" pitchFamily="34" charset="0"/>
-                          <a:ea typeface="Calibri" pitchFamily="34" charset="-122"/>
-                          <a:cs typeface="Calibri" pitchFamily="34" charset="-120"/>
-                        </a:rPr>
-                        <a:t>TBD</a:t>
-                      </a:r>
-                      <a:endParaRPr lang="en-US" sz="1150" dirty="0">
-                        <a:latin typeface="Calibri" charset="0"/>
-                        <a:ea typeface="Calibri" charset="0"/>
-                        <a:cs typeface="Calibri" charset="0"/>
-                      </a:endParaRPr>
-                    </a:p>
-                  </a:txBody>
-                  <a:tcPr marL="54864" marR="54864" marT="18288" marB="18288" anchor="ctr">
-                    <a:lnL w="0" cap="flat" cmpd="sng" algn="ctr">
-                      <a:noFill/>
-                    </a:lnL>
-                    <a:lnR w="0" cap="flat" cmpd="sng" algn="ctr">
-                      <a:noFill/>
-                    </a:lnR>
-                    <a:lnT w="0" cap="flat" cmpd="sng" algn="ctr">
-                      <a:noFill/>
-                    </a:lnT>
-                    <a:lnB w="6350" cap="flat" cmpd="sng" algn="ctr">
-                      <a:solidFill>
-                        <a:srgbClr val="E5E7EB"/>
-                      </a:solidFill>
-                      <a:prstDash val="solid"/>
-                      <a:round/>
-                      <a:headEnd type="none" w="med" len="med"/>
-                      <a:tailEnd type="none" w="med" len="med"/>
-                    </a:lnB>
-                  </a:tcPr>
-                </a:tc>
-              </a:tr>
-              <a:tr h="347472">
-                <a:tc>
-                  <a:txBody>
-                    <a:bodyPr/>
-                    <a:lstStyle/>
-                    <a:p>
                       <a:pPr algn="l" indent="0" marL="0">
                         <a:buNone/>
                       </a:pPr>
                       <a:r>
-                        <a:rPr lang="en-US" sz="1150" dirty="0">
+                        <a:rPr lang="en-US" sz="1100" dirty="0">
                           <a:solidFill>
                             <a:srgbClr val="1F2328"/>
                           </a:solidFill>
@@ -15555,150 +15475,9 @@
                           <a:ea typeface="Calibri" pitchFamily="34" charset="-122"/>
                           <a:cs typeface="Calibri" pitchFamily="34" charset="-120"/>
                         </a:rPr>
-                        <a:t>80% interval coverage</a:t>
-                      </a:r>
-                      <a:endParaRPr lang="en-US" sz="1150" dirty="0">
-                        <a:latin typeface="Calibri" charset="0"/>
-                        <a:ea typeface="Calibri" charset="0"/>
-                        <a:cs typeface="Calibri" charset="0"/>
-                      </a:endParaRPr>
-                    </a:p>
-                  </a:txBody>
-                  <a:tcPr marL="54864" marR="54864" marT="18288" marB="18288" anchor="ctr">
-                    <a:lnL w="0" cap="flat" cmpd="sng" algn="ctr">
-                      <a:noFill/>
-                    </a:lnL>
-                    <a:lnR w="0" cap="flat" cmpd="sng" algn="ctr">
-                      <a:noFill/>
-                    </a:lnR>
-                    <a:lnT w="0" cap="flat" cmpd="sng" algn="ctr">
-                      <a:noFill/>
-                    </a:lnT>
-                    <a:lnB w="6350" cap="flat" cmpd="sng" algn="ctr">
-                      <a:solidFill>
-                        <a:srgbClr val="E5E7EB"/>
-                      </a:solidFill>
-                      <a:prstDash val="solid"/>
-                      <a:round/>
-                      <a:headEnd type="none" w="med" len="med"/>
-                      <a:tailEnd type="none" w="med" len="med"/>
-                    </a:lnB>
-                  </a:tcPr>
-                </a:tc>
-                <a:tc>
-                  <a:txBody>
-                    <a:bodyPr/>
-                    <a:lstStyle/>
-                    <a:p>
-                      <a:pPr algn="ctr" indent="0" marL="0">
-                        <a:buNone/>
-                      </a:pPr>
-                      <a:r>
-                        <a:rPr lang="en-US" sz="1150" dirty="0">
-                          <a:solidFill>
-                            <a:srgbClr val="6B7280"/>
-                          </a:solidFill>
-                          <a:latin typeface="Calibri" pitchFamily="34" charset="0"/>
-                          <a:ea typeface="Calibri" pitchFamily="34" charset="-122"/>
-                          <a:cs typeface="Calibri" pitchFamily="34" charset="-120"/>
-                        </a:rPr>
-                        <a:t>n/a</a:t>
-                      </a:r>
-                      <a:endParaRPr lang="en-US" sz="1150" dirty="0">
-                        <a:latin typeface="Calibri" charset="0"/>
-                        <a:ea typeface="Calibri" charset="0"/>
-                        <a:cs typeface="Calibri" charset="0"/>
-                      </a:endParaRPr>
-                    </a:p>
-                  </a:txBody>
-                  <a:tcPr marL="54864" marR="54864" marT="18288" marB="18288" anchor="ctr">
-                    <a:lnL w="0" cap="flat" cmpd="sng" algn="ctr">
-                      <a:noFill/>
-                    </a:lnL>
-                    <a:lnR w="0" cap="flat" cmpd="sng" algn="ctr">
-                      <a:noFill/>
-                    </a:lnR>
-                    <a:lnT w="0" cap="flat" cmpd="sng" algn="ctr">
-                      <a:noFill/>
-                    </a:lnT>
-                    <a:lnB w="6350" cap="flat" cmpd="sng" algn="ctr">
-                      <a:solidFill>
-                        <a:srgbClr val="E5E7EB"/>
-                      </a:solidFill>
-                      <a:prstDash val="solid"/>
-                      <a:round/>
-                      <a:headEnd type="none" w="med" len="med"/>
-                      <a:tailEnd type="none" w="med" len="med"/>
-                    </a:lnB>
-                  </a:tcPr>
-                </a:tc>
-                <a:tc>
-                  <a:txBody>
-                    <a:bodyPr/>
-                    <a:lstStyle/>
-                    <a:p>
-                      <a:pPr algn="ctr" indent="0" marL="0">
-                        <a:buNone/>
-                      </a:pPr>
-                      <a:r>
-                        <a:rPr lang="en-US" sz="1150" i="1" dirty="0">
-                          <a:solidFill>
-                            <a:srgbClr val="9AA3AF"/>
-                          </a:solidFill>
-                          <a:latin typeface="Calibri" pitchFamily="34" charset="0"/>
-                          <a:ea typeface="Calibri" pitchFamily="34" charset="-122"/>
-                          <a:cs typeface="Calibri" pitchFamily="34" charset="-120"/>
-                        </a:rPr>
-                        <a:t>TBD</a:t>
-                      </a:r>
-                      <a:endParaRPr lang="en-US" sz="1150" dirty="0">
-                        <a:latin typeface="Calibri" charset="0"/>
-                        <a:ea typeface="Calibri" charset="0"/>
-                        <a:cs typeface="Calibri" charset="0"/>
-                      </a:endParaRPr>
-                    </a:p>
-                  </a:txBody>
-                  <a:tcPr marL="54864" marR="54864" marT="18288" marB="18288" anchor="ctr">
-                    <a:lnL w="0" cap="flat" cmpd="sng" algn="ctr">
-                      <a:noFill/>
-                    </a:lnL>
-                    <a:lnR w="0" cap="flat" cmpd="sng" algn="ctr">
-                      <a:noFill/>
-                    </a:lnR>
-                    <a:lnT w="0" cap="flat" cmpd="sng" algn="ctr">
-                      <a:noFill/>
-                    </a:lnT>
-                    <a:lnB w="6350" cap="flat" cmpd="sng" algn="ctr">
-                      <a:solidFill>
-                        <a:srgbClr val="E5E7EB"/>
-                      </a:solidFill>
-                      <a:prstDash val="solid"/>
-                      <a:round/>
-                      <a:headEnd type="none" w="med" len="med"/>
-                      <a:tailEnd type="none" w="med" len="med"/>
-                    </a:lnB>
-                  </a:tcPr>
-                </a:tc>
-                <a:tc>
-                  <a:txBody>
-                    <a:bodyPr/>
-                    <a:lstStyle/>
-                    <a:p>
-                      <a:pPr algn="ctr" indent="0" marL="0">
-                        <a:buNone/>
-                      </a:pPr>
-                      <a:r>
-                        <a:rPr lang="en-US" sz="1150" i="1" dirty="0">
-                          <a:solidFill>
-                            <a:srgbClr val="9AA3AF"/>
-                          </a:solidFill>
-                          <a:latin typeface="Calibri" pitchFamily="34" charset="0"/>
-                          <a:ea typeface="Calibri" pitchFamily="34" charset="-122"/>
-                          <a:cs typeface="Calibri" pitchFamily="34" charset="-120"/>
-                        </a:rPr>
-                        <a:t>TBD</a:t>
-                      </a:r>
-                      <a:endParaRPr lang="en-US" sz="1150" dirty="0">
+                        <a:t>Song et al. 2021</a:t>
+                      </a:r>
+                      <a:endParaRPr lang="en-US" sz="1100" dirty="0">
                         <a:latin typeface="Calibri" charset="0"/>
                         <a:ea typeface="Calibri" charset="0"/>
                         <a:cs typeface="Calibri" charset="0"/>
@@ -15731,42 +15510,6 @@
           </a:graphicData>
         </a:graphic>
       </p:graphicFrame>
-      <p:sp>
-        <p:nvSpPr>
-          <p:cNvPr id="7" name="Text 4"/>
-          <p:cNvSpPr txBox="1"/>
-          <p:nvPr/>
-        </p:nvSpPr>
-        <p:spPr>
-          <a:xfrm>
-            <a:off x="457200" y="3840480"/>
-            <a:ext cx="7315200" cy="201168"/>
-          </a:xfrm>
-          <a:prstGeom prst="rect">
-            <a:avLst/>
-          </a:prstGeom>
-          <a:noFill/>
-          <a:ln/>
-        </p:spPr>
-        <p:txBody>
-          <a:bodyPr wrap="square" lIns="0" tIns="0" rIns="0" bIns="0" rtlCol="0" anchor="t"/>
-          <a:lstStyle/>
-          <a:p>
-            <a:pPr indent="0" marL="0">
-              <a:buNone/>
-            </a:pPr>
-            <a:r>
-              <a:rPr lang="en-US" sz="800" i="1" dirty="0">
-                <a:solidFill>
-                  <a:srgbClr val="6B7280"/>
-                </a:solidFill>
-              </a:rPr>
-              <a:t>Baseline: Table 6 (5-stage, by sample), Xavier, Rodrigues &amp; Silva, Foods 13:1150 (2024). TBD = experiment in progress.</a:t>
-            </a:r>
-            <a:endParaRPr lang="en-US" sz="800" dirty="0"/>
-          </a:p>
-        </p:txBody>
-      </p:sp>
       <p:sp>
         <p:nvSpPr>
           <p:cNvPr id="25" name="Slide Number Placeholder 0"/>
@@ -16638,7 +16381,7 @@
                           <a:ea typeface="Calibri" pitchFamily="34" charset="-122"/>
                           <a:cs typeface="Calibri" pitchFamily="34" charset="-120"/>
                         </a:rPr>
-                        <a:t>15.8–21.7 °C (mean 18.7), RH not logged</a:t>
+                        <a:t>15.8–21.7 °C, RH not logged</a:t>
                       </a:r>
                       <a:endParaRPr lang="en-US" sz="1150" dirty="0">
                         <a:latin typeface="Calibri" charset="0"/>
@@ -17329,7 +17072,7 @@
                   <a:schemeClr val="tx2"/>
                 </a:solidFill>
               </a:rPr>
-              <a:t>BEYOND PRODUCE</a:t>
+              <a:t>LIMITS</a:t>
             </a:r>
             <a:endParaRPr lang="en-US" sz="950" dirty="0"/>
           </a:p>
@@ -17370,7 +17113,7 @@
                 <a:ea typeface="Arial" pitchFamily="34" charset="-122"/>
                 <a:cs typeface="Arial" pitchFamily="34" charset="-120"/>
               </a:rPr>
-              <a:t>Same Structure Elsewhere</a:t>
+              <a:t>Open Problems</a:t>
             </a:r>
             <a:endParaRPr lang="en-US" sz="2500" dirty="0"/>
           </a:p>
@@ -17429,7 +17172,7 @@
                   <a:srgbClr val="1F2328"/>
                 </a:solidFill>
               </a:rPr>
-              <a:t>Wherever decisions depend on the distribution over trajectories.</a:t>
+              <a:t>O(1) memory is real; exact, unbiased, identifiable gradients each cost extra.</a:t>
             </a:r>
             <a:endParaRPr lang="en-US" sz="1250" dirty="0"/>
           </a:p>
@@ -17458,12 +17201,11 @@
             <a:tbl>
               <a:tblPr/>
               <a:tblGrid>
-                <a:gridCol w="1463040"/>
-                <a:gridCol w="1463040"/>
-                <a:gridCol w="2468880"/>
-                <a:gridCol w="2834640"/>
+                <a:gridCol w="1737360"/>
+                <a:gridCol w="3017520"/>
+                <a:gridCol w="3474720"/>
               </a:tblGrid>
-              <a:tr h="365760">
+              <a:tr h="384048">
                 <a:tc>
                   <a:txBody>
                     <a:bodyPr/>
@@ -17481,7 +17223,7 @@
                           <a:ea typeface="Calibri" pitchFamily="34" charset="-122"/>
                           <a:cs typeface="Calibri" pitchFamily="34" charset="-120"/>
                         </a:rPr>
-                        <a:t>Domain</a:t>
+                        <a:t>Issue</a:t>
                       </a:r>
                       <a:endParaRPr lang="en-US" sz="1000" dirty="0">
                         <a:latin typeface="Calibri" charset="0"/>
@@ -17528,7 +17270,7 @@
                           <a:ea typeface="Calibri" pitchFamily="34" charset="-122"/>
                           <a:cs typeface="Calibri" pitchFamily="34" charset="-120"/>
                         </a:rPr>
-                        <a:t>Latent state</a:t>
+                        <a:t>Symptom</a:t>
                       </a:r>
                       <a:endParaRPr lang="en-US" sz="1000" dirty="0">
                         <a:latin typeface="Calibri" charset="0"/>
@@ -17575,7 +17317,7 @@
                           <a:ea typeface="Calibri" pitchFamily="34" charset="-122"/>
                           <a:cs typeface="Calibri" pitchFamily="34" charset="-120"/>
                         </a:rPr>
-                        <a:t>Neural SDE role</a:t>
+                        <a:t>Evidence / mitigation</a:t>
                       </a:r>
                       <a:endParaRPr lang="en-US" sz="1000" dirty="0">
                         <a:latin typeface="Calibri" charset="0"/>
@@ -17605,6 +17347,8 @@
                     </a:lnB>
                   </a:tcPr>
                 </a:tc>
+              </a:tr>
+              <a:tr h="384048">
                 <a:tc>
                   <a:txBody>
                     <a:bodyPr/>
@@ -17614,36 +17358,130 @@
                         <a:buNone/>
                       </a:pPr>
                       <a:r>
-                        <a:rPr lang="en-US" sz="1000" b="1" dirty="0">
-                          <a:solidFill>
-                            <a:srgbClr val="6B7280"/>
-                          </a:solidFill>
-                          <a:latin typeface="Calibri" pitchFamily="34" charset="0"/>
-                          <a:ea typeface="Calibri" pitchFamily="34" charset="-122"/>
-                          <a:cs typeface="Calibri" pitchFamily="34" charset="-120"/>
-                        </a:rPr>
-                        <a:t>Reference</a:t>
-                      </a:r>
-                      <a:endParaRPr lang="en-US" sz="1000" dirty="0">
-                        <a:latin typeface="Calibri" charset="0"/>
-                        <a:ea typeface="Calibri" charset="0"/>
-                        <a:cs typeface="Calibri" charset="0"/>
-                      </a:endParaRPr>
-                    </a:p>
-                  </a:txBody>
-                  <a:tcPr marL="54864" marR="54864" marT="18288" marB="18288" anchor="ctr">
-                    <a:lnL w="0" cap="flat" cmpd="sng" algn="ctr">
-                      <a:noFill/>
-                    </a:lnL>
-                    <a:lnR w="0" cap="flat" cmpd="sng" algn="ctr">
-                      <a:noFill/>
-                    </a:lnR>
-                    <a:lnT w="0" cap="flat" cmpd="sng" algn="ctr">
-                      <a:noFill/>
-                    </a:lnT>
-                    <a:lnB w="12700" cap="flat" cmpd="sng" algn="ctr">
-                      <a:solidFill>
-                        <a:srgbClr val="1F2328"/>
+                        <a:rPr lang="en-US" sz="1100" dirty="0">
+                          <a:solidFill>
+                            <a:srgbClr val="1F2328"/>
+                          </a:solidFill>
+                          <a:latin typeface="Calibri" pitchFamily="34" charset="0"/>
+                          <a:ea typeface="Calibri" pitchFamily="34" charset="-122"/>
+                          <a:cs typeface="Calibri" pitchFamily="34" charset="-120"/>
+                        </a:rPr>
+                        <a:t>Adjoint error</a:t>
+                      </a:r>
+                      <a:endParaRPr lang="en-US" sz="1100" dirty="0">
+                        <a:latin typeface="Calibri" charset="0"/>
+                        <a:ea typeface="Calibri" charset="0"/>
+                        <a:cs typeface="Calibri" charset="0"/>
+                      </a:endParaRPr>
+                    </a:p>
+                  </a:txBody>
+                  <a:tcPr marL="54864" marR="54864" marT="18288" marB="18288" anchor="ctr">
+                    <a:lnL w="0" cap="flat" cmpd="sng" algn="ctr">
+                      <a:noFill/>
+                    </a:lnL>
+                    <a:lnR w="0" cap="flat" cmpd="sng" algn="ctr">
+                      <a:noFill/>
+                    </a:lnR>
+                    <a:lnT w="0" cap="flat" cmpd="sng" algn="ctr">
+                      <a:noFill/>
+                    </a:lnT>
+                    <a:lnB w="6350" cap="flat" cmpd="sng" algn="ctr">
+                      <a:solidFill>
+                        <a:srgbClr val="E5E7EB"/>
+                      </a:solidFill>
+                      <a:prstDash val="solid"/>
+                      <a:round/>
+                      <a:headEnd type="none" w="med" len="med"/>
+                      <a:tailEnd type="none" w="med" len="med"/>
+                    </a:lnB>
+                  </a:tcPr>
+                </a:tc>
+                <a:tc>
+                  <a:txBody>
+                    <a:bodyPr/>
+                    <a:lstStyle/>
+                    <a:p>
+                      <a:pPr algn="l" indent="0" marL="0">
+                        <a:buNone/>
+                      </a:pPr>
+                      <a:r>
+                        <a:rPr lang="en-US" sz="1100" dirty="0">
+                          <a:solidFill>
+                            <a:srgbClr val="1F2328"/>
+                          </a:solidFill>
+                          <a:latin typeface="Calibri" pitchFamily="34" charset="0"/>
+                          <a:ea typeface="Calibri" pitchFamily="34" charset="-122"/>
+                          <a:cs typeface="Calibri" pitchFamily="34" charset="-120"/>
+                        </a:rPr>
+                        <a:t>backward re-solve ≠ forward path</a:t>
+                      </a:r>
+                      <a:endParaRPr lang="en-US" sz="1100" dirty="0">
+                        <a:latin typeface="Calibri" charset="0"/>
+                        <a:ea typeface="Calibri" charset="0"/>
+                        <a:cs typeface="Calibri" charset="0"/>
+                      </a:endParaRPr>
+                    </a:p>
+                  </a:txBody>
+                  <a:tcPr marL="54864" marR="54864" marT="18288" marB="18288" anchor="ctr">
+                    <a:lnL w="0" cap="flat" cmpd="sng" algn="ctr">
+                      <a:noFill/>
+                    </a:lnL>
+                    <a:lnR w="0" cap="flat" cmpd="sng" algn="ctr">
+                      <a:noFill/>
+                    </a:lnR>
+                    <a:lnT w="0" cap="flat" cmpd="sng" algn="ctr">
+                      <a:noFill/>
+                    </a:lnT>
+                    <a:lnB w="6350" cap="flat" cmpd="sng" algn="ctr">
+                      <a:solidFill>
+                        <a:srgbClr val="E5E7EB"/>
+                      </a:solidFill>
+                      <a:prstDash val="solid"/>
+                      <a:round/>
+                      <a:headEnd type="none" w="med" len="med"/>
+                      <a:tailEnd type="none" w="med" len="med"/>
+                    </a:lnB>
+                  </a:tcPr>
+                </a:tc>
+                <a:tc>
+                  <a:txBody>
+                    <a:bodyPr/>
+                    <a:lstStyle/>
+                    <a:p>
+                      <a:pPr algn="l" indent="0" marL="0">
+                        <a:buNone/>
+                      </a:pPr>
+                      <a:r>
+                        <a:rPr lang="en-US" sz="1100" dirty="0">
+                          <a:solidFill>
+                            <a:srgbClr val="1F2328"/>
+                          </a:solidFill>
+                          <a:latin typeface="Calibri" pitchFamily="34" charset="0"/>
+                          <a:ea typeface="Calibri" pitchFamily="34" charset="-122"/>
+                          <a:cs typeface="Calibri" pitchFamily="34" charset="-120"/>
+                        </a:rPr>
+                        <a:t>ANODE (2019); 1e-4–1e-6 here</a:t>
+                      </a:r>
+                      <a:endParaRPr lang="en-US" sz="1100" dirty="0">
+                        <a:latin typeface="Calibri" charset="0"/>
+                        <a:ea typeface="Calibri" charset="0"/>
+                        <a:cs typeface="Calibri" charset="0"/>
+                      </a:endParaRPr>
+                    </a:p>
+                  </a:txBody>
+                  <a:tcPr marL="54864" marR="54864" marT="18288" marB="18288" anchor="ctr">
+                    <a:lnL w="0" cap="flat" cmpd="sng" algn="ctr">
+                      <a:noFill/>
+                    </a:lnL>
+                    <a:lnR w="0" cap="flat" cmpd="sng" algn="ctr">
+                      <a:noFill/>
+                    </a:lnR>
+                    <a:lnT w="0" cap="flat" cmpd="sng" algn="ctr">
+                      <a:noFill/>
+                    </a:lnT>
+                    <a:lnB w="6350" cap="flat" cmpd="sng" algn="ctr">
+                      <a:solidFill>
+                        <a:srgbClr val="E5E7EB"/>
                       </a:solidFill>
                       <a:prstDash val="solid"/>
                       <a:round/>
@@ -17653,7 +17491,7 @@
                   </a:tcPr>
                 </a:tc>
               </a:tr>
-              <a:tr h="365760">
+              <a:tr h="384048">
                 <a:tc>
                   <a:txBody>
                     <a:bodyPr/>
@@ -17671,7 +17509,7 @@
                           <a:ea typeface="Calibri" pitchFamily="34" charset="-122"/>
                           <a:cs typeface="Calibri" pitchFamily="34" charset="-120"/>
                         </a:rPr>
-                        <a:t>Weather</a:t>
+                        <a:t>Stiffness</a:t>
                       </a:r>
                       <a:endParaRPr lang="en-US" sz="1100" dirty="0">
                         <a:latin typeface="Calibri" charset="0"/>
@@ -17718,7 +17556,7 @@
                           <a:ea typeface="Calibri" pitchFamily="34" charset="-122"/>
                           <a:cs typeface="Calibri" pitchFamily="34" charset="-120"/>
                         </a:rPr>
-                        <a:t>atmosphere</a:t>
+                        <a:t>NFE grows during training</a:t>
                       </a:r>
                       <a:endParaRPr lang="en-US" sz="1100" dirty="0">
                         <a:latin typeface="Calibri" charset="0"/>
@@ -17765,7 +17603,7 @@
                           <a:ea typeface="Calibri" pitchFamily="34" charset="-122"/>
                           <a:cs typeface="Calibri" pitchFamily="34" charset="-120"/>
                         </a:rPr>
-                        <a:t>diffusion sampling of ensembles</a:t>
+                        <a:t>kinetic / Jacobian regularization (Finlay 2020)</a:t>
                       </a:r>
                       <a:endParaRPr lang="en-US" sz="1100" dirty="0">
                         <a:latin typeface="Calibri" charset="0"/>
@@ -17795,6 +17633,8 @@
                     </a:lnB>
                   </a:tcPr>
                 </a:tc>
+              </a:tr>
+              <a:tr h="384048">
                 <a:tc>
                   <a:txBody>
                     <a:bodyPr/>
@@ -17812,7 +17652,7 @@
                           <a:ea typeface="Calibri" pitchFamily="34" charset="-122"/>
                           <a:cs typeface="Calibri" pitchFamily="34" charset="-120"/>
                         </a:rPr>
-                        <a:t>Price et al., Nature 2025 (GenCast)</a:t>
+                        <a:t>Discontinuous targets</a:t>
                       </a:r>
                       <a:endParaRPr lang="en-US" sz="1100" dirty="0">
                         <a:latin typeface="Calibri" charset="0"/>
@@ -17842,8 +17682,102 @@
                     </a:lnB>
                   </a:tcPr>
                 </a:tc>
+                <a:tc>
+                  <a:txBody>
+                    <a:bodyPr/>
+                    <a:lstStyle/>
+                    <a:p>
+                      <a:pPr algn="l" indent="0" marL="0">
+                        <a:buNone/>
+                      </a:pPr>
+                      <a:r>
+                        <a:rPr lang="en-US" sz="1100" dirty="0">
+                          <a:solidFill>
+                            <a:srgbClr val="1F2328"/>
+                          </a:solidFill>
+                          <a:latin typeface="Calibri" pitchFamily="34" charset="0"/>
+                          <a:ea typeface="Calibri" pitchFamily="34" charset="-122"/>
+                          <a:cs typeface="Calibri" pitchFamily="34" charset="-120"/>
+                        </a:rPr>
+                        <a:t>∇ 1{τ ≤ t*} = 0 pathwise</a:t>
+                      </a:r>
+                      <a:endParaRPr lang="en-US" sz="1100" dirty="0">
+                        <a:latin typeface="Calibri" charset="0"/>
+                        <a:ea typeface="Calibri" charset="0"/>
+                        <a:cs typeface="Calibri" charset="0"/>
+                      </a:endParaRPr>
+                    </a:p>
+                  </a:txBody>
+                  <a:tcPr marL="54864" marR="54864" marT="18288" marB="18288" anchor="ctr">
+                    <a:lnL w="0" cap="flat" cmpd="sng" algn="ctr">
+                      <a:noFill/>
+                    </a:lnL>
+                    <a:lnR w="0" cap="flat" cmpd="sng" algn="ctr">
+                      <a:noFill/>
+                    </a:lnR>
+                    <a:lnT w="0" cap="flat" cmpd="sng" algn="ctr">
+                      <a:noFill/>
+                    </a:lnT>
+                    <a:lnB w="6350" cap="flat" cmpd="sng" algn="ctr">
+                      <a:solidFill>
+                        <a:srgbClr val="E5E7EB"/>
+                      </a:solidFill>
+                      <a:prstDash val="solid"/>
+                      <a:round/>
+                      <a:headEnd type="none" w="med" len="med"/>
+                      <a:tailEnd type="none" w="med" len="med"/>
+                    </a:lnB>
+                  </a:tcPr>
+                </a:tc>
+                <a:tc>
+                  <a:txBody>
+                    <a:bodyPr/>
+                    <a:lstStyle/>
+                    <a:p>
+                      <a:pPr algn="l" indent="0" marL="0">
+                        <a:buNone/>
+                      </a:pPr>
+                      <a:r>
+                        <a:rPr lang="en-US" sz="1100" dirty="0">
+                          <a:solidFill>
+                            <a:srgbClr val="1F2328"/>
+                          </a:solidFill>
+                          <a:latin typeface="Calibri" pitchFamily="34" charset="0"/>
+                          <a:ea typeface="Calibri" pitchFamily="34" charset="-122"/>
+                          <a:cs typeface="Calibri" pitchFamily="34" charset="-120"/>
+                        </a:rPr>
+                        <a:t>bridge crossing, surrogate, score function</a:t>
+                      </a:r>
+                      <a:endParaRPr lang="en-US" sz="1100" dirty="0">
+                        <a:latin typeface="Calibri" charset="0"/>
+                        <a:ea typeface="Calibri" charset="0"/>
+                        <a:cs typeface="Calibri" charset="0"/>
+                      </a:endParaRPr>
+                    </a:p>
+                  </a:txBody>
+                  <a:tcPr marL="54864" marR="54864" marT="18288" marB="18288" anchor="ctr">
+                    <a:lnL w="0" cap="flat" cmpd="sng" algn="ctr">
+                      <a:noFill/>
+                    </a:lnL>
+                    <a:lnR w="0" cap="flat" cmpd="sng" algn="ctr">
+                      <a:noFill/>
+                    </a:lnR>
+                    <a:lnT w="0" cap="flat" cmpd="sng" algn="ctr">
+                      <a:noFill/>
+                    </a:lnT>
+                    <a:lnB w="6350" cap="flat" cmpd="sng" algn="ctr">
+                      <a:solidFill>
+                        <a:srgbClr val="E5E7EB"/>
+                      </a:solidFill>
+                      <a:prstDash val="solid"/>
+                      <a:round/>
+                      <a:headEnd type="none" w="med" len="med"/>
+                      <a:tailEnd type="none" w="med" len="med"/>
+                    </a:lnB>
+                  </a:tcPr>
+                </a:tc>
               </a:tr>
-              <a:tr h="365760">
+              <a:tr h="384048">
                 <a:tc>
                   <a:txBody>
                     <a:bodyPr/>
@@ -17861,7 +17795,7 @@
                           <a:ea typeface="Calibri" pitchFamily="34" charset="-122"/>
                           <a:cs typeface="Calibri" pitchFamily="34" charset="-120"/>
                         </a:rPr>
-                        <a:t>Robotics</a:t>
+                        <a:t>Identifiability</a:t>
                       </a:r>
                       <a:endParaRPr lang="en-US" sz="1100" dirty="0">
                         <a:latin typeface="Calibri" charset="0"/>
@@ -17908,7 +17842,7 @@
                           <a:ea typeface="Calibri" pitchFamily="34" charset="-122"/>
                           <a:cs typeface="Calibri" pitchFamily="34" charset="-120"/>
                         </a:rPr>
-                        <a:t>action trajectory</a:t>
+                        <a:t>drift ↔ diffusion trade-off; latent reparam.</a:t>
                       </a:r>
                       <a:endParaRPr lang="en-US" sz="1100" dirty="0">
                         <a:latin typeface="Calibri" charset="0"/>
@@ -17955,7 +17889,7 @@
                           <a:ea typeface="Calibri" pitchFamily="34" charset="-122"/>
                           <a:cs typeface="Calibri" pitchFamily="34" charset="-120"/>
                         </a:rPr>
-                        <a:t>reverse diffusion / flow matching</a:t>
+                        <a:t>ordinal head anchors q; synthetic recovery test</a:t>
                       </a:r>
                       <a:endParaRPr lang="en-US" sz="1100" dirty="0">
                         <a:latin typeface="Calibri" charset="0"/>
@@ -17985,6 +17919,8 @@
                     </a:lnB>
                   </a:tcPr>
                 </a:tc>
+              </a:tr>
+              <a:tr h="384048">
                 <a:tc>
                   <a:txBody>
                     <a:bodyPr/>
@@ -18002,7 +17938,7 @@
                           <a:ea typeface="Calibri" pitchFamily="34" charset="-122"/>
                           <a:cs typeface="Calibri" pitchFamily="34" charset="-120"/>
                         </a:rPr>
-                        <a:t>Chi et al. 2023; Black et al. 2024</a:t>
+                        <a:t>Visual confounds</a:t>
                       </a:r>
                       <a:endParaRPr lang="en-US" sz="1100" dirty="0">
                         <a:latin typeface="Calibri" charset="0"/>
@@ -18032,8 +17968,102 @@
                     </a:lnB>
                   </a:tcPr>
                 </a:tc>
+                <a:tc>
+                  <a:txBody>
+                    <a:bodyPr/>
+                    <a:lstStyle/>
+                    <a:p>
+                      <a:pPr algn="l" indent="0" marL="0">
+                        <a:buNone/>
+                      </a:pPr>
+                      <a:r>
+                        <a:rPr lang="en-US" sz="1100" dirty="0">
+                          <a:solidFill>
+                            <a:srgbClr val="1F2328"/>
+                          </a:solidFill>
+                          <a:latin typeface="Calibri" pitchFamily="34" charset="0"/>
+                          <a:ea typeface="Calibri" pitchFamily="34" charset="-122"/>
+                          <a:cs typeface="Calibri" pitchFamily="34" charset="-120"/>
+                        </a:rPr>
+                        <a:t>lighting, marks, wind rub look like ripening</a:t>
+                      </a:r>
+                      <a:endParaRPr lang="en-US" sz="1100" dirty="0">
+                        <a:latin typeface="Calibri" charset="0"/>
+                        <a:ea typeface="Calibri" charset="0"/>
+                        <a:cs typeface="Calibri" charset="0"/>
+                      </a:endParaRPr>
+                    </a:p>
+                  </a:txBody>
+                  <a:tcPr marL="54864" marR="54864" marT="18288" marB="18288" anchor="ctr">
+                    <a:lnL w="0" cap="flat" cmpd="sng" algn="ctr">
+                      <a:noFill/>
+                    </a:lnL>
+                    <a:lnR w="0" cap="flat" cmpd="sng" algn="ctr">
+                      <a:noFill/>
+                    </a:lnR>
+                    <a:lnT w="0" cap="flat" cmpd="sng" algn="ctr">
+                      <a:noFill/>
+                    </a:lnT>
+                    <a:lnB w="6350" cap="flat" cmpd="sng" algn="ctr">
+                      <a:solidFill>
+                        <a:srgbClr val="E5E7EB"/>
+                      </a:solidFill>
+                      <a:prstDash val="solid"/>
+                      <a:round/>
+                      <a:headEnd type="none" w="med" len="med"/>
+                      <a:tailEnd type="none" w="med" len="med"/>
+                    </a:lnB>
+                  </a:tcPr>
+                </a:tc>
+                <a:tc>
+                  <a:txBody>
+                    <a:bodyPr/>
+                    <a:lstStyle/>
+                    <a:p>
+                      <a:pPr algn="l" indent="0" marL="0">
+                        <a:buNone/>
+                      </a:pPr>
+                      <a:r>
+                        <a:rPr lang="en-US" sz="1100" dirty="0">
+                          <a:solidFill>
+                            <a:srgbClr val="1F2328"/>
+                          </a:solidFill>
+                          <a:latin typeface="Calibri" pitchFamily="34" charset="0"/>
+                          <a:ea typeface="Calibri" pitchFamily="34" charset="-122"/>
+                          <a:cs typeface="Calibri" pitchFamily="34" charset="-120"/>
+                        </a:rPr>
+                        <a:t>paper: per-sample &gt; per-picture accuracy</a:t>
+                      </a:r>
+                      <a:endParaRPr lang="en-US" sz="1100" dirty="0">
+                        <a:latin typeface="Calibri" charset="0"/>
+                        <a:ea typeface="Calibri" charset="0"/>
+                        <a:cs typeface="Calibri" charset="0"/>
+                      </a:endParaRPr>
+                    </a:p>
+                  </a:txBody>
+                  <a:tcPr marL="54864" marR="54864" marT="18288" marB="18288" anchor="ctr">
+                    <a:lnL w="0" cap="flat" cmpd="sng" algn="ctr">
+                      <a:noFill/>
+                    </a:lnL>
+                    <a:lnR w="0" cap="flat" cmpd="sng" algn="ctr">
+                      <a:noFill/>
+                    </a:lnR>
+                    <a:lnT w="0" cap="flat" cmpd="sng" algn="ctr">
+                      <a:noFill/>
+                    </a:lnT>
+                    <a:lnB w="6350" cap="flat" cmpd="sng" algn="ctr">
+                      <a:solidFill>
+                        <a:srgbClr val="E5E7EB"/>
+                      </a:solidFill>
+                      <a:prstDash val="solid"/>
+                      <a:round/>
+                      <a:headEnd type="none" w="med" len="med"/>
+                      <a:tailEnd type="none" w="med" len="med"/>
+                    </a:lnB>
+                  </a:tcPr>
+                </a:tc>
               </a:tr>
-              <a:tr h="365760">
+              <a:tr h="384048">
                 <a:tc>
                   <a:txBody>
                     <a:bodyPr/>
@@ -18051,7 +18081,7 @@
                           <a:ea typeface="Calibri" pitchFamily="34" charset="-122"/>
                           <a:cs typeface="Calibri" pitchFamily="34" charset="-120"/>
                         </a:rPr>
-                        <a:t>Quant finance</a:t>
+                        <a:t>Uncontrolled covariates</a:t>
                       </a:r>
                       <a:endParaRPr lang="en-US" sz="1100" dirty="0">
                         <a:latin typeface="Calibri" charset="0"/>
@@ -18098,7 +18128,7 @@
                           <a:ea typeface="Calibri" pitchFamily="34" charset="-122"/>
                           <a:cs typeface="Calibri" pitchFamily="34" charset="-120"/>
                         </a:rPr>
-                        <a:t>price, volatility</a:t>
+                        <a:t>Tamb 20% faster than Arrhenius</a:t>
                       </a:r>
                       <a:endParaRPr lang="en-US" sz="1100" dirty="0">
                         <a:latin typeface="Calibri" charset="0"/>
@@ -18145,434 +18175,7 @@
                           <a:ea typeface="Calibri" pitchFamily="34" charset="-122"/>
                           <a:cs typeface="Calibri" pitchFamily="34" charset="-120"/>
                         </a:rPr>
-                        <a:t>calibrated market models</a:t>
-                      </a:r>
-                      <a:endParaRPr lang="en-US" sz="1100" dirty="0">
-                        <a:latin typeface="Calibri" charset="0"/>
-                        <a:ea typeface="Calibri" charset="0"/>
-                        <a:cs typeface="Calibri" charset="0"/>
-                      </a:endParaRPr>
-                    </a:p>
-                  </a:txBody>
-                  <a:tcPr marL="54864" marR="54864" marT="18288" marB="18288" anchor="ctr">
-                    <a:lnL w="0" cap="flat" cmpd="sng" algn="ctr">
-                      <a:noFill/>
-                    </a:lnL>
-                    <a:lnR w="0" cap="flat" cmpd="sng" algn="ctr">
-                      <a:noFill/>
-                    </a:lnR>
-                    <a:lnT w="0" cap="flat" cmpd="sng" algn="ctr">
-                      <a:noFill/>
-                    </a:lnT>
-                    <a:lnB w="6350" cap="flat" cmpd="sng" algn="ctr">
-                      <a:solidFill>
-                        <a:srgbClr val="E5E7EB"/>
-                      </a:solidFill>
-                      <a:prstDash val="solid"/>
-                      <a:round/>
-                      <a:headEnd type="none" w="med" len="med"/>
-                      <a:tailEnd type="none" w="med" len="med"/>
-                    </a:lnB>
-                  </a:tcPr>
-                </a:tc>
-                <a:tc>
-                  <a:txBody>
-                    <a:bodyPr/>
-                    <a:lstStyle/>
-                    <a:p>
-                      <a:pPr algn="l" indent="0" marL="0">
-                        <a:buNone/>
-                      </a:pPr>
-                      <a:r>
-                        <a:rPr lang="en-US" sz="1100" dirty="0">
-                          <a:solidFill>
-                            <a:srgbClr val="1F2328"/>
-                          </a:solidFill>
-                          <a:latin typeface="Calibri" pitchFamily="34" charset="0"/>
-                          <a:ea typeface="Calibri" pitchFamily="34" charset="-122"/>
-                          <a:cs typeface="Calibri" pitchFamily="34" charset="-120"/>
-                        </a:rPr>
-                        <a:t>Gierjatowicz 2022; Cohen 2021</a:t>
-                      </a:r>
-                      <a:endParaRPr lang="en-US" sz="1100" dirty="0">
-                        <a:latin typeface="Calibri" charset="0"/>
-                        <a:ea typeface="Calibri" charset="0"/>
-                        <a:cs typeface="Calibri" charset="0"/>
-                      </a:endParaRPr>
-                    </a:p>
-                  </a:txBody>
-                  <a:tcPr marL="54864" marR="54864" marT="18288" marB="18288" anchor="ctr">
-                    <a:lnL w="0" cap="flat" cmpd="sng" algn="ctr">
-                      <a:noFill/>
-                    </a:lnL>
-                    <a:lnR w="0" cap="flat" cmpd="sng" algn="ctr">
-                      <a:noFill/>
-                    </a:lnR>
-                    <a:lnT w="0" cap="flat" cmpd="sng" algn="ctr">
-                      <a:noFill/>
-                    </a:lnT>
-                    <a:lnB w="6350" cap="flat" cmpd="sng" algn="ctr">
-                      <a:solidFill>
-                        <a:srgbClr val="E5E7EB"/>
-                      </a:solidFill>
-                      <a:prstDash val="solid"/>
-                      <a:round/>
-                      <a:headEnd type="none" w="med" len="med"/>
-                      <a:tailEnd type="none" w="med" len="med"/>
-                    </a:lnB>
-                  </a:tcPr>
-                </a:tc>
-              </a:tr>
-              <a:tr h="365760">
-                <a:tc>
-                  <a:txBody>
-                    <a:bodyPr/>
-                    <a:lstStyle/>
-                    <a:p>
-                      <a:pPr algn="l" indent="0" marL="0">
-                        <a:buNone/>
-                      </a:pPr>
-                      <a:r>
-                        <a:rPr lang="en-US" sz="1100" dirty="0">
-                          <a:solidFill>
-                            <a:srgbClr val="1F2328"/>
-                          </a:solidFill>
-                          <a:latin typeface="Calibri" pitchFamily="34" charset="0"/>
-                          <a:ea typeface="Calibri" pitchFamily="34" charset="-122"/>
-                          <a:cs typeface="Calibri" pitchFamily="34" charset="-120"/>
-                        </a:rPr>
-                        <a:t>Clinical</a:t>
-                      </a:r>
-                      <a:endParaRPr lang="en-US" sz="1100" dirty="0">
-                        <a:latin typeface="Calibri" charset="0"/>
-                        <a:ea typeface="Calibri" charset="0"/>
-                        <a:cs typeface="Calibri" charset="0"/>
-                      </a:endParaRPr>
-                    </a:p>
-                  </a:txBody>
-                  <a:tcPr marL="54864" marR="54864" marT="18288" marB="18288" anchor="ctr">
-                    <a:lnL w="0" cap="flat" cmpd="sng" algn="ctr">
-                      <a:noFill/>
-                    </a:lnL>
-                    <a:lnR w="0" cap="flat" cmpd="sng" algn="ctr">
-                      <a:noFill/>
-                    </a:lnR>
-                    <a:lnT w="0" cap="flat" cmpd="sng" algn="ctr">
-                      <a:noFill/>
-                    </a:lnT>
-                    <a:lnB w="6350" cap="flat" cmpd="sng" algn="ctr">
-                      <a:solidFill>
-                        <a:srgbClr val="E5E7EB"/>
-                      </a:solidFill>
-                      <a:prstDash val="solid"/>
-                      <a:round/>
-                      <a:headEnd type="none" w="med" len="med"/>
-                      <a:tailEnd type="none" w="med" len="med"/>
-                    </a:lnB>
-                  </a:tcPr>
-                </a:tc>
-                <a:tc>
-                  <a:txBody>
-                    <a:bodyPr/>
-                    <a:lstStyle/>
-                    <a:p>
-                      <a:pPr algn="l" indent="0" marL="0">
-                        <a:buNone/>
-                      </a:pPr>
-                      <a:r>
-                        <a:rPr lang="en-US" sz="1100" dirty="0">
-                          <a:solidFill>
-                            <a:srgbClr val="1F2328"/>
-                          </a:solidFill>
-                          <a:latin typeface="Calibri" pitchFamily="34" charset="0"/>
-                          <a:ea typeface="Calibri" pitchFamily="34" charset="-122"/>
-                          <a:cs typeface="Calibri" pitchFamily="34" charset="-120"/>
-                        </a:rPr>
-                        <a:t>patient state</a:t>
-                      </a:r>
-                      <a:endParaRPr lang="en-US" sz="1100" dirty="0">
-                        <a:latin typeface="Calibri" charset="0"/>
-                        <a:ea typeface="Calibri" charset="0"/>
-                        <a:cs typeface="Calibri" charset="0"/>
-                      </a:endParaRPr>
-                    </a:p>
-                  </a:txBody>
-                  <a:tcPr marL="54864" marR="54864" marT="18288" marB="18288" anchor="ctr">
-                    <a:lnL w="0" cap="flat" cmpd="sng" algn="ctr">
-                      <a:noFill/>
-                    </a:lnL>
-                    <a:lnR w="0" cap="flat" cmpd="sng" algn="ctr">
-                      <a:noFill/>
-                    </a:lnR>
-                    <a:lnT w="0" cap="flat" cmpd="sng" algn="ctr">
-                      <a:noFill/>
-                    </a:lnT>
-                    <a:lnB w="6350" cap="flat" cmpd="sng" algn="ctr">
-                      <a:solidFill>
-                        <a:srgbClr val="E5E7EB"/>
-                      </a:solidFill>
-                      <a:prstDash val="solid"/>
-                      <a:round/>
-                      <a:headEnd type="none" w="med" len="med"/>
-                      <a:tailEnd type="none" w="med" len="med"/>
-                    </a:lnB>
-                  </a:tcPr>
-                </a:tc>
-                <a:tc>
-                  <a:txBody>
-                    <a:bodyPr/>
-                    <a:lstStyle/>
-                    <a:p>
-                      <a:pPr algn="l" indent="0" marL="0">
-                        <a:buNone/>
-                      </a:pPr>
-                      <a:r>
-                        <a:rPr lang="en-US" sz="1100" dirty="0">
-                          <a:solidFill>
-                            <a:srgbClr val="1F2328"/>
-                          </a:solidFill>
-                          <a:latin typeface="Calibri" pitchFamily="34" charset="0"/>
-                          <a:ea typeface="Calibri" pitchFamily="34" charset="-122"/>
-                          <a:cs typeface="Calibri" pitchFamily="34" charset="-120"/>
-                        </a:rPr>
-                        <a:t>irregular vitals (ODE/CDE family)</a:t>
-                      </a:r>
-                      <a:endParaRPr lang="en-US" sz="1100" dirty="0">
-                        <a:latin typeface="Calibri" charset="0"/>
-                        <a:ea typeface="Calibri" charset="0"/>
-                        <a:cs typeface="Calibri" charset="0"/>
-                      </a:endParaRPr>
-                    </a:p>
-                  </a:txBody>
-                  <a:tcPr marL="54864" marR="54864" marT="18288" marB="18288" anchor="ctr">
-                    <a:lnL w="0" cap="flat" cmpd="sng" algn="ctr">
-                      <a:noFill/>
-                    </a:lnL>
-                    <a:lnR w="0" cap="flat" cmpd="sng" algn="ctr">
-                      <a:noFill/>
-                    </a:lnR>
-                    <a:lnT w="0" cap="flat" cmpd="sng" algn="ctr">
-                      <a:noFill/>
-                    </a:lnT>
-                    <a:lnB w="6350" cap="flat" cmpd="sng" algn="ctr">
-                      <a:solidFill>
-                        <a:srgbClr val="E5E7EB"/>
-                      </a:solidFill>
-                      <a:prstDash val="solid"/>
-                      <a:round/>
-                      <a:headEnd type="none" w="med" len="med"/>
-                      <a:tailEnd type="none" w="med" len="med"/>
-                    </a:lnB>
-                  </a:tcPr>
-                </a:tc>
-                <a:tc>
-                  <a:txBody>
-                    <a:bodyPr/>
-                    <a:lstStyle/>
-                    <a:p>
-                      <a:pPr algn="l" indent="0" marL="0">
-                        <a:buNone/>
-                      </a:pPr>
-                      <a:r>
-                        <a:rPr lang="en-US" sz="1100" dirty="0">
-                          <a:solidFill>
-                            <a:srgbClr val="1F2328"/>
-                          </a:solidFill>
-                          <a:latin typeface="Calibri" pitchFamily="34" charset="0"/>
-                          <a:ea typeface="Calibri" pitchFamily="34" charset="-122"/>
-                          <a:cs typeface="Calibri" pitchFamily="34" charset="-120"/>
-                        </a:rPr>
-                        <a:t>Rubanova 2019; Kidger 2020</a:t>
-                      </a:r>
-                      <a:endParaRPr lang="en-US" sz="1100" dirty="0">
-                        <a:latin typeface="Calibri" charset="0"/>
-                        <a:ea typeface="Calibri" charset="0"/>
-                        <a:cs typeface="Calibri" charset="0"/>
-                      </a:endParaRPr>
-                    </a:p>
-                  </a:txBody>
-                  <a:tcPr marL="54864" marR="54864" marT="18288" marB="18288" anchor="ctr">
-                    <a:lnL w="0" cap="flat" cmpd="sng" algn="ctr">
-                      <a:noFill/>
-                    </a:lnL>
-                    <a:lnR w="0" cap="flat" cmpd="sng" algn="ctr">
-                      <a:noFill/>
-                    </a:lnR>
-                    <a:lnT w="0" cap="flat" cmpd="sng" algn="ctr">
-                      <a:noFill/>
-                    </a:lnT>
-                    <a:lnB w="6350" cap="flat" cmpd="sng" algn="ctr">
-                      <a:solidFill>
-                        <a:srgbClr val="E5E7EB"/>
-                      </a:solidFill>
-                      <a:prstDash val="solid"/>
-                      <a:round/>
-                      <a:headEnd type="none" w="med" len="med"/>
-                      <a:tailEnd type="none" w="med" len="med"/>
-                    </a:lnB>
-                  </a:tcPr>
-                </a:tc>
-              </a:tr>
-              <a:tr h="365760">
-                <a:tc>
-                  <a:txBody>
-                    <a:bodyPr/>
-                    <a:lstStyle/>
-                    <a:p>
-                      <a:pPr algn="l" indent="0" marL="0">
-                        <a:buNone/>
-                      </a:pPr>
-                      <a:r>
-                        <a:rPr lang="en-US" sz="1100" dirty="0">
-                          <a:solidFill>
-                            <a:srgbClr val="1F2328"/>
-                          </a:solidFill>
-                          <a:latin typeface="Calibri" pitchFamily="34" charset="0"/>
-                          <a:ea typeface="Calibri" pitchFamily="34" charset="-122"/>
-                          <a:cs typeface="Calibri" pitchFamily="34" charset="-120"/>
-                        </a:rPr>
-                        <a:t>Generative models</a:t>
-                      </a:r>
-                      <a:endParaRPr lang="en-US" sz="1100" dirty="0">
-                        <a:latin typeface="Calibri" charset="0"/>
-                        <a:ea typeface="Calibri" charset="0"/>
-                        <a:cs typeface="Calibri" charset="0"/>
-                      </a:endParaRPr>
-                    </a:p>
-                  </a:txBody>
-                  <a:tcPr marL="54864" marR="54864" marT="18288" marB="18288" anchor="ctr">
-                    <a:lnL w="0" cap="flat" cmpd="sng" algn="ctr">
-                      <a:noFill/>
-                    </a:lnL>
-                    <a:lnR w="0" cap="flat" cmpd="sng" algn="ctr">
-                      <a:noFill/>
-                    </a:lnR>
-                    <a:lnT w="0" cap="flat" cmpd="sng" algn="ctr">
-                      <a:noFill/>
-                    </a:lnT>
-                    <a:lnB w="6350" cap="flat" cmpd="sng" algn="ctr">
-                      <a:solidFill>
-                        <a:srgbClr val="E5E7EB"/>
-                      </a:solidFill>
-                      <a:prstDash val="solid"/>
-                      <a:round/>
-                      <a:headEnd type="none" w="med" len="med"/>
-                      <a:tailEnd type="none" w="med" len="med"/>
-                    </a:lnB>
-                  </a:tcPr>
-                </a:tc>
-                <a:tc>
-                  <a:txBody>
-                    <a:bodyPr/>
-                    <a:lstStyle/>
-                    <a:p>
-                      <a:pPr algn="l" indent="0" marL="0">
-                        <a:buNone/>
-                      </a:pPr>
-                      <a:r>
-                        <a:rPr lang="en-US" sz="1100" dirty="0">
-                          <a:solidFill>
-                            <a:srgbClr val="1F2328"/>
-                          </a:solidFill>
-                          <a:latin typeface="Calibri" pitchFamily="34" charset="0"/>
-                          <a:ea typeface="Calibri" pitchFamily="34" charset="-122"/>
-                          <a:cs typeface="Calibri" pitchFamily="34" charset="-120"/>
-                        </a:rPr>
-                        <a:t>image / audio</a:t>
-                      </a:r>
-                      <a:endParaRPr lang="en-US" sz="1100" dirty="0">
-                        <a:latin typeface="Calibri" charset="0"/>
-                        <a:ea typeface="Calibri" charset="0"/>
-                        <a:cs typeface="Calibri" charset="0"/>
-                      </a:endParaRPr>
-                    </a:p>
-                  </a:txBody>
-                  <a:tcPr marL="54864" marR="54864" marT="18288" marB="18288" anchor="ctr">
-                    <a:lnL w="0" cap="flat" cmpd="sng" algn="ctr">
-                      <a:noFill/>
-                    </a:lnL>
-                    <a:lnR w="0" cap="flat" cmpd="sng" algn="ctr">
-                      <a:noFill/>
-                    </a:lnR>
-                    <a:lnT w="0" cap="flat" cmpd="sng" algn="ctr">
-                      <a:noFill/>
-                    </a:lnT>
-                    <a:lnB w="6350" cap="flat" cmpd="sng" algn="ctr">
-                      <a:solidFill>
-                        <a:srgbClr val="E5E7EB"/>
-                      </a:solidFill>
-                      <a:prstDash val="solid"/>
-                      <a:round/>
-                      <a:headEnd type="none" w="med" len="med"/>
-                      <a:tailEnd type="none" w="med" len="med"/>
-                    </a:lnB>
-                  </a:tcPr>
-                </a:tc>
-                <a:tc>
-                  <a:txBody>
-                    <a:bodyPr/>
-                    <a:lstStyle/>
-                    <a:p>
-                      <a:pPr algn="l" indent="0" marL="0">
-                        <a:buNone/>
-                      </a:pPr>
-                      <a:r>
-                        <a:rPr lang="en-US" sz="1100" dirty="0">
-                          <a:solidFill>
-                            <a:srgbClr val="1F2328"/>
-                          </a:solidFill>
-                          <a:latin typeface="Calibri" pitchFamily="34" charset="0"/>
-                          <a:ea typeface="Calibri" pitchFamily="34" charset="-122"/>
-                          <a:cs typeface="Calibri" pitchFamily="34" charset="-120"/>
-                        </a:rPr>
-                        <a:t>score-based sampling</a:t>
-                      </a:r>
-                      <a:endParaRPr lang="en-US" sz="1100" dirty="0">
-                        <a:latin typeface="Calibri" charset="0"/>
-                        <a:ea typeface="Calibri" charset="0"/>
-                        <a:cs typeface="Calibri" charset="0"/>
-                      </a:endParaRPr>
-                    </a:p>
-                  </a:txBody>
-                  <a:tcPr marL="54864" marR="54864" marT="18288" marB="18288" anchor="ctr">
-                    <a:lnL w="0" cap="flat" cmpd="sng" algn="ctr">
-                      <a:noFill/>
-                    </a:lnL>
-                    <a:lnR w="0" cap="flat" cmpd="sng" algn="ctr">
-                      <a:noFill/>
-                    </a:lnR>
-                    <a:lnT w="0" cap="flat" cmpd="sng" algn="ctr">
-                      <a:noFill/>
-                    </a:lnT>
-                    <a:lnB w="6350" cap="flat" cmpd="sng" algn="ctr">
-                      <a:solidFill>
-                        <a:srgbClr val="E5E7EB"/>
-                      </a:solidFill>
-                      <a:prstDash val="solid"/>
-                      <a:round/>
-                      <a:headEnd type="none" w="med" len="med"/>
-                      <a:tailEnd type="none" w="med" len="med"/>
-                    </a:lnB>
-                  </a:tcPr>
-                </a:tc>
-                <a:tc>
-                  <a:txBody>
-                    <a:bodyPr/>
-                    <a:lstStyle/>
-                    <a:p>
-                      <a:pPr algn="l" indent="0" marL="0">
-                        <a:buNone/>
-                      </a:pPr>
-                      <a:r>
-                        <a:rPr lang="en-US" sz="1100" dirty="0">
-                          <a:solidFill>
-                            <a:srgbClr val="1F2328"/>
-                          </a:solidFill>
-                          <a:latin typeface="Calibri" pitchFamily="34" charset="0"/>
-                          <a:ea typeface="Calibri" pitchFamily="34" charset="-122"/>
-                          <a:cs typeface="Calibri" pitchFamily="34" charset="-120"/>
-                        </a:rPr>
-                        <a:t>Song et al. 2021</a:t>
+                        <a:t>condition on humidity if logged</a:t>
                       </a:r>
                       <a:endParaRPr lang="en-US" sz="1100" dirty="0">
                         <a:latin typeface="Calibri" charset="0"/>
@@ -18709,7 +18312,7 @@
                   <a:schemeClr val="tx2"/>
                 </a:solidFill>
               </a:rPr>
-              <a:t>LIMITS</a:t>
+              <a:t>SUMMARY</a:t>
             </a:r>
             <a:endParaRPr lang="en-US" sz="950" dirty="0"/>
           </a:p>
@@ -18750,7 +18353,7 @@
                 <a:ea typeface="Arial" pitchFamily="34" charset="-122"/>
                 <a:cs typeface="Arial" pitchFamily="34" charset="-120"/>
               </a:rPr>
-              <a:t>Open Problems</a:t>
+              <a:t>Takeaways</a:t>
             </a:r>
             <a:endParaRPr lang="en-US" sz="2500" dirty="0"/>
           </a:p>
@@ -18758,37 +18361,14 @@
       </p:sp>
       <p:sp>
         <p:nvSpPr>
-          <p:cNvPr id="4" name="Shape 2"/>
-          <p:cNvSpPr/>
+          <p:cNvPr id="4" name="Text 2"/>
+          <p:cNvSpPr txBox="1"/>
           <p:nvPr/>
         </p:nvSpPr>
         <p:spPr>
           <a:xfrm>
-            <a:off x="457200" y="4370832"/>
-            <a:ext cx="8229600" cy="0"/>
-          </a:xfrm>
-          <a:prstGeom prst="line">
-            <a:avLst/>
-          </a:prstGeom>
-          <a:noFill/>
-          <a:ln w="12700">
-            <a:solidFill>
-              <a:srgbClr val="E5E7EB"/>
-            </a:solidFill>
-            <a:prstDash val="solid"/>
-          </a:ln>
-        </p:spPr>
-      </p:sp>
-      <p:sp>
-        <p:nvSpPr>
-          <p:cNvPr id="5" name="takeaway"/>
-          <p:cNvSpPr txBox="1"/>
-          <p:nvPr/>
-        </p:nvSpPr>
-        <p:spPr>
-          <a:xfrm>
-            <a:off x="457200" y="4425696"/>
-            <a:ext cx="7863840" cy="329184"/>
+            <a:off x="457200" y="1371600"/>
+            <a:ext cx="8229600" cy="365760"/>
           </a:xfrm>
           <a:prstGeom prst="rect">
             <a:avLst/>
@@ -18797,1056 +18377,176 @@
           <a:ln/>
         </p:spPr>
         <p:txBody>
-          <a:bodyPr wrap="square" lIns="0" tIns="0" rIns="0" bIns="0" rtlCol="0" anchor="ctr"/>
+          <a:bodyPr wrap="square" lIns="0" tIns="0" rIns="0" bIns="0" rtlCol="0" anchor="t"/>
           <a:lstStyle/>
           <a:p>
             <a:pPr indent="0" marL="0">
               <a:buNone/>
             </a:pPr>
             <a:r>
-              <a:rPr lang="en-US" sz="1250" b="1" dirty="0">
+              <a:rPr lang="en-US" sz="1700" b="1" dirty="0">
+                <a:solidFill>
+                  <a:srgbClr val="C8102E"/>
+                </a:solidFill>
+              </a:rPr>
+              <a:t>Avocados:</a:t>
+            </a:r>
+            <a:pPr indent="0" marL="0">
+              <a:buNone/>
+            </a:pPr>
+            <a:r>
+              <a:rPr lang="en-US" sz="1700" dirty="0">
                 <a:solidFill>
                   <a:srgbClr val="1F2328"/>
                 </a:solidFill>
               </a:rPr>
-              <a:t>O(1) memory is real; exact, unbiased, identifiable gradients each cost extra.</a:t>
+              <a:t> drift explains the mean; the spread needs diffusion.</a:t>
             </a:r>
-            <a:endParaRPr lang="en-US" sz="1250" dirty="0"/>
+            <a:endParaRPr lang="en-US" sz="1700" dirty="0"/>
           </a:p>
         </p:txBody>
       </p:sp>
-      <p:graphicFrame>
-        <p:nvGraphicFramePr>
-          <p:cNvPr id="22" name="Table 0"/>
-          <p:cNvGraphicFramePr>
-            <a:graphicFrameLocks noGrp="1"/>
-          </p:cNvGraphicFramePr>
-          <p:nvPr>
-            <p:extLst>
-              <p:ext uri="{D42A27DB-BD31-4B8C-83A1-F6EECF244321}">
-                <p14:modId xmlns:p14="http://schemas.microsoft.com/office/powerpoint/2010/main" val="1579011935"/>
-              </p:ext>
-            </p:extLst>
-          </p:nvPr>
-        </p:nvGraphicFramePr>
-        <p:xfrm>
-          <a:off x="457200" y="1280160"/>
-          <a:ext cx="8229600" cy="914400"/>
-        </p:xfrm>
-        <a:graphic>
-          <a:graphicData uri="http://schemas.openxmlformats.org/drawingml/2006/table">
-            <a:tbl>
-              <a:tblPr/>
-              <a:tblGrid>
-                <a:gridCol w="1737360"/>
-                <a:gridCol w="3017520"/>
-                <a:gridCol w="3474720"/>
-              </a:tblGrid>
-              <a:tr h="384048">
-                <a:tc>
-                  <a:txBody>
-                    <a:bodyPr/>
-                    <a:lstStyle/>
-                    <a:p>
-                      <a:pPr algn="l" indent="0" marL="0">
-                        <a:buNone/>
-                      </a:pPr>
-                      <a:r>
-                        <a:rPr lang="en-US" sz="1000" b="1" dirty="0">
-                          <a:solidFill>
-                            <a:srgbClr val="6B7280"/>
-                          </a:solidFill>
-                          <a:latin typeface="Calibri" pitchFamily="34" charset="0"/>
-                          <a:ea typeface="Calibri" pitchFamily="34" charset="-122"/>
-                          <a:cs typeface="Calibri" pitchFamily="34" charset="-120"/>
-                        </a:rPr>
-                        <a:t>Issue</a:t>
-                      </a:r>
-                      <a:endParaRPr lang="en-US" sz="1000" dirty="0">
-                        <a:latin typeface="Calibri" charset="0"/>
-                        <a:ea typeface="Calibri" charset="0"/>
-                        <a:cs typeface="Calibri" charset="0"/>
-                      </a:endParaRPr>
-                    </a:p>
-                  </a:txBody>
-                  <a:tcPr marL="54864" marR="54864" marT="18288" marB="18288" anchor="ctr">
-                    <a:lnL w="0" cap="flat" cmpd="sng" algn="ctr">
-                      <a:noFill/>
-                    </a:lnL>
-                    <a:lnR w="0" cap="flat" cmpd="sng" algn="ctr">
-                      <a:noFill/>
-                    </a:lnR>
-                    <a:lnT w="0" cap="flat" cmpd="sng" algn="ctr">
-                      <a:noFill/>
-                    </a:lnT>
-                    <a:lnB w="12700" cap="flat" cmpd="sng" algn="ctr">
-                      <a:solidFill>
-                        <a:srgbClr val="1F2328"/>
-                      </a:solidFill>
-                      <a:prstDash val="solid"/>
-                      <a:round/>
-                      <a:headEnd type="none" w="med" len="med"/>
-                      <a:tailEnd type="none" w="med" len="med"/>
-                    </a:lnB>
-                  </a:tcPr>
-                </a:tc>
-                <a:tc>
-                  <a:txBody>
-                    <a:bodyPr/>
-                    <a:lstStyle/>
-                    <a:p>
-                      <a:pPr algn="l" indent="0" marL="0">
-                        <a:buNone/>
-                      </a:pPr>
-                      <a:r>
-                        <a:rPr lang="en-US" sz="1000" b="1" dirty="0">
-                          <a:solidFill>
-                            <a:srgbClr val="6B7280"/>
-                          </a:solidFill>
-                          <a:latin typeface="Calibri" pitchFamily="34" charset="0"/>
-                          <a:ea typeface="Calibri" pitchFamily="34" charset="-122"/>
-                          <a:cs typeface="Calibri" pitchFamily="34" charset="-120"/>
-                        </a:rPr>
-                        <a:t>Symptom</a:t>
-                      </a:r>
-                      <a:endParaRPr lang="en-US" sz="1000" dirty="0">
-                        <a:latin typeface="Calibri" charset="0"/>
-                        <a:ea typeface="Calibri" charset="0"/>
-                        <a:cs typeface="Calibri" charset="0"/>
-                      </a:endParaRPr>
-                    </a:p>
-                  </a:txBody>
-                  <a:tcPr marL="54864" marR="54864" marT="18288" marB="18288" anchor="ctr">
-                    <a:lnL w="0" cap="flat" cmpd="sng" algn="ctr">
-                      <a:noFill/>
-                    </a:lnL>
-                    <a:lnR w="0" cap="flat" cmpd="sng" algn="ctr">
-                      <a:noFill/>
-                    </a:lnR>
-                    <a:lnT w="0" cap="flat" cmpd="sng" algn="ctr">
-                      <a:noFill/>
-                    </a:lnT>
-                    <a:lnB w="12700" cap="flat" cmpd="sng" algn="ctr">
-                      <a:solidFill>
-                        <a:srgbClr val="1F2328"/>
-                      </a:solidFill>
-                      <a:prstDash val="solid"/>
-                      <a:round/>
-                      <a:headEnd type="none" w="med" len="med"/>
-                      <a:tailEnd type="none" w="med" len="med"/>
-                    </a:lnB>
-                  </a:tcPr>
-                </a:tc>
-                <a:tc>
-                  <a:txBody>
-                    <a:bodyPr/>
-                    <a:lstStyle/>
-                    <a:p>
-                      <a:pPr algn="l" indent="0" marL="0">
-                        <a:buNone/>
-                      </a:pPr>
-                      <a:r>
-                        <a:rPr lang="en-US" sz="1000" b="1" dirty="0">
-                          <a:solidFill>
-                            <a:srgbClr val="6B7280"/>
-                          </a:solidFill>
-                          <a:latin typeface="Calibri" pitchFamily="34" charset="0"/>
-                          <a:ea typeface="Calibri" pitchFamily="34" charset="-122"/>
-                          <a:cs typeface="Calibri" pitchFamily="34" charset="-120"/>
-                        </a:rPr>
-                        <a:t>Evidence / mitigation</a:t>
-                      </a:r>
-                      <a:endParaRPr lang="en-US" sz="1000" dirty="0">
-                        <a:latin typeface="Calibri" charset="0"/>
-                        <a:ea typeface="Calibri" charset="0"/>
-                        <a:cs typeface="Calibri" charset="0"/>
-                      </a:endParaRPr>
-                    </a:p>
-                  </a:txBody>
-                  <a:tcPr marL="54864" marR="54864" marT="18288" marB="18288" anchor="ctr">
-                    <a:lnL w="0" cap="flat" cmpd="sng" algn="ctr">
-                      <a:noFill/>
-                    </a:lnL>
-                    <a:lnR w="0" cap="flat" cmpd="sng" algn="ctr">
-                      <a:noFill/>
-                    </a:lnR>
-                    <a:lnT w="0" cap="flat" cmpd="sng" algn="ctr">
-                      <a:noFill/>
-                    </a:lnT>
-                    <a:lnB w="12700" cap="flat" cmpd="sng" algn="ctr">
-                      <a:solidFill>
-                        <a:srgbClr val="1F2328"/>
-                      </a:solidFill>
-                      <a:prstDash val="solid"/>
-                      <a:round/>
-                      <a:headEnd type="none" w="med" len="med"/>
-                      <a:tailEnd type="none" w="med" len="med"/>
-                    </a:lnB>
-                  </a:tcPr>
-                </a:tc>
-              </a:tr>
-              <a:tr h="384048">
-                <a:tc>
-                  <a:txBody>
-                    <a:bodyPr/>
-                    <a:lstStyle/>
-                    <a:p>
-                      <a:pPr algn="l" indent="0" marL="0">
-                        <a:buNone/>
-                      </a:pPr>
-                      <a:r>
-                        <a:rPr lang="en-US" sz="1100" dirty="0">
-                          <a:solidFill>
-                            <a:srgbClr val="1F2328"/>
-                          </a:solidFill>
-                          <a:latin typeface="Calibri" pitchFamily="34" charset="0"/>
-                          <a:ea typeface="Calibri" pitchFamily="34" charset="-122"/>
-                          <a:cs typeface="Calibri" pitchFamily="34" charset="-120"/>
-                        </a:rPr>
-                        <a:t>Adjoint error</a:t>
-                      </a:r>
-                      <a:endParaRPr lang="en-US" sz="1100" dirty="0">
-                        <a:latin typeface="Calibri" charset="0"/>
-                        <a:ea typeface="Calibri" charset="0"/>
-                        <a:cs typeface="Calibri" charset="0"/>
-                      </a:endParaRPr>
-                    </a:p>
-                  </a:txBody>
-                  <a:tcPr marL="54864" marR="54864" marT="18288" marB="18288" anchor="ctr">
-                    <a:lnL w="0" cap="flat" cmpd="sng" algn="ctr">
-                      <a:noFill/>
-                    </a:lnL>
-                    <a:lnR w="0" cap="flat" cmpd="sng" algn="ctr">
-                      <a:noFill/>
-                    </a:lnR>
-                    <a:lnT w="0" cap="flat" cmpd="sng" algn="ctr">
-                      <a:noFill/>
-                    </a:lnT>
-                    <a:lnB w="6350" cap="flat" cmpd="sng" algn="ctr">
-                      <a:solidFill>
-                        <a:srgbClr val="E5E7EB"/>
-                      </a:solidFill>
-                      <a:prstDash val="solid"/>
-                      <a:round/>
-                      <a:headEnd type="none" w="med" len="med"/>
-                      <a:tailEnd type="none" w="med" len="med"/>
-                    </a:lnB>
-                  </a:tcPr>
-                </a:tc>
-                <a:tc>
-                  <a:txBody>
-                    <a:bodyPr/>
-                    <a:lstStyle/>
-                    <a:p>
-                      <a:pPr algn="l" indent="0" marL="0">
-                        <a:buNone/>
-                      </a:pPr>
-                      <a:r>
-                        <a:rPr lang="en-US" sz="1100" dirty="0">
-                          <a:solidFill>
-                            <a:srgbClr val="1F2328"/>
-                          </a:solidFill>
-                          <a:latin typeface="Calibri" pitchFamily="34" charset="0"/>
-                          <a:ea typeface="Calibri" pitchFamily="34" charset="-122"/>
-                          <a:cs typeface="Calibri" pitchFamily="34" charset="-120"/>
-                        </a:rPr>
-                        <a:t>backward re-solve ≠ forward path</a:t>
-                      </a:r>
-                      <a:endParaRPr lang="en-US" sz="1100" dirty="0">
-                        <a:latin typeface="Calibri" charset="0"/>
-                        <a:ea typeface="Calibri" charset="0"/>
-                        <a:cs typeface="Calibri" charset="0"/>
-                      </a:endParaRPr>
-                    </a:p>
-                  </a:txBody>
-                  <a:tcPr marL="54864" marR="54864" marT="18288" marB="18288" anchor="ctr">
-                    <a:lnL w="0" cap="flat" cmpd="sng" algn="ctr">
-                      <a:noFill/>
-                    </a:lnL>
-                    <a:lnR w="0" cap="flat" cmpd="sng" algn="ctr">
-                      <a:noFill/>
-                    </a:lnR>
-                    <a:lnT w="0" cap="flat" cmpd="sng" algn="ctr">
-                      <a:noFill/>
-                    </a:lnT>
-                    <a:lnB w="6350" cap="flat" cmpd="sng" algn="ctr">
-                      <a:solidFill>
-                        <a:srgbClr val="E5E7EB"/>
-                      </a:solidFill>
-                      <a:prstDash val="solid"/>
-                      <a:round/>
-                      <a:headEnd type="none" w="med" len="med"/>
-                      <a:tailEnd type="none" w="med" len="med"/>
-                    </a:lnB>
-                  </a:tcPr>
-                </a:tc>
-                <a:tc>
-                  <a:txBody>
-                    <a:bodyPr/>
-                    <a:lstStyle/>
-                    <a:p>
-                      <a:pPr algn="l" indent="0" marL="0">
-                        <a:buNone/>
-                      </a:pPr>
-                      <a:r>
-                        <a:rPr lang="en-US" sz="1100" dirty="0">
-                          <a:solidFill>
-                            <a:srgbClr val="1F2328"/>
-                          </a:solidFill>
-                          <a:latin typeface="Calibri" pitchFamily="34" charset="0"/>
-                          <a:ea typeface="Calibri" pitchFamily="34" charset="-122"/>
-                          <a:cs typeface="Calibri" pitchFamily="34" charset="-120"/>
-                        </a:rPr>
-                        <a:t>ANODE (2019); 1e-4–1e-6 here</a:t>
-                      </a:r>
-                      <a:endParaRPr lang="en-US" sz="1100" dirty="0">
-                        <a:latin typeface="Calibri" charset="0"/>
-                        <a:ea typeface="Calibri" charset="0"/>
-                        <a:cs typeface="Calibri" charset="0"/>
-                      </a:endParaRPr>
-                    </a:p>
-                  </a:txBody>
-                  <a:tcPr marL="54864" marR="54864" marT="18288" marB="18288" anchor="ctr">
-                    <a:lnL w="0" cap="flat" cmpd="sng" algn="ctr">
-                      <a:noFill/>
-                    </a:lnL>
-                    <a:lnR w="0" cap="flat" cmpd="sng" algn="ctr">
-                      <a:noFill/>
-                    </a:lnR>
-                    <a:lnT w="0" cap="flat" cmpd="sng" algn="ctr">
-                      <a:noFill/>
-                    </a:lnT>
-                    <a:lnB w="6350" cap="flat" cmpd="sng" algn="ctr">
-                      <a:solidFill>
-                        <a:srgbClr val="E5E7EB"/>
-                      </a:solidFill>
-                      <a:prstDash val="solid"/>
-                      <a:round/>
-                      <a:headEnd type="none" w="med" len="med"/>
-                      <a:tailEnd type="none" w="med" len="med"/>
-                    </a:lnB>
-                  </a:tcPr>
-                </a:tc>
-              </a:tr>
-              <a:tr h="384048">
-                <a:tc>
-                  <a:txBody>
-                    <a:bodyPr/>
-                    <a:lstStyle/>
-                    <a:p>
-                      <a:pPr algn="l" indent="0" marL="0">
-                        <a:buNone/>
-                      </a:pPr>
-                      <a:r>
-                        <a:rPr lang="en-US" sz="1100" dirty="0">
-                          <a:solidFill>
-                            <a:srgbClr val="1F2328"/>
-                          </a:solidFill>
-                          <a:latin typeface="Calibri" pitchFamily="34" charset="0"/>
-                          <a:ea typeface="Calibri" pitchFamily="34" charset="-122"/>
-                          <a:cs typeface="Calibri" pitchFamily="34" charset="-120"/>
-                        </a:rPr>
-                        <a:t>Stiffness</a:t>
-                      </a:r>
-                      <a:endParaRPr lang="en-US" sz="1100" dirty="0">
-                        <a:latin typeface="Calibri" charset="0"/>
-                        <a:ea typeface="Calibri" charset="0"/>
-                        <a:cs typeface="Calibri" charset="0"/>
-                      </a:endParaRPr>
-                    </a:p>
-                  </a:txBody>
-                  <a:tcPr marL="54864" marR="54864" marT="18288" marB="18288" anchor="ctr">
-                    <a:lnL w="0" cap="flat" cmpd="sng" algn="ctr">
-                      <a:noFill/>
-                    </a:lnL>
-                    <a:lnR w="0" cap="flat" cmpd="sng" algn="ctr">
-                      <a:noFill/>
-                    </a:lnR>
-                    <a:lnT w="0" cap="flat" cmpd="sng" algn="ctr">
-                      <a:noFill/>
-                    </a:lnT>
-                    <a:lnB w="6350" cap="flat" cmpd="sng" algn="ctr">
-                      <a:solidFill>
-                        <a:srgbClr val="E5E7EB"/>
-                      </a:solidFill>
-                      <a:prstDash val="solid"/>
-                      <a:round/>
-                      <a:headEnd type="none" w="med" len="med"/>
-                      <a:tailEnd type="none" w="med" len="med"/>
-                    </a:lnB>
-                  </a:tcPr>
-                </a:tc>
-                <a:tc>
-                  <a:txBody>
-                    <a:bodyPr/>
-                    <a:lstStyle/>
-                    <a:p>
-                      <a:pPr algn="l" indent="0" marL="0">
-                        <a:buNone/>
-                      </a:pPr>
-                      <a:r>
-                        <a:rPr lang="en-US" sz="1100" dirty="0">
-                          <a:solidFill>
-                            <a:srgbClr val="1F2328"/>
-                          </a:solidFill>
-                          <a:latin typeface="Calibri" pitchFamily="34" charset="0"/>
-                          <a:ea typeface="Calibri" pitchFamily="34" charset="-122"/>
-                          <a:cs typeface="Calibri" pitchFamily="34" charset="-120"/>
-                        </a:rPr>
-                        <a:t>NFE grows during training</a:t>
-                      </a:r>
-                      <a:endParaRPr lang="en-US" sz="1100" dirty="0">
-                        <a:latin typeface="Calibri" charset="0"/>
-                        <a:ea typeface="Calibri" charset="0"/>
-                        <a:cs typeface="Calibri" charset="0"/>
-                      </a:endParaRPr>
-                    </a:p>
-                  </a:txBody>
-                  <a:tcPr marL="54864" marR="54864" marT="18288" marB="18288" anchor="ctr">
-                    <a:lnL w="0" cap="flat" cmpd="sng" algn="ctr">
-                      <a:noFill/>
-                    </a:lnL>
-                    <a:lnR w="0" cap="flat" cmpd="sng" algn="ctr">
-                      <a:noFill/>
-                    </a:lnR>
-                    <a:lnT w="0" cap="flat" cmpd="sng" algn="ctr">
-                      <a:noFill/>
-                    </a:lnT>
-                    <a:lnB w="6350" cap="flat" cmpd="sng" algn="ctr">
-                      <a:solidFill>
-                        <a:srgbClr val="E5E7EB"/>
-                      </a:solidFill>
-                      <a:prstDash val="solid"/>
-                      <a:round/>
-                      <a:headEnd type="none" w="med" len="med"/>
-                      <a:tailEnd type="none" w="med" len="med"/>
-                    </a:lnB>
-                  </a:tcPr>
-                </a:tc>
-                <a:tc>
-                  <a:txBody>
-                    <a:bodyPr/>
-                    <a:lstStyle/>
-                    <a:p>
-                      <a:pPr algn="l" indent="0" marL="0">
-                        <a:buNone/>
-                      </a:pPr>
-                      <a:r>
-                        <a:rPr lang="en-US" sz="1100" dirty="0">
-                          <a:solidFill>
-                            <a:srgbClr val="1F2328"/>
-                          </a:solidFill>
-                          <a:latin typeface="Calibri" pitchFamily="34" charset="0"/>
-                          <a:ea typeface="Calibri" pitchFamily="34" charset="-122"/>
-                          <a:cs typeface="Calibri" pitchFamily="34" charset="-120"/>
-                        </a:rPr>
-                        <a:t>kinetic / Jacobian regularization (Finlay 2020)</a:t>
-                      </a:r>
-                      <a:endParaRPr lang="en-US" sz="1100" dirty="0">
-                        <a:latin typeface="Calibri" charset="0"/>
-                        <a:ea typeface="Calibri" charset="0"/>
-                        <a:cs typeface="Calibri" charset="0"/>
-                      </a:endParaRPr>
-                    </a:p>
-                  </a:txBody>
-                  <a:tcPr marL="54864" marR="54864" marT="18288" marB="18288" anchor="ctr">
-                    <a:lnL w="0" cap="flat" cmpd="sng" algn="ctr">
-                      <a:noFill/>
-                    </a:lnL>
-                    <a:lnR w="0" cap="flat" cmpd="sng" algn="ctr">
-                      <a:noFill/>
-                    </a:lnR>
-                    <a:lnT w="0" cap="flat" cmpd="sng" algn="ctr">
-                      <a:noFill/>
-                    </a:lnT>
-                    <a:lnB w="6350" cap="flat" cmpd="sng" algn="ctr">
-                      <a:solidFill>
-                        <a:srgbClr val="E5E7EB"/>
-                      </a:solidFill>
-                      <a:prstDash val="solid"/>
-                      <a:round/>
-                      <a:headEnd type="none" w="med" len="med"/>
-                      <a:tailEnd type="none" w="med" len="med"/>
-                    </a:lnB>
-                  </a:tcPr>
-                </a:tc>
-              </a:tr>
-              <a:tr h="384048">
-                <a:tc>
-                  <a:txBody>
-                    <a:bodyPr/>
-                    <a:lstStyle/>
-                    <a:p>
-                      <a:pPr algn="l" indent="0" marL="0">
-                        <a:buNone/>
-                      </a:pPr>
-                      <a:r>
-                        <a:rPr lang="en-US" sz="1100" dirty="0">
-                          <a:solidFill>
-                            <a:srgbClr val="1F2328"/>
-                          </a:solidFill>
-                          <a:latin typeface="Calibri" pitchFamily="34" charset="0"/>
-                          <a:ea typeface="Calibri" pitchFamily="34" charset="-122"/>
-                          <a:cs typeface="Calibri" pitchFamily="34" charset="-120"/>
-                        </a:rPr>
-                        <a:t>Discontinuous targets</a:t>
-                      </a:r>
-                      <a:endParaRPr lang="en-US" sz="1100" dirty="0">
-                        <a:latin typeface="Calibri" charset="0"/>
-                        <a:ea typeface="Calibri" charset="0"/>
-                        <a:cs typeface="Calibri" charset="0"/>
-                      </a:endParaRPr>
-                    </a:p>
-                  </a:txBody>
-                  <a:tcPr marL="54864" marR="54864" marT="18288" marB="18288" anchor="ctr">
-                    <a:lnL w="0" cap="flat" cmpd="sng" algn="ctr">
-                      <a:noFill/>
-                    </a:lnL>
-                    <a:lnR w="0" cap="flat" cmpd="sng" algn="ctr">
-                      <a:noFill/>
-                    </a:lnR>
-                    <a:lnT w="0" cap="flat" cmpd="sng" algn="ctr">
-                      <a:noFill/>
-                    </a:lnT>
-                    <a:lnB w="6350" cap="flat" cmpd="sng" algn="ctr">
-                      <a:solidFill>
-                        <a:srgbClr val="E5E7EB"/>
-                      </a:solidFill>
-                      <a:prstDash val="solid"/>
-                      <a:round/>
-                      <a:headEnd type="none" w="med" len="med"/>
-                      <a:tailEnd type="none" w="med" len="med"/>
-                    </a:lnB>
-                  </a:tcPr>
-                </a:tc>
-                <a:tc>
-                  <a:txBody>
-                    <a:bodyPr/>
-                    <a:lstStyle/>
-                    <a:p>
-                      <a:pPr algn="l" indent="0" marL="0">
-                        <a:buNone/>
-                      </a:pPr>
-                      <a:r>
-                        <a:rPr lang="en-US" sz="1100" dirty="0">
-                          <a:solidFill>
-                            <a:srgbClr val="1F2328"/>
-                          </a:solidFill>
-                          <a:latin typeface="Calibri" pitchFamily="34" charset="0"/>
-                          <a:ea typeface="Calibri" pitchFamily="34" charset="-122"/>
-                          <a:cs typeface="Calibri" pitchFamily="34" charset="-120"/>
-                        </a:rPr>
-                        <a:t>∇ 1{τ ≤ t*} = 0 pathwise</a:t>
-                      </a:r>
-                      <a:endParaRPr lang="en-US" sz="1100" dirty="0">
-                        <a:latin typeface="Calibri" charset="0"/>
-                        <a:ea typeface="Calibri" charset="0"/>
-                        <a:cs typeface="Calibri" charset="0"/>
-                      </a:endParaRPr>
-                    </a:p>
-                  </a:txBody>
-                  <a:tcPr marL="54864" marR="54864" marT="18288" marB="18288" anchor="ctr">
-                    <a:lnL w="0" cap="flat" cmpd="sng" algn="ctr">
-                      <a:noFill/>
-                    </a:lnL>
-                    <a:lnR w="0" cap="flat" cmpd="sng" algn="ctr">
-                      <a:noFill/>
-                    </a:lnR>
-                    <a:lnT w="0" cap="flat" cmpd="sng" algn="ctr">
-                      <a:noFill/>
-                    </a:lnT>
-                    <a:lnB w="6350" cap="flat" cmpd="sng" algn="ctr">
-                      <a:solidFill>
-                        <a:srgbClr val="E5E7EB"/>
-                      </a:solidFill>
-                      <a:prstDash val="solid"/>
-                      <a:round/>
-                      <a:headEnd type="none" w="med" len="med"/>
-                      <a:tailEnd type="none" w="med" len="med"/>
-                    </a:lnB>
-                  </a:tcPr>
-                </a:tc>
-                <a:tc>
-                  <a:txBody>
-                    <a:bodyPr/>
-                    <a:lstStyle/>
-                    <a:p>
-                      <a:pPr algn="l" indent="0" marL="0">
-                        <a:buNone/>
-                      </a:pPr>
-                      <a:r>
-                        <a:rPr lang="en-US" sz="1100" dirty="0">
-                          <a:solidFill>
-                            <a:srgbClr val="1F2328"/>
-                          </a:solidFill>
-                          <a:latin typeface="Calibri" pitchFamily="34" charset="0"/>
-                          <a:ea typeface="Calibri" pitchFamily="34" charset="-122"/>
-                          <a:cs typeface="Calibri" pitchFamily="34" charset="-120"/>
-                        </a:rPr>
-                        <a:t>bridge crossing, surrogate, score function</a:t>
-                      </a:r>
-                      <a:endParaRPr lang="en-US" sz="1100" dirty="0">
-                        <a:latin typeface="Calibri" charset="0"/>
-                        <a:ea typeface="Calibri" charset="0"/>
-                        <a:cs typeface="Calibri" charset="0"/>
-                      </a:endParaRPr>
-                    </a:p>
-                  </a:txBody>
-                  <a:tcPr marL="54864" marR="54864" marT="18288" marB="18288" anchor="ctr">
-                    <a:lnL w="0" cap="flat" cmpd="sng" algn="ctr">
-                      <a:noFill/>
-                    </a:lnL>
-                    <a:lnR w="0" cap="flat" cmpd="sng" algn="ctr">
-                      <a:noFill/>
-                    </a:lnR>
-                    <a:lnT w="0" cap="flat" cmpd="sng" algn="ctr">
-                      <a:noFill/>
-                    </a:lnT>
-                    <a:lnB w="6350" cap="flat" cmpd="sng" algn="ctr">
-                      <a:solidFill>
-                        <a:srgbClr val="E5E7EB"/>
-                      </a:solidFill>
-                      <a:prstDash val="solid"/>
-                      <a:round/>
-                      <a:headEnd type="none" w="med" len="med"/>
-                      <a:tailEnd type="none" w="med" len="med"/>
-                    </a:lnB>
-                  </a:tcPr>
-                </a:tc>
-              </a:tr>
-              <a:tr h="384048">
-                <a:tc>
-                  <a:txBody>
-                    <a:bodyPr/>
-                    <a:lstStyle/>
-                    <a:p>
-                      <a:pPr algn="l" indent="0" marL="0">
-                        <a:buNone/>
-                      </a:pPr>
-                      <a:r>
-                        <a:rPr lang="en-US" sz="1100" dirty="0">
-                          <a:solidFill>
-                            <a:srgbClr val="1F2328"/>
-                          </a:solidFill>
-                          <a:latin typeface="Calibri" pitchFamily="34" charset="0"/>
-                          <a:ea typeface="Calibri" pitchFamily="34" charset="-122"/>
-                          <a:cs typeface="Calibri" pitchFamily="34" charset="-120"/>
-                        </a:rPr>
-                        <a:t>Identifiability</a:t>
-                      </a:r>
-                      <a:endParaRPr lang="en-US" sz="1100" dirty="0">
-                        <a:latin typeface="Calibri" charset="0"/>
-                        <a:ea typeface="Calibri" charset="0"/>
-                        <a:cs typeface="Calibri" charset="0"/>
-                      </a:endParaRPr>
-                    </a:p>
-                  </a:txBody>
-                  <a:tcPr marL="54864" marR="54864" marT="18288" marB="18288" anchor="ctr">
-                    <a:lnL w="0" cap="flat" cmpd="sng" algn="ctr">
-                      <a:noFill/>
-                    </a:lnL>
-                    <a:lnR w="0" cap="flat" cmpd="sng" algn="ctr">
-                      <a:noFill/>
-                    </a:lnR>
-                    <a:lnT w="0" cap="flat" cmpd="sng" algn="ctr">
-                      <a:noFill/>
-                    </a:lnT>
-                    <a:lnB w="6350" cap="flat" cmpd="sng" algn="ctr">
-                      <a:solidFill>
-                        <a:srgbClr val="E5E7EB"/>
-                      </a:solidFill>
-                      <a:prstDash val="solid"/>
-                      <a:round/>
-                      <a:headEnd type="none" w="med" len="med"/>
-                      <a:tailEnd type="none" w="med" len="med"/>
-                    </a:lnB>
-                  </a:tcPr>
-                </a:tc>
-                <a:tc>
-                  <a:txBody>
-                    <a:bodyPr/>
-                    <a:lstStyle/>
-                    <a:p>
-                      <a:pPr algn="l" indent="0" marL="0">
-                        <a:buNone/>
-                      </a:pPr>
-                      <a:r>
-                        <a:rPr lang="en-US" sz="1100" dirty="0">
-                          <a:solidFill>
-                            <a:srgbClr val="1F2328"/>
-                          </a:solidFill>
-                          <a:latin typeface="Calibri" pitchFamily="34" charset="0"/>
-                          <a:ea typeface="Calibri" pitchFamily="34" charset="-122"/>
-                          <a:cs typeface="Calibri" pitchFamily="34" charset="-120"/>
-                        </a:rPr>
-                        <a:t>drift ↔ diffusion trade-off; latent reparam.</a:t>
-                      </a:r>
-                      <a:endParaRPr lang="en-US" sz="1100" dirty="0">
-                        <a:latin typeface="Calibri" charset="0"/>
-                        <a:ea typeface="Calibri" charset="0"/>
-                        <a:cs typeface="Calibri" charset="0"/>
-                      </a:endParaRPr>
-                    </a:p>
-                  </a:txBody>
-                  <a:tcPr marL="54864" marR="54864" marT="18288" marB="18288" anchor="ctr">
-                    <a:lnL w="0" cap="flat" cmpd="sng" algn="ctr">
-                      <a:noFill/>
-                    </a:lnL>
-                    <a:lnR w="0" cap="flat" cmpd="sng" algn="ctr">
-                      <a:noFill/>
-                    </a:lnR>
-                    <a:lnT w="0" cap="flat" cmpd="sng" algn="ctr">
-                      <a:noFill/>
-                    </a:lnT>
-                    <a:lnB w="6350" cap="flat" cmpd="sng" algn="ctr">
-                      <a:solidFill>
-                        <a:srgbClr val="E5E7EB"/>
-                      </a:solidFill>
-                      <a:prstDash val="solid"/>
-                      <a:round/>
-                      <a:headEnd type="none" w="med" len="med"/>
-                      <a:tailEnd type="none" w="med" len="med"/>
-                    </a:lnB>
-                  </a:tcPr>
-                </a:tc>
-                <a:tc>
-                  <a:txBody>
-                    <a:bodyPr/>
-                    <a:lstStyle/>
-                    <a:p>
-                      <a:pPr algn="l" indent="0" marL="0">
-                        <a:buNone/>
-                      </a:pPr>
-                      <a:r>
-                        <a:rPr lang="en-US" sz="1100" dirty="0">
-                          <a:solidFill>
-                            <a:srgbClr val="1F2328"/>
-                          </a:solidFill>
-                          <a:latin typeface="Calibri" pitchFamily="34" charset="0"/>
-                          <a:ea typeface="Calibri" pitchFamily="34" charset="-122"/>
-                          <a:cs typeface="Calibri" pitchFamily="34" charset="-120"/>
-                        </a:rPr>
-                        <a:t>ordinal head anchors q; synthetic recovery test</a:t>
-                      </a:r>
-                      <a:endParaRPr lang="en-US" sz="1100" dirty="0">
-                        <a:latin typeface="Calibri" charset="0"/>
-                        <a:ea typeface="Calibri" charset="0"/>
-                        <a:cs typeface="Calibri" charset="0"/>
-                      </a:endParaRPr>
-                    </a:p>
-                  </a:txBody>
-                  <a:tcPr marL="54864" marR="54864" marT="18288" marB="18288" anchor="ctr">
-                    <a:lnL w="0" cap="flat" cmpd="sng" algn="ctr">
-                      <a:noFill/>
-                    </a:lnL>
-                    <a:lnR w="0" cap="flat" cmpd="sng" algn="ctr">
-                      <a:noFill/>
-                    </a:lnR>
-                    <a:lnT w="0" cap="flat" cmpd="sng" algn="ctr">
-                      <a:noFill/>
-                    </a:lnT>
-                    <a:lnB w="6350" cap="flat" cmpd="sng" algn="ctr">
-                      <a:solidFill>
-                        <a:srgbClr val="E5E7EB"/>
-                      </a:solidFill>
-                      <a:prstDash val="solid"/>
-                      <a:round/>
-                      <a:headEnd type="none" w="med" len="med"/>
-                      <a:tailEnd type="none" w="med" len="med"/>
-                    </a:lnB>
-                  </a:tcPr>
-                </a:tc>
-              </a:tr>
-              <a:tr h="384048">
-                <a:tc>
-                  <a:txBody>
-                    <a:bodyPr/>
-                    <a:lstStyle/>
-                    <a:p>
-                      <a:pPr algn="l" indent="0" marL="0">
-                        <a:buNone/>
-                      </a:pPr>
-                      <a:r>
-                        <a:rPr lang="en-US" sz="1100" dirty="0">
-                          <a:solidFill>
-                            <a:srgbClr val="1F2328"/>
-                          </a:solidFill>
-                          <a:latin typeface="Calibri" pitchFamily="34" charset="0"/>
-                          <a:ea typeface="Calibri" pitchFamily="34" charset="-122"/>
-                          <a:cs typeface="Calibri" pitchFamily="34" charset="-120"/>
-                        </a:rPr>
-                        <a:t>Visual confounds</a:t>
-                      </a:r>
-                      <a:endParaRPr lang="en-US" sz="1100" dirty="0">
-                        <a:latin typeface="Calibri" charset="0"/>
-                        <a:ea typeface="Calibri" charset="0"/>
-                        <a:cs typeface="Calibri" charset="0"/>
-                      </a:endParaRPr>
-                    </a:p>
-                  </a:txBody>
-                  <a:tcPr marL="54864" marR="54864" marT="18288" marB="18288" anchor="ctr">
-                    <a:lnL w="0" cap="flat" cmpd="sng" algn="ctr">
-                      <a:noFill/>
-                    </a:lnL>
-                    <a:lnR w="0" cap="flat" cmpd="sng" algn="ctr">
-                      <a:noFill/>
-                    </a:lnR>
-                    <a:lnT w="0" cap="flat" cmpd="sng" algn="ctr">
-                      <a:noFill/>
-                    </a:lnT>
-                    <a:lnB w="6350" cap="flat" cmpd="sng" algn="ctr">
-                      <a:solidFill>
-                        <a:srgbClr val="E5E7EB"/>
-                      </a:solidFill>
-                      <a:prstDash val="solid"/>
-                      <a:round/>
-                      <a:headEnd type="none" w="med" len="med"/>
-                      <a:tailEnd type="none" w="med" len="med"/>
-                    </a:lnB>
-                  </a:tcPr>
-                </a:tc>
-                <a:tc>
-                  <a:txBody>
-                    <a:bodyPr/>
-                    <a:lstStyle/>
-                    <a:p>
-                      <a:pPr algn="l" indent="0" marL="0">
-                        <a:buNone/>
-                      </a:pPr>
-                      <a:r>
-                        <a:rPr lang="en-US" sz="1100" dirty="0">
-                          <a:solidFill>
-                            <a:srgbClr val="1F2328"/>
-                          </a:solidFill>
-                          <a:latin typeface="Calibri" pitchFamily="34" charset="0"/>
-                          <a:ea typeface="Calibri" pitchFamily="34" charset="-122"/>
-                          <a:cs typeface="Calibri" pitchFamily="34" charset="-120"/>
-                        </a:rPr>
-                        <a:t>lighting, marks, wind rub look like ripening</a:t>
-                      </a:r>
-                      <a:endParaRPr lang="en-US" sz="1100" dirty="0">
-                        <a:latin typeface="Calibri" charset="0"/>
-                        <a:ea typeface="Calibri" charset="0"/>
-                        <a:cs typeface="Calibri" charset="0"/>
-                      </a:endParaRPr>
-                    </a:p>
-                  </a:txBody>
-                  <a:tcPr marL="54864" marR="54864" marT="18288" marB="18288" anchor="ctr">
-                    <a:lnL w="0" cap="flat" cmpd="sng" algn="ctr">
-                      <a:noFill/>
-                    </a:lnL>
-                    <a:lnR w="0" cap="flat" cmpd="sng" algn="ctr">
-                      <a:noFill/>
-                    </a:lnR>
-                    <a:lnT w="0" cap="flat" cmpd="sng" algn="ctr">
-                      <a:noFill/>
-                    </a:lnT>
-                    <a:lnB w="6350" cap="flat" cmpd="sng" algn="ctr">
-                      <a:solidFill>
-                        <a:srgbClr val="E5E7EB"/>
-                      </a:solidFill>
-                      <a:prstDash val="solid"/>
-                      <a:round/>
-                      <a:headEnd type="none" w="med" len="med"/>
-                      <a:tailEnd type="none" w="med" len="med"/>
-                    </a:lnB>
-                  </a:tcPr>
-                </a:tc>
-                <a:tc>
-                  <a:txBody>
-                    <a:bodyPr/>
-                    <a:lstStyle/>
-                    <a:p>
-                      <a:pPr algn="l" indent="0" marL="0">
-                        <a:buNone/>
-                      </a:pPr>
-                      <a:r>
-                        <a:rPr lang="en-US" sz="1100" dirty="0">
-                          <a:solidFill>
-                            <a:srgbClr val="1F2328"/>
-                          </a:solidFill>
-                          <a:latin typeface="Calibri" pitchFamily="34" charset="0"/>
-                          <a:ea typeface="Calibri" pitchFamily="34" charset="-122"/>
-                          <a:cs typeface="Calibri" pitchFamily="34" charset="-120"/>
-                        </a:rPr>
-                        <a:t>paper: per-sample &gt; per-picture accuracy</a:t>
-                      </a:r>
-                      <a:endParaRPr lang="en-US" sz="1100" dirty="0">
-                        <a:latin typeface="Calibri" charset="0"/>
-                        <a:ea typeface="Calibri" charset="0"/>
-                        <a:cs typeface="Calibri" charset="0"/>
-                      </a:endParaRPr>
-                    </a:p>
-                  </a:txBody>
-                  <a:tcPr marL="54864" marR="54864" marT="18288" marB="18288" anchor="ctr">
-                    <a:lnL w="0" cap="flat" cmpd="sng" algn="ctr">
-                      <a:noFill/>
-                    </a:lnL>
-                    <a:lnR w="0" cap="flat" cmpd="sng" algn="ctr">
-                      <a:noFill/>
-                    </a:lnR>
-                    <a:lnT w="0" cap="flat" cmpd="sng" algn="ctr">
-                      <a:noFill/>
-                    </a:lnT>
-                    <a:lnB w="6350" cap="flat" cmpd="sng" algn="ctr">
-                      <a:solidFill>
-                        <a:srgbClr val="E5E7EB"/>
-                      </a:solidFill>
-                      <a:prstDash val="solid"/>
-                      <a:round/>
-                      <a:headEnd type="none" w="med" len="med"/>
-                      <a:tailEnd type="none" w="med" len="med"/>
-                    </a:lnB>
-                  </a:tcPr>
-                </a:tc>
-              </a:tr>
-              <a:tr h="384048">
-                <a:tc>
-                  <a:txBody>
-                    <a:bodyPr/>
-                    <a:lstStyle/>
-                    <a:p>
-                      <a:pPr algn="l" indent="0" marL="0">
-                        <a:buNone/>
-                      </a:pPr>
-                      <a:r>
-                        <a:rPr lang="en-US" sz="1100" dirty="0">
-                          <a:solidFill>
-                            <a:srgbClr val="1F2328"/>
-                          </a:solidFill>
-                          <a:latin typeface="Calibri" pitchFamily="34" charset="0"/>
-                          <a:ea typeface="Calibri" pitchFamily="34" charset="-122"/>
-                          <a:cs typeface="Calibri" pitchFamily="34" charset="-120"/>
-                        </a:rPr>
-                        <a:t>Uncontrolled covariates</a:t>
-                      </a:r>
-                      <a:endParaRPr lang="en-US" sz="1100" dirty="0">
-                        <a:latin typeface="Calibri" charset="0"/>
-                        <a:ea typeface="Calibri" charset="0"/>
-                        <a:cs typeface="Calibri" charset="0"/>
-                      </a:endParaRPr>
-                    </a:p>
-                  </a:txBody>
-                  <a:tcPr marL="54864" marR="54864" marT="18288" marB="18288" anchor="ctr">
-                    <a:lnL w="0" cap="flat" cmpd="sng" algn="ctr">
-                      <a:noFill/>
-                    </a:lnL>
-                    <a:lnR w="0" cap="flat" cmpd="sng" algn="ctr">
-                      <a:noFill/>
-                    </a:lnR>
-                    <a:lnT w="0" cap="flat" cmpd="sng" algn="ctr">
-                      <a:noFill/>
-                    </a:lnT>
-                    <a:lnB w="6350" cap="flat" cmpd="sng" algn="ctr">
-                      <a:solidFill>
-                        <a:srgbClr val="E5E7EB"/>
-                      </a:solidFill>
-                      <a:prstDash val="solid"/>
-                      <a:round/>
-                      <a:headEnd type="none" w="med" len="med"/>
-                      <a:tailEnd type="none" w="med" len="med"/>
-                    </a:lnB>
-                  </a:tcPr>
-                </a:tc>
-                <a:tc>
-                  <a:txBody>
-                    <a:bodyPr/>
-                    <a:lstStyle/>
-                    <a:p>
-                      <a:pPr algn="l" indent="0" marL="0">
-                        <a:buNone/>
-                      </a:pPr>
-                      <a:r>
-                        <a:rPr lang="en-US" sz="1100" dirty="0">
-                          <a:solidFill>
-                            <a:srgbClr val="1F2328"/>
-                          </a:solidFill>
-                          <a:latin typeface="Calibri" pitchFamily="34" charset="0"/>
-                          <a:ea typeface="Calibri" pitchFamily="34" charset="-122"/>
-                          <a:cs typeface="Calibri" pitchFamily="34" charset="-120"/>
-                        </a:rPr>
-                        <a:t>Tamb 20% faster than Arrhenius</a:t>
-                      </a:r>
-                      <a:endParaRPr lang="en-US" sz="1100" dirty="0">
-                        <a:latin typeface="Calibri" charset="0"/>
-                        <a:ea typeface="Calibri" charset="0"/>
-                        <a:cs typeface="Calibri" charset="0"/>
-                      </a:endParaRPr>
-                    </a:p>
-                  </a:txBody>
-                  <a:tcPr marL="54864" marR="54864" marT="18288" marB="18288" anchor="ctr">
-                    <a:lnL w="0" cap="flat" cmpd="sng" algn="ctr">
-                      <a:noFill/>
-                    </a:lnL>
-                    <a:lnR w="0" cap="flat" cmpd="sng" algn="ctr">
-                      <a:noFill/>
-                    </a:lnR>
-                    <a:lnT w="0" cap="flat" cmpd="sng" algn="ctr">
-                      <a:noFill/>
-                    </a:lnT>
-                    <a:lnB w="6350" cap="flat" cmpd="sng" algn="ctr">
-                      <a:solidFill>
-                        <a:srgbClr val="E5E7EB"/>
-                      </a:solidFill>
-                      <a:prstDash val="solid"/>
-                      <a:round/>
-                      <a:headEnd type="none" w="med" len="med"/>
-                      <a:tailEnd type="none" w="med" len="med"/>
-                    </a:lnB>
-                  </a:tcPr>
-                </a:tc>
-                <a:tc>
-                  <a:txBody>
-                    <a:bodyPr/>
-                    <a:lstStyle/>
-                    <a:p>
-                      <a:pPr algn="l" indent="0" marL="0">
-                        <a:buNone/>
-                      </a:pPr>
-                      <a:r>
-                        <a:rPr lang="en-US" sz="1100" dirty="0">
-                          <a:solidFill>
-                            <a:srgbClr val="1F2328"/>
-                          </a:solidFill>
-                          <a:latin typeface="Calibri" pitchFamily="34" charset="0"/>
-                          <a:ea typeface="Calibri" pitchFamily="34" charset="-122"/>
-                          <a:cs typeface="Calibri" pitchFamily="34" charset="-120"/>
-                        </a:rPr>
-                        <a:t>condition on humidity if logged</a:t>
-                      </a:r>
-                      <a:endParaRPr lang="en-US" sz="1100" dirty="0">
-                        <a:latin typeface="Calibri" charset="0"/>
-                        <a:ea typeface="Calibri" charset="0"/>
-                        <a:cs typeface="Calibri" charset="0"/>
-                      </a:endParaRPr>
-                    </a:p>
-                  </a:txBody>
-                  <a:tcPr marL="54864" marR="54864" marT="18288" marB="18288" anchor="ctr">
-                    <a:lnL w="0" cap="flat" cmpd="sng" algn="ctr">
-                      <a:noFill/>
-                    </a:lnL>
-                    <a:lnR w="0" cap="flat" cmpd="sng" algn="ctr">
-                      <a:noFill/>
-                    </a:lnR>
-                    <a:lnT w="0" cap="flat" cmpd="sng" algn="ctr">
-                      <a:noFill/>
-                    </a:lnT>
-                    <a:lnB w="6350" cap="flat" cmpd="sng" algn="ctr">
-                      <a:solidFill>
-                        <a:srgbClr val="E5E7EB"/>
-                      </a:solidFill>
-                      <a:prstDash val="solid"/>
-                      <a:round/>
-                      <a:headEnd type="none" w="med" len="med"/>
-                      <a:tailEnd type="none" w="med" len="med"/>
-                    </a:lnB>
-                  </a:tcPr>
-                </a:tc>
-              </a:tr>
-            </a:tbl>
-          </a:graphicData>
-        </a:graphic>
-      </p:graphicFrame>
+      <p:sp>
+        <p:nvSpPr>
+          <p:cNvPr id="5" name="Text 3"/>
+          <p:cNvSpPr txBox="1"/>
+          <p:nvPr/>
+        </p:nvSpPr>
+        <p:spPr>
+          <a:xfrm>
+            <a:off x="457200" y="2057400"/>
+            <a:ext cx="8229600" cy="365760"/>
+          </a:xfrm>
+          <a:prstGeom prst="rect">
+            <a:avLst/>
+          </a:prstGeom>
+          <a:noFill/>
+          <a:ln/>
+        </p:spPr>
+        <p:txBody>
+          <a:bodyPr wrap="square" lIns="0" tIns="0" rIns="0" bIns="0" rtlCol="0" anchor="t"/>
+          <a:lstStyle/>
+          <a:p>
+            <a:pPr indent="0" marL="0">
+              <a:buNone/>
+            </a:pPr>
+            <a:r>
+              <a:rPr lang="en-US" sz="1700" b="1" dirty="0">
+                <a:solidFill>
+                  <a:srgbClr val="1F2328"/>
+                </a:solidFill>
+              </a:rPr>
+              <a:t>Gradients:</a:t>
+            </a:r>
+            <a:pPr indent="0" marL="0">
+              <a:buNone/>
+            </a:pPr>
+            <a:r>
+              <a:rPr lang="en-US" sz="1700" dirty="0">
+                <a:solidFill>
+                  <a:srgbClr val="1F2328"/>
+                </a:solidFill>
+              </a:rPr>
+              <a:t> checkpointing is exact and cheap; the adjoint's O(1) memory costs accuracy.</a:t>
+            </a:r>
+            <a:endParaRPr lang="en-US" sz="1700" dirty="0"/>
+          </a:p>
+        </p:txBody>
+      </p:sp>
+      <p:sp>
+        <p:nvSpPr>
+          <p:cNvPr id="6" name="Text 4"/>
+          <p:cNvSpPr txBox="1"/>
+          <p:nvPr/>
+        </p:nvSpPr>
+        <p:spPr>
+          <a:xfrm>
+            <a:off x="457200" y="2743200"/>
+            <a:ext cx="8229600" cy="365760"/>
+          </a:xfrm>
+          <a:prstGeom prst="rect">
+            <a:avLst/>
+          </a:prstGeom>
+          <a:noFill/>
+          <a:ln/>
+        </p:spPr>
+        <p:txBody>
+          <a:bodyPr wrap="square" lIns="0" tIns="0" rIns="0" bIns="0" rtlCol="0" anchor="t"/>
+          <a:lstStyle/>
+          <a:p>
+            <a:pPr indent="0" marL="0">
+              <a:buNone/>
+            </a:pPr>
+            <a:r>
+              <a:rPr lang="en-US" sz="1700" b="1" dirty="0">
+                <a:solidFill>
+                  <a:srgbClr val="1F2328"/>
+                </a:solidFill>
+              </a:rPr>
+              <a:t>Targets:</a:t>
+            </a:r>
+            <a:pPr indent="0" marL="0">
+              <a:buNone/>
+            </a:pPr>
+            <a:r>
+              <a:rPr lang="en-US" sz="1700" dirty="0">
+                <a:solidFill>
+                  <a:srgbClr val="1F2328"/>
+                </a:solidFill>
+              </a:rPr>
+              <a:t> first-passage losses need bridge, surrogate, or score-function gradients.</a:t>
+            </a:r>
+            <a:endParaRPr lang="en-US" sz="1700" dirty="0"/>
+          </a:p>
+        </p:txBody>
+      </p:sp>
+      <p:sp>
+        <p:nvSpPr>
+          <p:cNvPr id="7" name="Text 5"/>
+          <p:cNvSpPr txBox="1"/>
+          <p:nvPr/>
+        </p:nvSpPr>
+        <p:spPr>
+          <a:xfrm>
+            <a:off x="457200" y="3429000"/>
+            <a:ext cx="8229600" cy="365760"/>
+          </a:xfrm>
+          <a:prstGeom prst="rect">
+            <a:avLst/>
+          </a:prstGeom>
+          <a:noFill/>
+          <a:ln/>
+        </p:spPr>
+        <p:txBody>
+          <a:bodyPr wrap="square" lIns="0" tIns="0" rIns="0" bIns="0" rtlCol="0" anchor="t"/>
+          <a:lstStyle/>
+          <a:p>
+            <a:pPr indent="0" marL="0">
+              <a:buNone/>
+            </a:pPr>
+            <a:r>
+              <a:rPr lang="en-US" sz="1700" b="1" dirty="0">
+                <a:solidFill>
+                  <a:srgbClr val="1F2328"/>
+                </a:solidFill>
+              </a:rPr>
+              <a:t>Training:</a:t>
+            </a:r>
+            <a:pPr indent="0" marL="0">
+              <a:buNone/>
+            </a:pPr>
+            <a:r>
+              <a:rPr lang="en-US" sz="1700" dirty="0">
+                <a:solidFill>
+                  <a:srgbClr val="1F2328"/>
+                </a:solidFill>
+              </a:rPr>
+              <a:t> latent-SDE ELBO; the path KL comes from Girsanov.</a:t>
+            </a:r>
+            <a:endParaRPr lang="en-US" sz="1700" dirty="0"/>
+          </a:p>
+        </p:txBody>
+      </p:sp>
       <p:sp>
         <p:nvSpPr>
           <p:cNvPr id="25" name="Slide Number Placeholder 0"/>
@@ -20062,7 +18762,7 @@
                   <a:srgbClr val="1F2328"/>
                 </a:solidFill>
               </a:rPr>
-              <a:t>Which estimator would you train P(τ ≤ t*) with: surrogate, bridge crossing, or score function?</a:t>
+              <a:t>Which estimator for P(τ ≤ t*): surrogate, bridge crossing, or score function?</a:t>
             </a:r>
             <a:endParaRPr lang="en-US" sz="1600" dirty="0"/>
           </a:p>
@@ -20134,7 +18834,7 @@
                   <a:srgbClr val="1F2328"/>
                 </a:solidFill>
               </a:rPr>
-              <a:t>Slide 13 suggests extra spread at low temperature. How would you test whether σ depends on temperature?</a:t>
+              <a:t>Does σ depend on temperature? How would you test it on this data?</a:t>
             </a:r>
             <a:endParaRPr lang="en-US" sz="1600" dirty="0"/>
           </a:p>
@@ -20206,7 +18906,7 @@
                   <a:srgbClr val="1F2328"/>
                 </a:solidFill>
               </a:rPr>
-              <a:t>Which differentiable simulator from this course would you make stochastic, and what happens to its gradients?</a:t>
+              <a:t>Which simulator from this course would you make stochastic? What happens to gradients?</a:t>
             </a:r>
             <a:endParaRPr lang="en-US" sz="1600" dirty="0"/>
           </a:p>
@@ -20886,7 +19586,7 @@
                   <a:srgbClr val="1F2328"/>
                 </a:solidFill>
               </a:rPr>
-              <a:t>Stratonovich SDEs obey the ordinary chain rule, so the ODE adjoint carries over term by term.</a:t>
+              <a:t>Stratonovich obeys the ordinary chain rule, so the ODE adjoint carries over.</a:t>
             </a:r>
             <a:endParaRPr lang="en-US" sz="1250" dirty="0"/>
           </a:p>
@@ -22163,8 +20863,11 @@
                   <a:srgbClr val="6B7280"/>
                 </a:solidFill>
               </a:rPr>
-              <a:t>same σσᵀ; Novikov: E_P exp(½∫‖u‖²dt) &lt; ∞. </a:t>
+              <a:t>same σσᵀ; Novikov: E_P exp(½∫‖u‖²dt) &lt; ∞.</a:t>
             </a:r>
+            <a:endParaRPr lang="en-US" sz="1150" dirty="0"/>
+          </a:p>
+          <a:p>
             <a:pPr indent="0" marL="0">
               <a:buNone/>
             </a:pPr>
@@ -22185,7 +20888,7 @@
                   <a:srgbClr val="6B7280"/>
                 </a:solidFill>
               </a:rPr>
-              <a:t>dℓ = ½‖u‖² dt appended to the state; ℓ_T is a one-sample MC estimate.</a:t>
+              <a:t>append dℓ = ½‖u‖² dt to the state; ℓ_T is a one-sample estimate.</a:t>
             </a:r>
             <a:endParaRPr lang="en-US" sz="1150" dirty="0"/>
           </a:p>
@@ -22563,8 +21266,8 @@
         </p:nvSpPr>
         <p:spPr>
           <a:xfrm>
-            <a:off x="457200" y="3429000"/>
-            <a:ext cx="8229600" cy="548640"/>
+            <a:off x="457200" y="3383280"/>
+            <a:ext cx="8229600" cy="685800"/>
           </a:xfrm>
           <a:prstGeom prst="rect">
             <a:avLst/>
@@ -22585,7 +21288,35 @@
                   <a:srgbClr val="6B7280"/>
                 </a:solidFill>
               </a:rPr>
-              <a:t>Rates from Table 4: v₁₀ = 0.228, v₂₀ = 0.473, v_amb = 0.518 stages/day. MAE used as a proxy for sd (assumes small CV); quantization predicts v₂₀/v too; labeling noise ignored.</a:t>
+              <a:t>Rates (Table 4): v₁₀ = 0.228, v₂₀ = 0.473, v_amb = 0.518 stages/day.</a:t>
+            </a:r>
+            <a:endParaRPr lang="en-US" sz="1100" dirty="0"/>
+          </a:p>
+          <a:p>
+            <a:pPr indent="0" marL="0">
+              <a:buNone/>
+            </a:pPr>
+            <a:r>
+              <a:rPr lang="en-US" sz="1100" dirty="0">
+                <a:solidFill>
+                  <a:srgbClr val="6B7280"/>
+                </a:solidFill>
+              </a:rPr>
+              <a:t>Assumes MAE ∝ sd (small CV). Quantization also predicts v₂₀/v₁₀.</a:t>
+            </a:r>
+            <a:endParaRPr lang="en-US" sz="1100" dirty="0"/>
+          </a:p>
+          <a:p>
+            <a:pPr indent="0" marL="0">
+              <a:buNone/>
+            </a:pPr>
+            <a:r>
+              <a:rPr lang="en-US" sz="1100" dirty="0">
+                <a:solidFill>
+                  <a:srgbClr val="6B7280"/>
+                </a:solidFill>
+              </a:rPr>
+              <a:t>Labeling noise ignored.</a:t>
             </a:r>
             <a:endParaRPr lang="en-US" sz="1100" dirty="0"/>
           </a:p>
@@ -24332,7 +23063,21 @@
                   <a:srgbClr val="6B7280"/>
                 </a:solidFill>
               </a:rPr>
-              <a:t>P(τ ≤ t*) ≈ 1 − Π_k (1 − p_k), p_k = 1 if an endpoint ≥ b.  σ_q² = ‖∇q(Z_k)ᵀ σ_θ(Z_k)‖².  Drift cancels after conditioning on endpoints.</a:t>
+              <a:t>P(τ ≤ t*) ≈ 1 − Π_k (1 − p_k), with p_k = 1 if an endpoint ≥ b.</a:t>
+            </a:r>
+            <a:endParaRPr lang="en-US" sz="1150" dirty="0"/>
+          </a:p>
+          <a:p>
+            <a:pPr indent="0" marL="0">
+              <a:buNone/>
+            </a:pPr>
+            <a:r>
+              <a:rPr lang="en-US" sz="1150" dirty="0">
+                <a:solidFill>
+                  <a:srgbClr val="6B7280"/>
+                </a:solidFill>
+              </a:rPr>
+              <a:t>σ_q² = ‖∇q(Z_k)ᵀ σ_θ(Z_k)‖². Drift cancels after conditioning on endpoints.</a:t>
             </a:r>
             <a:endParaRPr lang="en-US" sz="1150" dirty="0"/>
           </a:p>
@@ -24540,7 +23285,7 @@
                   <a:srgbClr val="1F2328"/>
                 </a:solidFill>
               </a:rPr>
-              <a:t>Match the solver to the calculus you wrote and the order to the quantity you need.</a:t>
+              <a:t>Match solver to your calculus, and order to the quantity you need.</a:t>
             </a:r>
             <a:endParaRPr lang="en-US" sz="1250" dirty="0"/>
           </a:p>
@@ -29180,6 +27925,996 @@
                 </a:solidFill>
               </a:rPr>
               <a:t>APPENDIX  ·  A9  ·  NOT PRESENTED</a:t>
+            </a:r>
+            <a:endParaRPr lang="en-US" sz="950" dirty="0"/>
+          </a:p>
+        </p:txBody>
+      </p:sp>
+      <p:sp>
+        <p:nvSpPr>
+          <p:cNvPr id="3" name="Text 0"/>
+          <p:cNvSpPr/>
+          <p:nvPr>
+            <p:ph idx="101" type="title" hasCustomPrompt="1"/>
+          </p:nvPr>
+        </p:nvSpPr>
+        <p:spPr>
+          <a:xfrm>
+            <a:off x="457200" y="493776"/>
+            <a:ext cx="8229600" cy="548640"/>
+          </a:xfrm>
+          <a:prstGeom prst="rect">
+            <a:avLst/>
+          </a:prstGeom>
+          <a:noFill/>
+          <a:ln/>
+        </p:spPr>
+        <p:txBody>
+          <a:bodyPr wrap="square" lIns="0" tIns="0" rIns="0" bIns="0" rtlCol="0" anchor="t"/>
+          <a:lstStyle/>
+          <a:p>
+            <a:pPr algn="l" indent="0" marL="0">
+              <a:buNone/>
+            </a:pPr>
+            <a:r>
+              <a:rPr lang="en-US" sz="2500" b="1" dirty="0">
+                <a:solidFill>
+                  <a:schemeClr val="tx1"/>
+                </a:solidFill>
+                <a:latin typeface="Arial" pitchFamily="34" charset="0"/>
+                <a:ea typeface="Arial" pitchFamily="34" charset="-122"/>
+                <a:cs typeface="Arial" pitchFamily="34" charset="-120"/>
+              </a:rPr>
+              <a:t>Evaluation Protocol (If Asked)</a:t>
+            </a:r>
+            <a:endParaRPr lang="en-US" sz="2500" dirty="0"/>
+          </a:p>
+        </p:txBody>
+      </p:sp>
+      <p:sp>
+        <p:nvSpPr>
+          <p:cNvPr id="4" name="Shape 2"/>
+          <p:cNvSpPr/>
+          <p:nvPr/>
+        </p:nvSpPr>
+        <p:spPr>
+          <a:xfrm>
+            <a:off x="457200" y="4370832"/>
+            <a:ext cx="8229600" cy="0"/>
+          </a:xfrm>
+          <a:prstGeom prst="line">
+            <a:avLst/>
+          </a:prstGeom>
+          <a:noFill/>
+          <a:ln w="12700">
+            <a:solidFill>
+              <a:srgbClr val="E5E7EB"/>
+            </a:solidFill>
+            <a:prstDash val="solid"/>
+          </a:ln>
+        </p:spPr>
+      </p:sp>
+      <p:sp>
+        <p:nvSpPr>
+          <p:cNvPr id="5" name="takeaway"/>
+          <p:cNvSpPr txBox="1"/>
+          <p:nvPr/>
+        </p:nvSpPr>
+        <p:spPr>
+          <a:xfrm>
+            <a:off x="457200" y="4425696"/>
+            <a:ext cx="7863840" cy="329184"/>
+          </a:xfrm>
+          <a:prstGeom prst="rect">
+            <a:avLst/>
+          </a:prstGeom>
+          <a:noFill/>
+          <a:ln/>
+        </p:spPr>
+        <p:txBody>
+          <a:bodyPr wrap="square" lIns="0" tIns="0" rIns="0" bIns="0" rtlCol="0" anchor="ctr"/>
+          <a:lstStyle/>
+          <a:p>
+            <a:pPr indent="0" marL="0">
+              <a:buNone/>
+            </a:pPr>
+            <a:r>
+              <a:rPr lang="en-US" sz="1250" b="1" dirty="0">
+                <a:solidFill>
+                  <a:srgbClr val="1F2328"/>
+                </a:solidFill>
+              </a:rPr>
+              <a:t>Same by-fruit split; CRPS and coverage reward a calibrated distribution.</a:t>
+            </a:r>
+            <a:endParaRPr lang="en-US" sz="1250" dirty="0"/>
+          </a:p>
+        </p:txBody>
+      </p:sp>
+      <p:graphicFrame>
+        <p:nvGraphicFramePr>
+          <p:cNvPr id="32" name="Table 0"/>
+          <p:cNvGraphicFramePr>
+            <a:graphicFrameLocks noGrp="1"/>
+          </p:cNvGraphicFramePr>
+          <p:nvPr>
+            <p:extLst>
+              <p:ext uri="{D42A27DB-BD31-4B8C-83A1-F6EECF244321}">
+                <p14:modId xmlns:p14="http://schemas.microsoft.com/office/powerpoint/2010/main" val="1579011935"/>
+              </p:ext>
+            </p:extLst>
+          </p:nvPr>
+        </p:nvGraphicFramePr>
+        <p:xfrm>
+          <a:off x="457200" y="1280160"/>
+          <a:ext cx="8229600" cy="914400"/>
+        </p:xfrm>
+        <a:graphic>
+          <a:graphicData uri="http://schemas.openxmlformats.org/drawingml/2006/table">
+            <a:tbl>
+              <a:tblPr/>
+              <a:tblGrid>
+                <a:gridCol w="2743200"/>
+                <a:gridCol w="2560320"/>
+                <a:gridCol w="2926080"/>
+              </a:tblGrid>
+              <a:tr h="365760">
+                <a:tc>
+                  <a:txBody>
+                    <a:bodyPr/>
+                    <a:lstStyle/>
+                    <a:p>
+                      <a:pPr algn="l" indent="0" marL="0">
+                        <a:buNone/>
+                      </a:pPr>
+                      <a:r>
+                        <a:rPr lang="en-US" sz="1050" b="1" dirty="0">
+                          <a:solidFill>
+                            <a:srgbClr val="6B7280"/>
+                          </a:solidFill>
+                          <a:latin typeface="Calibri" pitchFamily="34" charset="0"/>
+                          <a:ea typeface="Calibri" pitchFamily="34" charset="-122"/>
+                          <a:cs typeface="Calibri" pitchFamily="34" charset="-120"/>
+                        </a:rPr>
+                        <a:t>Shelf-life metric</a:t>
+                      </a:r>
+                      <a:endParaRPr lang="en-US" sz="1050" dirty="0">
+                        <a:latin typeface="Calibri" charset="0"/>
+                        <a:ea typeface="Calibri" charset="0"/>
+                        <a:cs typeface="Calibri" charset="0"/>
+                      </a:endParaRPr>
+                    </a:p>
+                  </a:txBody>
+                  <a:tcPr marL="54864" marR="54864" marT="18288" marB="18288" anchor="ctr">
+                    <a:lnL w="0" cap="flat" cmpd="sng" algn="ctr">
+                      <a:noFill/>
+                    </a:lnL>
+                    <a:lnR w="0" cap="flat" cmpd="sng" algn="ctr">
+                      <a:noFill/>
+                    </a:lnR>
+                    <a:lnT w="0" cap="flat" cmpd="sng" algn="ctr">
+                      <a:noFill/>
+                    </a:lnT>
+                    <a:lnB w="12700" cap="flat" cmpd="sng" algn="ctr">
+                      <a:solidFill>
+                        <a:srgbClr val="1F2328"/>
+                      </a:solidFill>
+                      <a:prstDash val="solid"/>
+                      <a:round/>
+                      <a:headEnd type="none" w="med" len="med"/>
+                      <a:tailEnd type="none" w="med" len="med"/>
+                    </a:lnB>
+                  </a:tcPr>
+                </a:tc>
+                <a:tc>
+                  <a:txBody>
+                    <a:bodyPr/>
+                    <a:lstStyle/>
+                    <a:p>
+                      <a:pPr algn="ctr" indent="0" marL="0">
+                        <a:buNone/>
+                      </a:pPr>
+                      <a:r>
+                        <a:rPr lang="en-US" sz="1050" b="1" dirty="0">
+                          <a:solidFill>
+                            <a:srgbClr val="6B7280"/>
+                          </a:solidFill>
+                          <a:latin typeface="Calibri" pitchFamily="34" charset="0"/>
+                          <a:ea typeface="Calibri" pitchFamily="34" charset="-122"/>
+                          <a:cs typeface="Calibri" pitchFamily="34" charset="-120"/>
+                        </a:rPr>
+                        <a:t>Xavier et al. (CNN + linear)</a:t>
+                      </a:r>
+                      <a:endParaRPr lang="en-US" sz="1050" dirty="0">
+                        <a:latin typeface="Calibri" charset="0"/>
+                        <a:ea typeface="Calibri" charset="0"/>
+                        <a:cs typeface="Calibri" charset="0"/>
+                      </a:endParaRPr>
+                    </a:p>
+                  </a:txBody>
+                  <a:tcPr marL="54864" marR="54864" marT="18288" marB="18288" anchor="ctr">
+                    <a:lnL w="0" cap="flat" cmpd="sng" algn="ctr">
+                      <a:noFill/>
+                    </a:lnL>
+                    <a:lnR w="0" cap="flat" cmpd="sng" algn="ctr">
+                      <a:noFill/>
+                    </a:lnR>
+                    <a:lnT w="0" cap="flat" cmpd="sng" algn="ctr">
+                      <a:noFill/>
+                    </a:lnT>
+                    <a:lnB w="12700" cap="flat" cmpd="sng" algn="ctr">
+                      <a:solidFill>
+                        <a:srgbClr val="1F2328"/>
+                      </a:solidFill>
+                      <a:prstDash val="solid"/>
+                      <a:round/>
+                      <a:headEnd type="none" w="med" len="med"/>
+                      <a:tailEnd type="none" w="med" len="med"/>
+                    </a:lnB>
+                  </a:tcPr>
+                </a:tc>
+                <a:tc>
+                  <a:txBody>
+                    <a:bodyPr/>
+                    <a:lstStyle/>
+                    <a:p>
+                      <a:pPr algn="ctr" indent="0" marL="0">
+                        <a:buNone/>
+                      </a:pPr>
+                      <a:r>
+                        <a:rPr lang="en-US" sz="1050" b="1" dirty="0">
+                          <a:solidFill>
+                            <a:srgbClr val="6B7280"/>
+                          </a:solidFill>
+                          <a:latin typeface="Calibri" pitchFamily="34" charset="0"/>
+                          <a:ea typeface="Calibri" pitchFamily="34" charset="-122"/>
+                          <a:cs typeface="Calibri" pitchFamily="34" charset="-120"/>
+                        </a:rPr>
+                        <a:t>What a latent SDE reports</a:t>
+                      </a:r>
+                      <a:endParaRPr lang="en-US" sz="1050" dirty="0">
+                        <a:latin typeface="Calibri" charset="0"/>
+                        <a:ea typeface="Calibri" charset="0"/>
+                        <a:cs typeface="Calibri" charset="0"/>
+                      </a:endParaRPr>
+                    </a:p>
+                  </a:txBody>
+                  <a:tcPr marL="54864" marR="54864" marT="18288" marB="18288" anchor="ctr">
+                    <a:lnL w="0" cap="flat" cmpd="sng" algn="ctr">
+                      <a:noFill/>
+                    </a:lnL>
+                    <a:lnR w="0" cap="flat" cmpd="sng" algn="ctr">
+                      <a:noFill/>
+                    </a:lnR>
+                    <a:lnT w="0" cap="flat" cmpd="sng" algn="ctr">
+                      <a:noFill/>
+                    </a:lnT>
+                    <a:lnB w="12700" cap="flat" cmpd="sng" algn="ctr">
+                      <a:solidFill>
+                        <a:srgbClr val="1F2328"/>
+                      </a:solidFill>
+                      <a:prstDash val="solid"/>
+                      <a:round/>
+                      <a:headEnd type="none" w="med" len="med"/>
+                      <a:tailEnd type="none" w="med" len="med"/>
+                    </a:lnB>
+                  </a:tcPr>
+                </a:tc>
+              </a:tr>
+              <a:tr h="365760">
+                <a:tc>
+                  <a:txBody>
+                    <a:bodyPr/>
+                    <a:lstStyle/>
+                    <a:p>
+                      <a:pPr algn="l" indent="0" marL="0">
+                        <a:buNone/>
+                      </a:pPr>
+                      <a:r>
+                        <a:rPr lang="en-US" sz="1150" dirty="0">
+                          <a:solidFill>
+                            <a:srgbClr val="1F2328"/>
+                          </a:solidFill>
+                          <a:latin typeface="Calibri" pitchFamily="34" charset="0"/>
+                          <a:ea typeface="Calibri" pitchFamily="34" charset="-122"/>
+                          <a:cs typeface="Calibri" pitchFamily="34" charset="-120"/>
+                        </a:rPr>
+                        <a:t>MAE, T10 / T20 / Tamb (days)</a:t>
+                      </a:r>
+                      <a:endParaRPr lang="en-US" sz="1150" dirty="0">
+                        <a:latin typeface="Calibri" charset="0"/>
+                        <a:ea typeface="Calibri" charset="0"/>
+                        <a:cs typeface="Calibri" charset="0"/>
+                      </a:endParaRPr>
+                    </a:p>
+                  </a:txBody>
+                  <a:tcPr marL="54864" marR="54864" marT="18288" marB="18288" anchor="ctr">
+                    <a:lnL w="0" cap="flat" cmpd="sng" algn="ctr">
+                      <a:noFill/>
+                    </a:lnL>
+                    <a:lnR w="0" cap="flat" cmpd="sng" algn="ctr">
+                      <a:noFill/>
+                    </a:lnR>
+                    <a:lnT w="0" cap="flat" cmpd="sng" algn="ctr">
+                      <a:noFill/>
+                    </a:lnT>
+                    <a:lnB w="6350" cap="flat" cmpd="sng" algn="ctr">
+                      <a:solidFill>
+                        <a:srgbClr val="E5E7EB"/>
+                      </a:solidFill>
+                      <a:prstDash val="solid"/>
+                      <a:round/>
+                      <a:headEnd type="none" w="med" len="med"/>
+                      <a:tailEnd type="none" w="med" len="med"/>
+                    </a:lnB>
+                  </a:tcPr>
+                </a:tc>
+                <a:tc>
+                  <a:txBody>
+                    <a:bodyPr/>
+                    <a:lstStyle/>
+                    <a:p>
+                      <a:pPr algn="ctr" indent="0" marL="0">
+                        <a:buNone/>
+                      </a:pPr>
+                      <a:r>
+                        <a:rPr lang="en-US" sz="1150" dirty="0">
+                          <a:solidFill>
+                            <a:srgbClr val="1F2328"/>
+                          </a:solidFill>
+                          <a:latin typeface="Calibri" pitchFamily="34" charset="0"/>
+                          <a:ea typeface="Calibri" pitchFamily="34" charset="-122"/>
+                          <a:cs typeface="Calibri" pitchFamily="34" charset="-120"/>
+                        </a:rPr>
+                        <a:t>1.82 / 0.75 / 0.54</a:t>
+                      </a:r>
+                      <a:endParaRPr lang="en-US" sz="1150" dirty="0">
+                        <a:latin typeface="Calibri" charset="0"/>
+                        <a:ea typeface="Calibri" charset="0"/>
+                        <a:cs typeface="Calibri" charset="0"/>
+                      </a:endParaRPr>
+                    </a:p>
+                  </a:txBody>
+                  <a:tcPr marL="54864" marR="54864" marT="18288" marB="18288" anchor="ctr">
+                    <a:lnL w="0" cap="flat" cmpd="sng" algn="ctr">
+                      <a:noFill/>
+                    </a:lnL>
+                    <a:lnR w="0" cap="flat" cmpd="sng" algn="ctr">
+                      <a:noFill/>
+                    </a:lnR>
+                    <a:lnT w="0" cap="flat" cmpd="sng" algn="ctr">
+                      <a:noFill/>
+                    </a:lnT>
+                    <a:lnB w="6350" cap="flat" cmpd="sng" algn="ctr">
+                      <a:solidFill>
+                        <a:srgbClr val="E5E7EB"/>
+                      </a:solidFill>
+                      <a:prstDash val="solid"/>
+                      <a:round/>
+                      <a:headEnd type="none" w="med" len="med"/>
+                      <a:tailEnd type="none" w="med" len="med"/>
+                    </a:lnB>
+                  </a:tcPr>
+                </a:tc>
+                <a:tc>
+                  <a:txBody>
+                    <a:bodyPr/>
+                    <a:lstStyle/>
+                    <a:p>
+                      <a:pPr algn="ctr" indent="0" marL="0">
+                        <a:buNone/>
+                      </a:pPr>
+                      <a:r>
+                        <a:rPr lang="en-US" sz="1150" dirty="0">
+                          <a:solidFill>
+                            <a:srgbClr val="1F2328"/>
+                          </a:solidFill>
+                          <a:latin typeface="Calibri" pitchFamily="34" charset="0"/>
+                          <a:ea typeface="Calibri" pitchFamily="34" charset="-122"/>
+                          <a:cs typeface="Calibri" pitchFamily="34" charset="-120"/>
+                        </a:rPr>
+                        <a:t>median of τ</a:t>
+                      </a:r>
+                      <a:endParaRPr lang="en-US" sz="1150" dirty="0">
+                        <a:latin typeface="Calibri" charset="0"/>
+                        <a:ea typeface="Calibri" charset="0"/>
+                        <a:cs typeface="Calibri" charset="0"/>
+                      </a:endParaRPr>
+                    </a:p>
+                  </a:txBody>
+                  <a:tcPr marL="54864" marR="54864" marT="18288" marB="18288" anchor="ctr">
+                    <a:lnL w="0" cap="flat" cmpd="sng" algn="ctr">
+                      <a:noFill/>
+                    </a:lnL>
+                    <a:lnR w="0" cap="flat" cmpd="sng" algn="ctr">
+                      <a:noFill/>
+                    </a:lnR>
+                    <a:lnT w="0" cap="flat" cmpd="sng" algn="ctr">
+                      <a:noFill/>
+                    </a:lnT>
+                    <a:lnB w="6350" cap="flat" cmpd="sng" algn="ctr">
+                      <a:solidFill>
+                        <a:srgbClr val="E5E7EB"/>
+                      </a:solidFill>
+                      <a:prstDash val="solid"/>
+                      <a:round/>
+                      <a:headEnd type="none" w="med" len="med"/>
+                      <a:tailEnd type="none" w="med" len="med"/>
+                    </a:lnB>
+                  </a:tcPr>
+                </a:tc>
+              </a:tr>
+              <a:tr h="365760">
+                <a:tc>
+                  <a:txBody>
+                    <a:bodyPr/>
+                    <a:lstStyle/>
+                    <a:p>
+                      <a:pPr algn="l" indent="0" marL="0">
+                        <a:buNone/>
+                      </a:pPr>
+                      <a:r>
+                        <a:rPr lang="en-US" sz="1150" dirty="0">
+                          <a:solidFill>
+                            <a:srgbClr val="1F2328"/>
+                          </a:solidFill>
+                          <a:latin typeface="Calibri" pitchFamily="34" charset="0"/>
+                          <a:ea typeface="Calibri" pitchFamily="34" charset="-122"/>
+                          <a:cs typeface="Calibri" pitchFamily="34" charset="-120"/>
+                        </a:rPr>
+                        <a:t>MAE, all (days)</a:t>
+                      </a:r>
+                      <a:endParaRPr lang="en-US" sz="1150" dirty="0">
+                        <a:latin typeface="Calibri" charset="0"/>
+                        <a:ea typeface="Calibri" charset="0"/>
+                        <a:cs typeface="Calibri" charset="0"/>
+                      </a:endParaRPr>
+                    </a:p>
+                  </a:txBody>
+                  <a:tcPr marL="54864" marR="54864" marT="18288" marB="18288" anchor="ctr">
+                    <a:lnL w="0" cap="flat" cmpd="sng" algn="ctr">
+                      <a:noFill/>
+                    </a:lnL>
+                    <a:lnR w="0" cap="flat" cmpd="sng" algn="ctr">
+                      <a:noFill/>
+                    </a:lnR>
+                    <a:lnT w="0" cap="flat" cmpd="sng" algn="ctr">
+                      <a:noFill/>
+                    </a:lnT>
+                    <a:lnB w="6350" cap="flat" cmpd="sng" algn="ctr">
+                      <a:solidFill>
+                        <a:srgbClr val="E5E7EB"/>
+                      </a:solidFill>
+                      <a:prstDash val="solid"/>
+                      <a:round/>
+                      <a:headEnd type="none" w="med" len="med"/>
+                      <a:tailEnd type="none" w="med" len="med"/>
+                    </a:lnB>
+                  </a:tcPr>
+                </a:tc>
+                <a:tc>
+                  <a:txBody>
+                    <a:bodyPr/>
+                    <a:lstStyle/>
+                    <a:p>
+                      <a:pPr algn="ctr" indent="0" marL="0">
+                        <a:buNone/>
+                      </a:pPr>
+                      <a:r>
+                        <a:rPr lang="en-US" sz="1150" dirty="0">
+                          <a:solidFill>
+                            <a:srgbClr val="1F2328"/>
+                          </a:solidFill>
+                          <a:latin typeface="Calibri" pitchFamily="34" charset="0"/>
+                          <a:ea typeface="Calibri" pitchFamily="34" charset="-122"/>
+                          <a:cs typeface="Calibri" pitchFamily="34" charset="-120"/>
+                        </a:rPr>
+                        <a:t>1.04</a:t>
+                      </a:r>
+                      <a:endParaRPr lang="en-US" sz="1150" dirty="0">
+                        <a:latin typeface="Calibri" charset="0"/>
+                        <a:ea typeface="Calibri" charset="0"/>
+                        <a:cs typeface="Calibri" charset="0"/>
+                      </a:endParaRPr>
+                    </a:p>
+                  </a:txBody>
+                  <a:tcPr marL="54864" marR="54864" marT="18288" marB="18288" anchor="ctr">
+                    <a:lnL w="0" cap="flat" cmpd="sng" algn="ctr">
+                      <a:noFill/>
+                    </a:lnL>
+                    <a:lnR w="0" cap="flat" cmpd="sng" algn="ctr">
+                      <a:noFill/>
+                    </a:lnR>
+                    <a:lnT w="0" cap="flat" cmpd="sng" algn="ctr">
+                      <a:noFill/>
+                    </a:lnT>
+                    <a:lnB w="6350" cap="flat" cmpd="sng" algn="ctr">
+                      <a:solidFill>
+                        <a:srgbClr val="E5E7EB"/>
+                      </a:solidFill>
+                      <a:prstDash val="solid"/>
+                      <a:round/>
+                      <a:headEnd type="none" w="med" len="med"/>
+                      <a:tailEnd type="none" w="med" len="med"/>
+                    </a:lnB>
+                  </a:tcPr>
+                </a:tc>
+                <a:tc>
+                  <a:txBody>
+                    <a:bodyPr/>
+                    <a:lstStyle/>
+                    <a:p>
+                      <a:pPr algn="ctr" indent="0" marL="0">
+                        <a:buNone/>
+                      </a:pPr>
+                      <a:r>
+                        <a:rPr lang="en-US" sz="1150" dirty="0">
+                          <a:solidFill>
+                            <a:srgbClr val="1F2328"/>
+                          </a:solidFill>
+                          <a:latin typeface="Calibri" pitchFamily="34" charset="0"/>
+                          <a:ea typeface="Calibri" pitchFamily="34" charset="-122"/>
+                          <a:cs typeface="Calibri" pitchFamily="34" charset="-120"/>
+                        </a:rPr>
+                        <a:t>median of τ</a:t>
+                      </a:r>
+                      <a:endParaRPr lang="en-US" sz="1150" dirty="0">
+                        <a:latin typeface="Calibri" charset="0"/>
+                        <a:ea typeface="Calibri" charset="0"/>
+                        <a:cs typeface="Calibri" charset="0"/>
+                      </a:endParaRPr>
+                    </a:p>
+                  </a:txBody>
+                  <a:tcPr marL="54864" marR="54864" marT="18288" marB="18288" anchor="ctr">
+                    <a:lnL w="0" cap="flat" cmpd="sng" algn="ctr">
+                      <a:noFill/>
+                    </a:lnL>
+                    <a:lnR w="0" cap="flat" cmpd="sng" algn="ctr">
+                      <a:noFill/>
+                    </a:lnR>
+                    <a:lnT w="0" cap="flat" cmpd="sng" algn="ctr">
+                      <a:noFill/>
+                    </a:lnT>
+                    <a:lnB w="6350" cap="flat" cmpd="sng" algn="ctr">
+                      <a:solidFill>
+                        <a:srgbClr val="E5E7EB"/>
+                      </a:solidFill>
+                      <a:prstDash val="solid"/>
+                      <a:round/>
+                      <a:headEnd type="none" w="med" len="med"/>
+                      <a:tailEnd type="none" w="med" len="med"/>
+                    </a:lnB>
+                  </a:tcPr>
+                </a:tc>
+              </a:tr>
+              <a:tr h="365760">
+                <a:tc>
+                  <a:txBody>
+                    <a:bodyPr/>
+                    <a:lstStyle/>
+                    <a:p>
+                      <a:pPr algn="l" indent="0" marL="0">
+                        <a:buNone/>
+                      </a:pPr>
+                      <a:r>
+                        <a:rPr lang="en-US" sz="1150" dirty="0">
+                          <a:solidFill>
+                            <a:srgbClr val="1F2328"/>
+                          </a:solidFill>
+                          <a:latin typeface="Calibri" pitchFamily="34" charset="0"/>
+                          <a:ea typeface="Calibri" pitchFamily="34" charset="-122"/>
+                          <a:cs typeface="Calibri" pitchFamily="34" charset="-120"/>
+                        </a:rPr>
+                        <a:t>CRPS of τ, all (days)</a:t>
+                      </a:r>
+                      <a:endParaRPr lang="en-US" sz="1150" dirty="0">
+                        <a:latin typeface="Calibri" charset="0"/>
+                        <a:ea typeface="Calibri" charset="0"/>
+                        <a:cs typeface="Calibri" charset="0"/>
+                      </a:endParaRPr>
+                    </a:p>
+                  </a:txBody>
+                  <a:tcPr marL="54864" marR="54864" marT="18288" marB="18288" anchor="ctr">
+                    <a:lnL w="0" cap="flat" cmpd="sng" algn="ctr">
+                      <a:noFill/>
+                    </a:lnL>
+                    <a:lnR w="0" cap="flat" cmpd="sng" algn="ctr">
+                      <a:noFill/>
+                    </a:lnR>
+                    <a:lnT w="0" cap="flat" cmpd="sng" algn="ctr">
+                      <a:noFill/>
+                    </a:lnT>
+                    <a:lnB w="6350" cap="flat" cmpd="sng" algn="ctr">
+                      <a:solidFill>
+                        <a:srgbClr val="E5E7EB"/>
+                      </a:solidFill>
+                      <a:prstDash val="solid"/>
+                      <a:round/>
+                      <a:headEnd type="none" w="med" len="med"/>
+                      <a:tailEnd type="none" w="med" len="med"/>
+                    </a:lnB>
+                  </a:tcPr>
+                </a:tc>
+                <a:tc>
+                  <a:txBody>
+                    <a:bodyPr/>
+                    <a:lstStyle/>
+                    <a:p>
+                      <a:pPr algn="ctr" indent="0" marL="0">
+                        <a:buNone/>
+                      </a:pPr>
+                      <a:r>
+                        <a:rPr lang="en-US" sz="1150" dirty="0">
+                          <a:solidFill>
+                            <a:srgbClr val="1F2328"/>
+                          </a:solidFill>
+                          <a:latin typeface="Calibri" pitchFamily="34" charset="0"/>
+                          <a:ea typeface="Calibri" pitchFamily="34" charset="-122"/>
+                          <a:cs typeface="Calibri" pitchFamily="34" charset="-120"/>
+                        </a:rPr>
+                        <a:t>1.04 (= MAE for a point)</a:t>
+                      </a:r>
+                      <a:endParaRPr lang="en-US" sz="1150" dirty="0">
+                        <a:latin typeface="Calibri" charset="0"/>
+                        <a:ea typeface="Calibri" charset="0"/>
+                        <a:cs typeface="Calibri" charset="0"/>
+                      </a:endParaRPr>
+                    </a:p>
+                  </a:txBody>
+                  <a:tcPr marL="54864" marR="54864" marT="18288" marB="18288" anchor="ctr">
+                    <a:lnL w="0" cap="flat" cmpd="sng" algn="ctr">
+                      <a:noFill/>
+                    </a:lnL>
+                    <a:lnR w="0" cap="flat" cmpd="sng" algn="ctr">
+                      <a:noFill/>
+                    </a:lnR>
+                    <a:lnT w="0" cap="flat" cmpd="sng" algn="ctr">
+                      <a:noFill/>
+                    </a:lnT>
+                    <a:lnB w="6350" cap="flat" cmpd="sng" algn="ctr">
+                      <a:solidFill>
+                        <a:srgbClr val="E5E7EB"/>
+                      </a:solidFill>
+                      <a:prstDash val="solid"/>
+                      <a:round/>
+                      <a:headEnd type="none" w="med" len="med"/>
+                      <a:tailEnd type="none" w="med" len="med"/>
+                    </a:lnB>
+                  </a:tcPr>
+                </a:tc>
+                <a:tc>
+                  <a:txBody>
+                    <a:bodyPr/>
+                    <a:lstStyle/>
+                    <a:p>
+                      <a:pPr algn="ctr" indent="0" marL="0">
+                        <a:buNone/>
+                      </a:pPr>
+                      <a:r>
+                        <a:rPr lang="en-US" sz="1150" dirty="0">
+                          <a:solidFill>
+                            <a:srgbClr val="1F2328"/>
+                          </a:solidFill>
+                          <a:latin typeface="Calibri" pitchFamily="34" charset="0"/>
+                          <a:ea typeface="Calibri" pitchFamily="34" charset="-122"/>
+                          <a:cs typeface="Calibri" pitchFamily="34" charset="-120"/>
+                        </a:rPr>
+                        <a:t>full predictive distribution</a:t>
+                      </a:r>
+                      <a:endParaRPr lang="en-US" sz="1150" dirty="0">
+                        <a:latin typeface="Calibri" charset="0"/>
+                        <a:ea typeface="Calibri" charset="0"/>
+                        <a:cs typeface="Calibri" charset="0"/>
+                      </a:endParaRPr>
+                    </a:p>
+                  </a:txBody>
+                  <a:tcPr marL="54864" marR="54864" marT="18288" marB="18288" anchor="ctr">
+                    <a:lnL w="0" cap="flat" cmpd="sng" algn="ctr">
+                      <a:noFill/>
+                    </a:lnL>
+                    <a:lnR w="0" cap="flat" cmpd="sng" algn="ctr">
+                      <a:noFill/>
+                    </a:lnR>
+                    <a:lnT w="0" cap="flat" cmpd="sng" algn="ctr">
+                      <a:noFill/>
+                    </a:lnT>
+                    <a:lnB w="6350" cap="flat" cmpd="sng" algn="ctr">
+                      <a:solidFill>
+                        <a:srgbClr val="E5E7EB"/>
+                      </a:solidFill>
+                      <a:prstDash val="solid"/>
+                      <a:round/>
+                      <a:headEnd type="none" w="med" len="med"/>
+                      <a:tailEnd type="none" w="med" len="med"/>
+                    </a:lnB>
+                  </a:tcPr>
+                </a:tc>
+              </a:tr>
+              <a:tr h="365760">
+                <a:tc>
+                  <a:txBody>
+                    <a:bodyPr/>
+                    <a:lstStyle/>
+                    <a:p>
+                      <a:pPr algn="l" indent="0" marL="0">
+                        <a:buNone/>
+                      </a:pPr>
+                      <a:r>
+                        <a:rPr lang="en-US" sz="1150" dirty="0">
+                          <a:solidFill>
+                            <a:srgbClr val="1F2328"/>
+                          </a:solidFill>
+                          <a:latin typeface="Calibri" pitchFamily="34" charset="0"/>
+                          <a:ea typeface="Calibri" pitchFamily="34" charset="-122"/>
+                          <a:cs typeface="Calibri" pitchFamily="34" charset="-120"/>
+                        </a:rPr>
+                        <a:t>80% interval coverage</a:t>
+                      </a:r>
+                      <a:endParaRPr lang="en-US" sz="1150" dirty="0">
+                        <a:latin typeface="Calibri" charset="0"/>
+                        <a:ea typeface="Calibri" charset="0"/>
+                        <a:cs typeface="Calibri" charset="0"/>
+                      </a:endParaRPr>
+                    </a:p>
+                  </a:txBody>
+                  <a:tcPr marL="54864" marR="54864" marT="18288" marB="18288" anchor="ctr">
+                    <a:lnL w="0" cap="flat" cmpd="sng" algn="ctr">
+                      <a:noFill/>
+                    </a:lnL>
+                    <a:lnR w="0" cap="flat" cmpd="sng" algn="ctr">
+                      <a:noFill/>
+                    </a:lnR>
+                    <a:lnT w="0" cap="flat" cmpd="sng" algn="ctr">
+                      <a:noFill/>
+                    </a:lnT>
+                    <a:lnB w="6350" cap="flat" cmpd="sng" algn="ctr">
+                      <a:solidFill>
+                        <a:srgbClr val="E5E7EB"/>
+                      </a:solidFill>
+                      <a:prstDash val="solid"/>
+                      <a:round/>
+                      <a:headEnd type="none" w="med" len="med"/>
+                      <a:tailEnd type="none" w="med" len="med"/>
+                    </a:lnB>
+                  </a:tcPr>
+                </a:tc>
+                <a:tc>
+                  <a:txBody>
+                    <a:bodyPr/>
+                    <a:lstStyle/>
+                    <a:p>
+                      <a:pPr algn="ctr" indent="0" marL="0">
+                        <a:buNone/>
+                      </a:pPr>
+                      <a:r>
+                        <a:rPr lang="en-US" sz="1150" dirty="0">
+                          <a:solidFill>
+                            <a:srgbClr val="6B7280"/>
+                          </a:solidFill>
+                          <a:latin typeface="Calibri" pitchFamily="34" charset="0"/>
+                          <a:ea typeface="Calibri" pitchFamily="34" charset="-122"/>
+                          <a:cs typeface="Calibri" pitchFamily="34" charset="-120"/>
+                        </a:rPr>
+                        <a:t>n/a (no interval)</a:t>
+                      </a:r>
+                      <a:endParaRPr lang="en-US" sz="1150" dirty="0">
+                        <a:latin typeface="Calibri" charset="0"/>
+                        <a:ea typeface="Calibri" charset="0"/>
+                        <a:cs typeface="Calibri" charset="0"/>
+                      </a:endParaRPr>
+                    </a:p>
+                  </a:txBody>
+                  <a:tcPr marL="54864" marR="54864" marT="18288" marB="18288" anchor="ctr">
+                    <a:lnL w="0" cap="flat" cmpd="sng" algn="ctr">
+                      <a:noFill/>
+                    </a:lnL>
+                    <a:lnR w="0" cap="flat" cmpd="sng" algn="ctr">
+                      <a:noFill/>
+                    </a:lnR>
+                    <a:lnT w="0" cap="flat" cmpd="sng" algn="ctr">
+                      <a:noFill/>
+                    </a:lnT>
+                    <a:lnB w="6350" cap="flat" cmpd="sng" algn="ctr">
+                      <a:solidFill>
+                        <a:srgbClr val="E5E7EB"/>
+                      </a:solidFill>
+                      <a:prstDash val="solid"/>
+                      <a:round/>
+                      <a:headEnd type="none" w="med" len="med"/>
+                      <a:tailEnd type="none" w="med" len="med"/>
+                    </a:lnB>
+                  </a:tcPr>
+                </a:tc>
+                <a:tc>
+                  <a:txBody>
+                    <a:bodyPr/>
+                    <a:lstStyle/>
+                    <a:p>
+                      <a:pPr algn="ctr" indent="0" marL="0">
+                        <a:buNone/>
+                      </a:pPr>
+                      <a:r>
+                        <a:rPr lang="en-US" sz="1150" dirty="0">
+                          <a:solidFill>
+                            <a:srgbClr val="1F2328"/>
+                          </a:solidFill>
+                          <a:latin typeface="Calibri" pitchFamily="34" charset="0"/>
+                          <a:ea typeface="Calibri" pitchFamily="34" charset="-122"/>
+                          <a:cs typeface="Calibri" pitchFamily="34" charset="-120"/>
+                        </a:rPr>
+                        <a:t>should be ≈ 80%</a:t>
+                      </a:r>
+                      <a:endParaRPr lang="en-US" sz="1150" dirty="0">
+                        <a:latin typeface="Calibri" charset="0"/>
+                        <a:ea typeface="Calibri" charset="0"/>
+                        <a:cs typeface="Calibri" charset="0"/>
+                      </a:endParaRPr>
+                    </a:p>
+                  </a:txBody>
+                  <a:tcPr marL="54864" marR="54864" marT="18288" marB="18288" anchor="ctr">
+                    <a:lnL w="0" cap="flat" cmpd="sng" algn="ctr">
+                      <a:noFill/>
+                    </a:lnL>
+                    <a:lnR w="0" cap="flat" cmpd="sng" algn="ctr">
+                      <a:noFill/>
+                    </a:lnR>
+                    <a:lnT w="0" cap="flat" cmpd="sng" algn="ctr">
+                      <a:noFill/>
+                    </a:lnT>
+                    <a:lnB w="6350" cap="flat" cmpd="sng" algn="ctr">
+                      <a:solidFill>
+                        <a:srgbClr val="E5E7EB"/>
+                      </a:solidFill>
+                      <a:prstDash val="solid"/>
+                      <a:round/>
+                      <a:headEnd type="none" w="med" len="med"/>
+                      <a:tailEnd type="none" w="med" len="med"/>
+                    </a:lnB>
+                  </a:tcPr>
+                </a:tc>
+              </a:tr>
+            </a:tbl>
+          </a:graphicData>
+        </a:graphic>
+      </p:graphicFrame>
+      <p:sp>
+        <p:nvSpPr>
+          <p:cNvPr id="7" name="Text 4"/>
+          <p:cNvSpPr txBox="1"/>
+          <p:nvPr/>
+        </p:nvSpPr>
+        <p:spPr>
+          <a:xfrm>
+            <a:off x="457200" y="3291840"/>
+            <a:ext cx="7315200" cy="201168"/>
+          </a:xfrm>
+          <a:prstGeom prst="rect">
+            <a:avLst/>
+          </a:prstGeom>
+          <a:noFill/>
+          <a:ln/>
+        </p:spPr>
+        <p:txBody>
+          <a:bodyPr wrap="square" lIns="0" tIns="0" rIns="0" bIns="0" rtlCol="0" anchor="t"/>
+          <a:lstStyle/>
+          <a:p>
+            <a:pPr indent="0" marL="0">
+              <a:buNone/>
+            </a:pPr>
+            <a:r>
+              <a:rPr lang="en-US" sz="800" i="1" dirty="0">
+                <a:solidFill>
+                  <a:srgbClr val="6B7280"/>
+                </a:solidFill>
+              </a:rPr>
+              <a:t>Baseline: Table 6 (5-stage, by sample), Xavier, Rodrigues &amp; Silva, Foods 13:1150 (2024).</a:t>
+            </a:r>
+            <a:endParaRPr lang="en-US" sz="800" dirty="0"/>
+          </a:p>
+        </p:txBody>
+      </p:sp>
+      <p:sp>
+        <p:nvSpPr>
+          <p:cNvPr id="25" name="Slide Number Placeholder 0"/>
+          <p:cNvSpPr>
+            <a:spLocks noGrp="1"/>
+          </p:cNvSpPr>
+          <p:nvPr>
+            <p:ph type="sldNum" sz="quarter" idx="4294967295"/>
+          </p:nvPr>
+        </p:nvSpPr>
+        <p:spPr>
+          <a:xfrm>
+            <a:off x="8412480" y="4828032"/>
+            <a:ext cx="365760" cy="201168"/>
+          </a:xfrm>
+          <a:prstGeom prst="rect">
+            <a:avLst/>
+          </a:prstGeom>
+          <a:extLst>
+            <a:ext uri="{C572A759-6A51-4108-AA02-DFA0A04FC94B}">
+              <ma14:wrappingTextBoxFlag xmlns:ma14="http://schemas.microsoft.com/office/mac/drawingml/2011/main" val="0"/>
+            </a:ext>
+          </a:extLst>
+        </p:spPr>
+        <p:txBody>
+          <a:bodyPr/>
+          <a:lstStyle>
+            <a:lvl1pPr>
+              <a:defRPr sz="900">
+                <a:solidFill>
+                  <a:srgbClr val="6B7280"/>
+                </a:solidFill>
+              </a:defRPr>
+            </a:lvl1pPr>
+          </a:lstStyle>
+          <a:p>
+            <a:pPr algn="r"/>
+            <a:fld id="{F7021451-1387-4CA6-816F-3879F97B5CBC}" type="slidenum">
+              <a:rPr b="0" lang="en-US"/>
+              <a:t>31</a:t>
+            </a:fld>
+            <a:endParaRPr lang="en-US"/>
+          </a:p>
+        </p:txBody>
+      </p:sp>
+    </p:spTree>
+  </p:cSld>
+  <p:clrMapOvr>
+    <a:masterClrMapping/>
+  </p:clrMapOvr>
+</p:sld>
+</file>
+
+<file path=ppt/slides/slide32.xml><?xml version="1.0" encoding="utf-8"?>
+<p:sld xmlns:a="http://schemas.openxmlformats.org/drawingml/2006/main" xmlns:r="http://schemas.openxmlformats.org/officeDocument/2006/relationships" xmlns:p="http://schemas.openxmlformats.org/presentationml/2006/main">
+  <p:cSld name="Slide 32">
+    <p:spTree>
+      <p:nvGrpSpPr>
+        <p:cNvPr id="1" name=""/>
+        <p:cNvGrpSpPr/>
+        <p:nvPr/>
+      </p:nvGrpSpPr>
+      <p:grpSpPr>
+        <a:xfrm>
+          <a:off x="0" y="0"/>
+          <a:ext cx="0" cy="0"/>
+          <a:chOff x="0" y="0"/>
+          <a:chExt cx="0" cy="0"/>
+        </a:xfrm>
+      </p:grpSpPr>
+      <p:sp>
+        <p:nvSpPr>
+          <p:cNvPr id="2" name="Text 0"/>
+          <p:cNvSpPr/>
+          <p:nvPr>
+            <p:ph idx="100" type="body" hasCustomPrompt="1"/>
+          </p:nvPr>
+        </p:nvSpPr>
+        <p:spPr>
+          <a:xfrm>
+            <a:off x="457200" y="274320"/>
+            <a:ext cx="8229600" cy="256032"/>
+          </a:xfrm>
+          <a:prstGeom prst="rect">
+            <a:avLst/>
+          </a:prstGeom>
+          <a:noFill/>
+          <a:ln/>
+        </p:spPr>
+        <p:txBody>
+          <a:bodyPr wrap="square" lIns="0" tIns="0" rIns="0" bIns="0" rtlCol="0" anchor="t"/>
+          <a:lstStyle/>
+          <a:p>
+            <a:pPr indent="0" marL="0">
+              <a:buNone/>
+            </a:pPr>
+            <a:r>
+              <a:rPr lang="en-US" sz="950" b="1" spc="150" kern="0" dirty="0">
+                <a:solidFill>
+                  <a:schemeClr val="tx2"/>
+                </a:solidFill>
+              </a:rPr>
+              <a:t>APPENDIX  ·  A10  ·  NOT PRESENTED</a:t>
             </a:r>
             <a:endParaRPr lang="en-US" sz="950" dirty="0"/>
           </a:p>
@@ -29547,7 +29282,7 @@
             <a:pPr algn="r"/>
             <a:fld id="{F7021451-1387-4CA6-816F-3879F97B5CBC}" type="slidenum">
               <a:rPr b="0" lang="en-US"/>
-              <a:t>31</a:t>
+              <a:t>32</a:t>
             </a:fld>
             <a:endParaRPr lang="en-US"/>
           </a:p>
@@ -29710,7 +29445,7 @@
                   <a:srgbClr val="1F2328"/>
                 </a:solidFill>
               </a:rPr>
-              <a:t>The regression line is the drift; the error bars are the spread it leaves out.</a:t>
+              <a:t>Regression line = drift; error bars = the spread it leaves out.</a:t>
             </a:r>
             <a:endParaRPr lang="en-US" sz="1250" dirty="0"/>
           </a:p>
@@ -30637,7 +30372,7 @@
         <p:spPr>
           <a:xfrm>
             <a:off x="4983480" y="3474720"/>
-            <a:ext cx="3703320" cy="548640"/>
+            <a:ext cx="3703320" cy="274320"/>
           </a:xfrm>
           <a:prstGeom prst="rect">
             <a:avLst/>
@@ -30680,7 +30415,7 @@
                   <a:srgbClr val="6B7280"/>
                 </a:solidFill>
               </a:rPr>
-              <a:t> (spread around the line), memory of past images, uncertainty in τ.</a:t>
+              <a:t>, memory of past images, uncertainty in τ.</a:t>
             </a:r>
             <a:endParaRPr lang="en-US" sz="1150" dirty="0"/>
           </a:p>
@@ -30888,7 +30623,7 @@
                   <a:srgbClr val="1F2328"/>
                 </a:solidFill>
               </a:rPr>
-              <a:t>Stage quantization explains most of the error; the excess is largest at 10 °C, the longest horizon.</a:t>
+              <a:t>Quantization explains most error; the excess peaks at 10 °C, the longest horizon.</a:t>
             </a:r>
             <a:endParaRPr lang="en-US" sz="1250" dirty="0"/>
           </a:p>
@@ -31189,7 +30924,7 @@
                           <a:ea typeface="Calibri" pitchFamily="34" charset="-122"/>
                           <a:cs typeface="Calibri" pitchFamily="34" charset="-120"/>
                         </a:rPr>
-                        <a:t>floor / MAE</a:t>
+                        <a:t>share</a:t>
                       </a:r>
                       <a:endParaRPr lang="en-US" sz="950" dirty="0">
                         <a:latin typeface="Calibri" charset="0"/>
@@ -31965,7 +31700,7 @@
                   <a:srgbClr val="6B7280"/>
                 </a:solidFill>
               </a:rPr>
-              <a:t>MAE in days with attributed (human) labels, Table 6. Floor = MAE from position within a stage alone (uniform, width |α|).</a:t>
+              <a:t>MAE in days, attributed labels (Table 6). Floor: uniform position within a stage.</a:t>
             </a:r>
             <a:endParaRPr lang="en-US" sz="800" dirty="0"/>
           </a:p>
@@ -31980,7 +31715,7 @@
         <p:spPr>
           <a:xfrm>
             <a:off x="5440680" y="3154680"/>
-            <a:ext cx="3291840" cy="548640"/>
+            <a:ext cx="3291840" cy="274320"/>
           </a:xfrm>
           <a:prstGeom prst="rect">
             <a:avLst/>
@@ -32001,7 +31736,7 @@
                   <a:srgbClr val="6B7280"/>
                 </a:solidFill>
               </a:rPr>
-              <a:t>Errors up to </a:t>
+              <a:t>Errors reach </a:t>
             </a:r>
             <a:pPr indent="0" marL="0">
               <a:buNone/>
@@ -32023,7 +31758,7 @@
                   <a:srgbClr val="6B7280"/>
                 </a:solidFill>
               </a:rPr>
-              <a:t> at stages 1–4 (T10); the paper reports only the point.</a:t>
+              <a:t> at stages 1–4 (T10).</a:t>
             </a:r>
             <a:endParaRPr lang="en-US" sz="1150" dirty="0"/>
           </a:p>
@@ -35200,7 +34935,7 @@
                           <a:ea typeface="Calibri" pitchFamily="34" charset="-122"/>
                           <a:cs typeface="Calibri" pitchFamily="34" charset="-120"/>
                         </a:rPr>
-                        <a:t>backward solve, dim 2d + p</a:t>
+                        <a:t>backward solve (2d + p)</a:t>
                       </a:r>
                       <a:endParaRPr lang="en-US" sz="1150" dirty="0">
                         <a:latin typeface="Calibri" charset="0"/>
